--- a/docs/proposal/UchiHahaha_FleetIQGuardian_Final_Round2.pptx
+++ b/docs/proposal/UchiHahaha_FleetIQGuardian_Final_Round2.pptx
@@ -7420,7 +7420,7 @@
                 <a:ea typeface="Quattrocento Sans" pitchFamily="34" charset="-122"/>
                 <a:cs typeface="Quattrocento Sans" pitchFamily="34" charset="-120"/>
               </a:rPr>
-              <a:t>TỪ HÀNG ĐỢI RỦI RO</a:t>
+              <a:t>TỪ RỦI RO ĐẾN</a:t>
             </a:r>
             <a:endParaRPr lang="en-US" sz="3100" dirty="0"/>
           </a:p>
@@ -7437,7 +7437,7 @@
                 <a:ea typeface="Quattrocento Sans" pitchFamily="34" charset="-122"/>
                 <a:cs typeface="Quattrocento Sans" pitchFamily="34" charset="-120"/>
               </a:rPr>
-              <a:t>ĐẾN HƯỚNG DẪN CÓ BẰNG CHỨNG</a:t>
+              <a:t>COACHING CÓ CĂN CỨ</a:t>
             </a:r>
             <a:endParaRPr lang="en-US" sz="3100" dirty="0"/>
           </a:p>
@@ -8135,7 +8135,7 @@
                 <a:ea typeface="Quattrocento Sans" pitchFamily="34" charset="-122"/>
                 <a:cs typeface="Quattrocento Sans" pitchFamily="34" charset="-120"/>
               </a:rPr>
-              <a:t>18.000 FRAME ANALYSIS</a:t>
+              <a:t>10 TRIP ANALYSIS</a:t>
             </a:r>
             <a:endParaRPr lang="en-US" sz="860" dirty="0"/>
           </a:p>
@@ -12874,7 +12874,7 @@
                 <a:ea typeface="Quattrocento Sans" pitchFamily="34" charset="-122"/>
                 <a:cs typeface="Quattrocento Sans" pitchFamily="34" charset="-120"/>
               </a:rPr>
-              <a:t>MỘT ĐỐI TƯỢNG CÓ THỂ KIỂM TRA, KHÔNG PHẢI CẢNH BÁO HỘP ĐEN</a:t>
+              <a:t>MỘT KHUNG HÌNH, BỐN TÍN HIỆU CÓ THỂ KIỂM TRA</a:t>
             </a:r>
             <a:endParaRPr lang="en-US" sz="2700" dirty="0"/>
           </a:p>
@@ -12915,7 +12915,7 @@
                 <a:ea typeface="Quattrocento Sans" pitchFamily="34" charset="-122"/>
                 <a:cs typeface="Quattrocento Sans" pitchFamily="34" charset="-120"/>
               </a:rPr>
-              <a:t>Frame 551 minh họa cách reviewer truy ngược output perception về cảnh gốc.</a:t>
+              <a:t>Khung 1010 được đọc lại từ YOLOP overlay, artifact road/DMS/fusion và CSV sau full pipeline.</a:t>
             </a:r>
             <a:endParaRPr lang="en-US" sz="1080" dirty="0"/>
           </a:p>
@@ -13032,7 +13032,7 @@
         <p:spPr>
           <a:xfrm>
             <a:off x="640080" y="1828800"/>
-            <a:ext cx="5724144" cy="3337560"/>
+            <a:ext cx="6720840" cy="3337560"/>
           </a:xfrm>
           <a:prstGeom prst="rect">
             <a:avLst/>
@@ -13052,7 +13052,7 @@
       </p:sp>
       <p:pic>
         <p:nvPicPr>
-          <p:cNvPr id="10" name="Image 0" descr="C:\Users\admin\Documents\Projects\AutomotiveHacathon\docs\proposal\assets\t01d-motorcycle-evidence.png">    </p:cNvPr>
+          <p:cNvPr id="10" name="Image 0" descr="C:\Users\admin\Documents\Projects\AutomotiveHacathon\docs\proposal\assets\t01d-frame-1010-road-overlay.png">    </p:cNvPr>
           <p:cNvPicPr>
             <a:picLocks noChangeAspect="1"/>
           </p:cNvPicPr>
@@ -13066,8 +13066,8 @@
         </p:blipFill>
         <p:spPr>
           <a:xfrm>
-            <a:off x="804672" y="2029968"/>
-            <a:ext cx="5321808" cy="2990088"/>
+            <a:off x="804672" y="2002536"/>
+            <a:ext cx="6391656" cy="2999232"/>
           </a:xfrm>
           <a:prstGeom prst="rect">
             <a:avLst/>
@@ -13082,8 +13082,8 @@
         </p:nvSpPr>
         <p:spPr>
           <a:xfrm>
-            <a:off x="2103120" y="4572000"/>
-            <a:ext cx="1828800" cy="256032"/>
+            <a:off x="1874520" y="4572000"/>
+            <a:ext cx="4251960" cy="256032"/>
           </a:xfrm>
           <a:prstGeom prst="rect">
             <a:avLst/>
@@ -13109,8 +13109,8 @@
         </p:nvSpPr>
         <p:spPr>
           <a:xfrm>
-            <a:off x="2194560" y="4645152"/>
-            <a:ext cx="1645920" cy="91440"/>
+            <a:off x="1965960" y="4645152"/>
+            <a:ext cx="4069080" cy="91440"/>
           </a:xfrm>
           <a:prstGeom prst="rect">
             <a:avLst/>
@@ -13134,7 +13134,7 @@
                 <a:ea typeface="Quattrocento Sans" pitchFamily="34" charset="-122"/>
                 <a:cs typeface="Quattrocento Sans" pitchFamily="34" charset="-120"/>
               </a:rPr>
-              <a:t>CẢNH GỐC CÓ ANNOTATION</a:t>
+              <a:t>T01D · FRAME 1010 · YOLOP OVERLAY</a:t>
             </a:r>
             <a:endParaRPr lang="en-US" sz="750" dirty="0"/>
           </a:p>
@@ -13148,59 +13148,33 @@
         </p:nvSpPr>
         <p:spPr>
           <a:xfrm>
-            <a:off x="6748272" y="1828800"/>
-            <a:ext cx="2615184" cy="3337560"/>
+            <a:off x="7680960" y="1828800"/>
+            <a:ext cx="3822192" cy="914400"/>
           </a:xfrm>
           <a:prstGeom prst="rect">
             <a:avLst/>
           </a:prstGeom>
           <a:solidFill>
-            <a:srgbClr val="0B1020"/>
+            <a:srgbClr val="FFFFFF"/>
           </a:solidFill>
           <a:ln w="7620">
             <a:solidFill>
-              <a:srgbClr val="0B1020">
-                <a:alpha val="0"/>
-              </a:srgbClr>
-            </a:solidFill>
-            <a:prstDash val="solid"/>
-          </a:ln>
-        </p:spPr>
-      </p:sp>
-      <p:pic>
-        <p:nvPicPr>
-          <p:cNvPr id="14" name="Image 1" descr="C:\Users\admin\Documents\Projects\AutomotiveHacathon\docs\proposal\assets\t01d-motorcycle-crop.png">    </p:cNvPr>
-          <p:cNvPicPr>
-            <a:picLocks noChangeAspect="1"/>
-          </p:cNvPicPr>
-          <p:nvPr/>
-        </p:nvPicPr>
-        <p:blipFill>
-          <a:blip r:embed="rId2"/>
-          <a:stretch>
-            <a:fillRect/>
-          </a:stretch>
-        </p:blipFill>
-        <p:spPr>
-          <a:xfrm>
-            <a:off x="6912864" y="2011680"/>
-            <a:ext cx="2286000" cy="2286000"/>
-          </a:xfrm>
-          <a:prstGeom prst="rect">
-            <a:avLst/>
-          </a:prstGeom>
-        </p:spPr>
-      </p:pic>
-      <p:sp>
-        <p:nvSpPr>
-          <p:cNvPr id="15" name="Shape 11"/>
-          <p:cNvSpPr/>
-          <p:nvPr/>
-        </p:nvSpPr>
-        <p:spPr>
-          <a:xfrm>
-            <a:off x="7150608" y="4498848"/>
-            <a:ext cx="1783080" cy="256032"/>
+              <a:srgbClr val="CDCCCC"/>
+            </a:solidFill>
+            <a:prstDash val="solid"/>
+          </a:ln>
+        </p:spPr>
+      </p:sp>
+      <p:sp>
+        <p:nvSpPr>
+          <p:cNvPr id="14" name="Shape 11"/>
+          <p:cNvSpPr/>
+          <p:nvPr/>
+        </p:nvSpPr>
+        <p:spPr>
+          <a:xfrm>
+            <a:off x="7680960" y="1828800"/>
+            <a:ext cx="73152" cy="914400"/>
           </a:xfrm>
           <a:prstGeom prst="rect">
             <a:avLst/>
@@ -13220,53 +13194,96 @@
       </p:sp>
       <p:sp>
         <p:nvSpPr>
-          <p:cNvPr id="16" name="Text 12"/>
-          <p:cNvSpPr/>
-          <p:nvPr/>
-        </p:nvSpPr>
-        <p:spPr>
-          <a:xfrm>
-            <a:off x="7242048" y="4572000"/>
-            <a:ext cx="1600200" cy="91440"/>
-          </a:xfrm>
-          <a:prstGeom prst="rect">
-            <a:avLst/>
-          </a:prstGeom>
-          <a:noFill/>
-          <a:ln/>
-        </p:spPr>
-        <p:txBody>
-          <a:bodyPr wrap="square" lIns="0" tIns="0" rIns="0" bIns="0" rtlCol="0" anchor="ctr"/>
-          <a:lstStyle/>
-          <a:p>
-            <a:pPr algn="ctr" indent="0" marL="0">
-              <a:buNone/>
-            </a:pPr>
-            <a:r>
-              <a:rPr lang="en-US" sz="750" b="1" spc="60" kern="0" dirty="0">
-                <a:solidFill>
-                  <a:srgbClr val="FFFFFF"/>
-                </a:solidFill>
-                <a:latin typeface="Quattrocento Sans" pitchFamily="34" charset="0"/>
-                <a:ea typeface="Quattrocento Sans" pitchFamily="34" charset="-122"/>
-                <a:cs typeface="Quattrocento Sans" pitchFamily="34" charset="-120"/>
-              </a:rPr>
-              <a:t>CROP PHÓNG TO</a:t>
-            </a:r>
-            <a:endParaRPr lang="en-US" sz="750" dirty="0"/>
-          </a:p>
-        </p:txBody>
-      </p:sp>
-      <p:sp>
-        <p:nvSpPr>
-          <p:cNvPr id="17" name="Shape 13"/>
-          <p:cNvSpPr/>
-          <p:nvPr/>
-        </p:nvSpPr>
-        <p:spPr>
-          <a:xfrm>
-            <a:off x="9646920" y="1828800"/>
-            <a:ext cx="1856232" cy="1417320"/>
+          <p:cNvPr id="15" name="Text 12"/>
+          <p:cNvSpPr/>
+          <p:nvPr/>
+        </p:nvSpPr>
+        <p:spPr>
+          <a:xfrm>
+            <a:off x="7973568" y="2075688"/>
+            <a:ext cx="3200400" cy="164592"/>
+          </a:xfrm>
+          <a:prstGeom prst="rect">
+            <a:avLst/>
+          </a:prstGeom>
+          <a:noFill/>
+          <a:ln/>
+        </p:spPr>
+        <p:txBody>
+          <a:bodyPr wrap="square" lIns="0" tIns="0" rIns="0" bIns="0" rtlCol="0" anchor="ctr">
+            <a:normAutofit/>
+          </a:bodyPr>
+          <a:lstStyle/>
+          <a:p>
+            <a:pPr indent="0" marL="0">
+              <a:buNone/>
+            </a:pPr>
+            <a:r>
+              <a:rPr lang="en-US" sz="1120" b="1" dirty="0">
+                <a:solidFill>
+                  <a:srgbClr val="19226D"/>
+                </a:solidFill>
+                <a:latin typeface="Quattrocento Sans" pitchFamily="34" charset="0"/>
+                <a:ea typeface="Quattrocento Sans" pitchFamily="34" charset="-122"/>
+                <a:cs typeface="Quattrocento Sans" pitchFamily="34" charset="-120"/>
+              </a:rPr>
+              <a:t>ROAD / IN-LANE CAR</a:t>
+            </a:r>
+            <a:endParaRPr lang="en-US" sz="1120" dirty="0"/>
+          </a:p>
+        </p:txBody>
+      </p:sp>
+      <p:sp>
+        <p:nvSpPr>
+          <p:cNvPr id="16" name="Text 13"/>
+          <p:cNvSpPr/>
+          <p:nvPr/>
+        </p:nvSpPr>
+        <p:spPr>
+          <a:xfrm>
+            <a:off x="7973568" y="2359152"/>
+            <a:ext cx="3154680" cy="128016"/>
+          </a:xfrm>
+          <a:prstGeom prst="rect">
+            <a:avLst/>
+          </a:prstGeom>
+          <a:noFill/>
+          <a:ln/>
+        </p:spPr>
+        <p:txBody>
+          <a:bodyPr wrap="square" lIns="0" tIns="0" rIns="0" bIns="0" rtlCol="0" anchor="ctr">
+            <a:normAutofit/>
+          </a:bodyPr>
+          <a:lstStyle/>
+          <a:p>
+            <a:pPr indent="0" marL="0">
+              <a:buNone/>
+            </a:pPr>
+            <a:r>
+              <a:rPr lang="en-US" sz="880" dirty="0">
+                <a:solidFill>
+                  <a:srgbClr val="6B7A90"/>
+                </a:solidFill>
+                <a:latin typeface="Quattrocento Sans" pitchFamily="34" charset="0"/>
+                <a:ea typeface="Quattrocento Sans" pitchFamily="34" charset="-122"/>
+                <a:cs typeface="Quattrocento Sans" pitchFamily="34" charset="-120"/>
+              </a:rPr>
+              <a:t>20.40 m · TTC 1.601 s · confidence 0.8837</a:t>
+            </a:r>
+            <a:endParaRPr lang="en-US" sz="880" dirty="0"/>
+          </a:p>
+        </p:txBody>
+      </p:sp>
+      <p:sp>
+        <p:nvSpPr>
+          <p:cNvPr id="17" name="Shape 14"/>
+          <p:cNvSpPr/>
+          <p:nvPr/>
+        </p:nvSpPr>
+        <p:spPr>
+          <a:xfrm>
+            <a:off x="7680960" y="2907792"/>
+            <a:ext cx="3822192" cy="914400"/>
           </a:xfrm>
           <a:prstGeom prst="rect">
             <a:avLst/>
@@ -13284,24 +13301,24 @@
       </p:sp>
       <p:sp>
         <p:nvSpPr>
-          <p:cNvPr id="18" name="Shape 14"/>
-          <p:cNvSpPr/>
-          <p:nvPr/>
-        </p:nvSpPr>
-        <p:spPr>
-          <a:xfrm>
-            <a:off x="9646920" y="1828800"/>
-            <a:ext cx="73152" cy="1417320"/>
+          <p:cNvPr id="18" name="Shape 15"/>
+          <p:cNvSpPr/>
+          <p:nvPr/>
+        </p:nvSpPr>
+        <p:spPr>
+          <a:xfrm>
+            <a:off x="7680960" y="2907792"/>
+            <a:ext cx="73152" cy="914400"/>
           </a:xfrm>
           <a:prstGeom prst="rect">
             <a:avLst/>
           </a:prstGeom>
           <a:solidFill>
-            <a:srgbClr val="F37021"/>
+            <a:srgbClr val="034EA2"/>
           </a:solidFill>
           <a:ln w="7620">
             <a:solidFill>
-              <a:srgbClr val="F37021">
+              <a:srgbClr val="034EA2">
                 <a:alpha val="0"/>
               </a:srgbClr>
             </a:solidFill>
@@ -13311,14 +13328,14 @@
       </p:sp>
       <p:sp>
         <p:nvSpPr>
-          <p:cNvPr id="19" name="Text 15"/>
-          <p:cNvSpPr/>
-          <p:nvPr/>
-        </p:nvSpPr>
-        <p:spPr>
-          <a:xfrm>
-            <a:off x="9857232" y="2221992"/>
-            <a:ext cx="1389888" cy="347472"/>
+          <p:cNvPr id="19" name="Text 16"/>
+          <p:cNvSpPr/>
+          <p:nvPr/>
+        </p:nvSpPr>
+        <p:spPr>
+          <a:xfrm>
+            <a:off x="7973568" y="3154680"/>
+            <a:ext cx="3200400" cy="164592"/>
           </a:xfrm>
           <a:prstGeom prst="rect">
             <a:avLst/>
@@ -13332,11 +13349,11 @@
           </a:bodyPr>
           <a:lstStyle/>
           <a:p>
-            <a:pPr algn="ctr" indent="0" marL="0">
-              <a:buNone/>
-            </a:pPr>
-            <a:r>
-              <a:rPr lang="en-US" sz="1240" b="1" dirty="0">
+            <a:pPr indent="0" marL="0">
+              <a:buNone/>
+            </a:pPr>
+            <a:r>
+              <a:rPr lang="en-US" sz="1120" b="1" dirty="0">
                 <a:solidFill>
                   <a:srgbClr val="19226D"/>
                 </a:solidFill>
@@ -13344,39 +13361,22 @@
                 <a:ea typeface="Quattrocento Sans" pitchFamily="34" charset="-122"/>
                 <a:cs typeface="Quattrocento Sans" pitchFamily="34" charset="-120"/>
               </a:rPr>
-              <a:t>ĐỐI TƯỢNG</a:t>
-            </a:r>
-            <a:endParaRPr lang="en-US" sz="1240" dirty="0"/>
-          </a:p>
-          <a:p>
-            <a:pPr algn="ctr" indent="0" marL="0">
-              <a:buNone/>
-            </a:pPr>
-            <a:r>
-              <a:rPr lang="en-US" sz="1240" b="1" dirty="0">
-                <a:solidFill>
-                  <a:srgbClr val="19226D"/>
-                </a:solidFill>
-                <a:latin typeface="Quattrocento Sans" pitchFamily="34" charset="0"/>
-                <a:ea typeface="Quattrocento Sans" pitchFamily="34" charset="-122"/>
-                <a:cs typeface="Quattrocento Sans" pitchFamily="34" charset="-120"/>
-              </a:rPr>
-              <a:t>XE MÁY</a:t>
-            </a:r>
-            <a:endParaRPr lang="en-US" sz="1240" dirty="0"/>
-          </a:p>
-        </p:txBody>
-      </p:sp>
-      <p:sp>
-        <p:nvSpPr>
-          <p:cNvPr id="20" name="Text 16"/>
-          <p:cNvSpPr/>
-          <p:nvPr/>
-        </p:nvSpPr>
-        <p:spPr>
-          <a:xfrm>
-            <a:off x="9838944" y="2798064"/>
-            <a:ext cx="1444752" cy="201168"/>
+              <a:t>DMS / DROWSY</a:t>
+            </a:r>
+            <a:endParaRPr lang="en-US" sz="1120" dirty="0"/>
+          </a:p>
+        </p:txBody>
+      </p:sp>
+      <p:sp>
+        <p:nvSpPr>
+          <p:cNvPr id="20" name="Text 17"/>
+          <p:cNvSpPr/>
+          <p:nvPr/>
+        </p:nvSpPr>
+        <p:spPr>
+          <a:xfrm>
+            <a:off x="7973568" y="3438144"/>
+            <a:ext cx="3154680" cy="128016"/>
           </a:xfrm>
           <a:prstGeom prst="rect">
             <a:avLst/>
@@ -13390,34 +13390,34 @@
           </a:bodyPr>
           <a:lstStyle/>
           <a:p>
-            <a:pPr algn="ctr" indent="0" marL="0">
-              <a:buNone/>
-            </a:pPr>
-            <a:r>
-              <a:rPr lang="en-US" sz="740" dirty="0">
-                <a:solidFill>
-                  <a:srgbClr val="34506E"/>
-                </a:solidFill>
-                <a:latin typeface="Quattrocento Sans" pitchFamily="34" charset="0"/>
-                <a:ea typeface="Quattrocento Sans" pitchFamily="34" charset="-122"/>
-                <a:cs typeface="Quattrocento Sans" pitchFamily="34" charset="-120"/>
-              </a:rPr>
-              <a:t>Reviewer kiểm tra trực tiếp bbox và cảnh gốc.</a:t>
-            </a:r>
-            <a:endParaRPr lang="en-US" sz="740" dirty="0"/>
-          </a:p>
-        </p:txBody>
-      </p:sp>
-      <p:sp>
-        <p:nvSpPr>
-          <p:cNvPr id="21" name="Shape 17"/>
-          <p:cNvSpPr/>
-          <p:nvPr/>
-        </p:nvSpPr>
-        <p:spPr>
-          <a:xfrm>
-            <a:off x="9646920" y="3547872"/>
-            <a:ext cx="1856232" cy="1618488"/>
+            <a:pPr indent="0" marL="0">
+              <a:buNone/>
+            </a:pPr>
+            <a:r>
+              <a:rPr lang="en-US" sz="880" dirty="0">
+                <a:solidFill>
+                  <a:srgbClr val="6B7A90"/>
+                </a:solidFill>
+                <a:latin typeface="Quattrocento Sans" pitchFamily="34" charset="0"/>
+                <a:ea typeface="Quattrocento Sans" pitchFamily="34" charset="-122"/>
+                <a:cs typeface="Quattrocento Sans" pitchFamily="34" charset="-120"/>
+              </a:rPr>
+              <a:t>MediaPipe geometry · confidence 0.85</a:t>
+            </a:r>
+            <a:endParaRPr lang="en-US" sz="880" dirty="0"/>
+          </a:p>
+        </p:txBody>
+      </p:sp>
+      <p:sp>
+        <p:nvSpPr>
+          <p:cNvPr id="21" name="Shape 18"/>
+          <p:cNvSpPr/>
+          <p:nvPr/>
+        </p:nvSpPr>
+        <p:spPr>
+          <a:xfrm>
+            <a:off x="7680960" y="3986784"/>
+            <a:ext cx="3822192" cy="1179576"/>
           </a:xfrm>
           <a:prstGeom prst="rect">
             <a:avLst/>
@@ -13435,24 +13435,24 @@
       </p:sp>
       <p:sp>
         <p:nvSpPr>
-          <p:cNvPr id="22" name="Shape 18"/>
-          <p:cNvSpPr/>
-          <p:nvPr/>
-        </p:nvSpPr>
-        <p:spPr>
-          <a:xfrm>
-            <a:off x="9646920" y="3547872"/>
-            <a:ext cx="73152" cy="1618488"/>
+          <p:cNvPr id="22" name="Shape 19"/>
+          <p:cNvSpPr/>
+          <p:nvPr/>
+        </p:nvSpPr>
+        <p:spPr>
+          <a:xfrm>
+            <a:off x="7680960" y="3986784"/>
+            <a:ext cx="73152" cy="1179576"/>
           </a:xfrm>
           <a:prstGeom prst="rect">
             <a:avLst/>
           </a:prstGeom>
           <a:solidFill>
-            <a:srgbClr val="034EA2"/>
+            <a:srgbClr val="22B573"/>
           </a:solidFill>
           <a:ln w="7620">
             <a:solidFill>
-              <a:srgbClr val="034EA2">
+              <a:srgbClr val="22B573">
                 <a:alpha val="0"/>
               </a:srgbClr>
             </a:solidFill>
@@ -13462,14 +13462,14 @@
       </p:sp>
       <p:sp>
         <p:nvSpPr>
-          <p:cNvPr id="23" name="Text 19"/>
-          <p:cNvSpPr/>
-          <p:nvPr/>
-        </p:nvSpPr>
-        <p:spPr>
-          <a:xfrm>
-            <a:off x="9838944" y="3913632"/>
-            <a:ext cx="1444752" cy="164592"/>
+          <p:cNvPr id="23" name="Text 20"/>
+          <p:cNvSpPr/>
+          <p:nvPr/>
+        </p:nvSpPr>
+        <p:spPr>
+          <a:xfrm>
+            <a:off x="7973568" y="4224528"/>
+            <a:ext cx="3200400" cy="164592"/>
           </a:xfrm>
           <a:prstGeom prst="rect">
             <a:avLst/>
@@ -13483,34 +13483,34 @@
           </a:bodyPr>
           <a:lstStyle/>
           <a:p>
-            <a:pPr algn="ctr" indent="0" marL="0">
-              <a:buNone/>
-            </a:pPr>
-            <a:r>
-              <a:rPr lang="en-US" sz="1030" b="1" dirty="0">
-                <a:solidFill>
-                  <a:srgbClr val="034EA2"/>
-                </a:solidFill>
-                <a:latin typeface="Quattrocento Sans" pitchFamily="34" charset="0"/>
-                <a:ea typeface="Quattrocento Sans" pitchFamily="34" charset="-122"/>
-                <a:cs typeface="Quattrocento Sans" pitchFamily="34" charset="-120"/>
-              </a:rPr>
-              <a:t>VÙNG DEPTH ROI</a:t>
-            </a:r>
-            <a:endParaRPr lang="en-US" sz="1030" dirty="0"/>
-          </a:p>
-        </p:txBody>
-      </p:sp>
-      <p:sp>
-        <p:nvSpPr>
-          <p:cNvPr id="24" name="Text 20"/>
-          <p:cNvSpPr/>
-          <p:nvPr/>
-        </p:nvSpPr>
-        <p:spPr>
-          <a:xfrm>
-            <a:off x="9838944" y="4370832"/>
-            <a:ext cx="1444752" cy="256032"/>
+            <a:pPr indent="0" marL="0">
+              <a:buNone/>
+            </a:pPr>
+            <a:r>
+              <a:rPr lang="en-US" sz="1120" b="1" dirty="0">
+                <a:solidFill>
+                  <a:srgbClr val="19226D"/>
+                </a:solidFill>
+                <a:latin typeface="Quattrocento Sans" pitchFamily="34" charset="0"/>
+                <a:ea typeface="Quattrocento Sans" pitchFamily="34" charset="-122"/>
+                <a:cs typeface="Quattrocento Sans" pitchFamily="34" charset="-120"/>
+              </a:rPr>
+              <a:t>FUSION / RISK INDEX 51.0</a:t>
+            </a:r>
+            <a:endParaRPr lang="en-US" sz="1120" dirty="0"/>
+          </a:p>
+        </p:txBody>
+      </p:sp>
+      <p:sp>
+        <p:nvSpPr>
+          <p:cNvPr id="24" name="Text 21"/>
+          <p:cNvSpPr/>
+          <p:nvPr/>
+        </p:nvSpPr>
+        <p:spPr>
+          <a:xfrm>
+            <a:off x="7973568" y="4489704"/>
+            <a:ext cx="3182112" cy="292608"/>
           </a:xfrm>
           <a:prstGeom prst="rect">
             <a:avLst/>
@@ -13524,34 +13524,51 @@
           </a:bodyPr>
           <a:lstStyle/>
           <a:p>
-            <a:pPr algn="ctr" indent="0" marL="0">
-              <a:buNone/>
-            </a:pPr>
-            <a:r>
-              <a:rPr lang="en-US" sz="780" dirty="0">
-                <a:solidFill>
-                  <a:srgbClr val="34506E"/>
-                </a:solidFill>
-                <a:latin typeface="Quattrocento Sans" pitchFamily="34" charset="0"/>
-                <a:ea typeface="Quattrocento Sans" pitchFamily="34" charset="-122"/>
-                <a:cs typeface="Quattrocento Sans" pitchFamily="34" charset="-120"/>
-              </a:rPr>
-              <a:t>Khoảng cách được gắn cùng artifact của khung hình.</a:t>
-            </a:r>
-            <a:endParaRPr lang="en-US" sz="780" dirty="0"/>
-          </a:p>
-        </p:txBody>
-      </p:sp>
-      <p:sp>
-        <p:nvSpPr>
-          <p:cNvPr id="25" name="Text 21"/>
-          <p:cNvSpPr/>
-          <p:nvPr/>
-        </p:nvSpPr>
-        <p:spPr>
-          <a:xfrm>
-            <a:off x="9838944" y="4773168"/>
-            <a:ext cx="1444752" cy="146304"/>
+            <a:pPr indent="0" marL="0">
+              <a:buNone/>
+            </a:pPr>
+            <a:r>
+              <a:rPr lang="en-US" sz="810" dirty="0">
+                <a:solidFill>
+                  <a:srgbClr val="6B7A90"/>
+                </a:solidFill>
+                <a:latin typeface="Quattrocento Sans" pitchFamily="34" charset="0"/>
+                <a:ea typeface="Quattrocento Sans" pitchFamily="34" charset="-122"/>
+                <a:cs typeface="Quattrocento Sans" pitchFamily="34" charset="-120"/>
+              </a:rPr>
+              <a:t>TTC-risk + drowsiness + compound risk</a:t>
+            </a:r>
+            <a:endParaRPr lang="en-US" sz="810" dirty="0"/>
+          </a:p>
+          <a:p>
+            <a:pPr indent="0" marL="0">
+              <a:buNone/>
+            </a:pPr>
+            <a:r>
+              <a:rPr lang="en-US" sz="810" dirty="0">
+                <a:solidFill>
+                  <a:srgbClr val="6B7A90"/>
+                </a:solidFill>
+                <a:latin typeface="Quattrocento Sans" pitchFamily="34" charset="0"/>
+                <a:ea typeface="Quattrocento Sans" pitchFamily="34" charset="-122"/>
+                <a:cs typeface="Quattrocento Sans" pitchFamily="34" charset="-120"/>
+              </a:rPr>
+              <a:t>CSV: 1010, 50.500, 1.601, drowsy, 51.0</a:t>
+            </a:r>
+            <a:endParaRPr lang="en-US" sz="810" dirty="0"/>
+          </a:p>
+        </p:txBody>
+      </p:sp>
+      <p:sp>
+        <p:nvSpPr>
+          <p:cNvPr id="25" name="Text 22"/>
+          <p:cNvSpPr/>
+          <p:nvPr/>
+        </p:nvSpPr>
+        <p:spPr>
+          <a:xfrm>
+            <a:off x="548640" y="6071616"/>
+            <a:ext cx="10789920" cy="182880"/>
           </a:xfrm>
           <a:prstGeom prst="rect">
             <a:avLst/>
@@ -13565,47 +13582,6 @@
           </a:bodyPr>
           <a:lstStyle/>
           <a:p>
-            <a:pPr algn="ctr" indent="0" marL="0">
-              <a:buNone/>
-            </a:pPr>
-            <a:r>
-              <a:rPr lang="en-US" sz="690" b="1" dirty="0">
-                <a:solidFill>
-                  <a:srgbClr val="19226D"/>
-                </a:solidFill>
-                <a:latin typeface="Quattrocento Sans" pitchFamily="34" charset="0"/>
-                <a:ea typeface="Quattrocento Sans" pitchFamily="34" charset="-122"/>
-                <a:cs typeface="Quattrocento Sans" pitchFamily="34" charset="-120"/>
-              </a:rPr>
-              <a:t>Giữ false positive chồng lấp để thấy giới hạn model.</a:t>
-            </a:r>
-            <a:endParaRPr lang="en-US" sz="690" dirty="0"/>
-          </a:p>
-        </p:txBody>
-      </p:sp>
-      <p:sp>
-        <p:nvSpPr>
-          <p:cNvPr id="26" name="Text 22"/>
-          <p:cNvSpPr/>
-          <p:nvPr/>
-        </p:nvSpPr>
-        <p:spPr>
-          <a:xfrm>
-            <a:off x="548640" y="6071616"/>
-            <a:ext cx="10789920" cy="182880"/>
-          </a:xfrm>
-          <a:prstGeom prst="rect">
-            <a:avLst/>
-          </a:prstGeom>
-          <a:noFill/>
-          <a:ln/>
-        </p:spPr>
-        <p:txBody>
-          <a:bodyPr wrap="square" lIns="0" tIns="0" rIns="0" bIns="0" rtlCol="0" anchor="ctr">
-            <a:normAutofit/>
-          </a:bodyPr>
-          <a:lstStyle/>
-          <a:p>
             <a:pPr indent="0" marL="0">
               <a:buNone/>
             </a:pPr>
@@ -13618,7 +13594,7 @@
                 <a:ea typeface="Quattrocento Sans" pitchFamily="34" charset="-122"/>
                 <a:cs typeface="Quattrocento Sans" pitchFamily="34" charset="-120"/>
               </a:rPr>
-              <a:t>artifacts/trips/T01d/analysis/road/000551.json | rendered evidence frame | label comparison.</a:t>
+              <a:t>T01d/1010: road, DMS, fusion JSON; YOLOP overlay; predictions/UchiHahaha/T01d.csv.</a:t>
             </a:r>
             <a:endParaRPr lang="en-US" sz="980" dirty="0"/>
           </a:p>
@@ -15028,7 +15004,7 @@
         <p:spPr>
           <a:xfrm>
             <a:off x="658368" y="1783080"/>
-            <a:ext cx="1883664" cy="658368"/>
+            <a:ext cx="1554480" cy="658368"/>
           </a:xfrm>
           <a:prstGeom prst="rect">
             <a:avLst/>
@@ -15079,8 +15055,8 @@
         </p:nvSpPr>
         <p:spPr>
           <a:xfrm>
-            <a:off x="822960" y="1984248"/>
-            <a:ext cx="1554480" cy="182880"/>
+            <a:off x="786384" y="1984248"/>
+            <a:ext cx="1298448" cy="182880"/>
           </a:xfrm>
           <a:prstGeom prst="rect">
             <a:avLst/>
@@ -15098,7 +15074,7 @@
               <a:buNone/>
             </a:pPr>
             <a:r>
-              <a:rPr lang="en-US" sz="840" b="1" dirty="0">
+              <a:rPr lang="en-US" sz="810" b="1" dirty="0">
                 <a:solidFill>
                   <a:srgbClr val="19226D"/>
                 </a:solidFill>
@@ -15108,14 +15084,14 @@
               </a:rPr>
               <a:t>CAMERA</a:t>
             </a:r>
-            <a:endParaRPr lang="en-US" sz="840" dirty="0"/>
+            <a:endParaRPr lang="en-US" sz="810" dirty="0"/>
           </a:p>
           <a:p>
             <a:pPr algn="ctr" indent="0" marL="0">
               <a:buNone/>
             </a:pPr>
             <a:r>
-              <a:rPr lang="en-US" sz="840" b="1" dirty="0">
+              <a:rPr lang="en-US" sz="810" b="1" dirty="0">
                 <a:solidFill>
                   <a:srgbClr val="19226D"/>
                 </a:solidFill>
@@ -15125,7 +15101,7 @@
               </a:rPr>
               <a:t>ĐƯỜNG</a:t>
             </a:r>
-            <a:endParaRPr lang="en-US" sz="840" dirty="0"/>
+            <a:endParaRPr lang="en-US" sz="810" dirty="0"/>
           </a:p>
         </p:txBody>
       </p:sp>
@@ -15137,7 +15113,7 @@
         </p:nvSpPr>
         <p:spPr>
           <a:xfrm>
-            <a:off x="1600200" y="2487168"/>
+            <a:off x="1435608" y="2487168"/>
             <a:ext cx="0" cy="338328"/>
           </a:xfrm>
           <a:prstGeom prst="line">
@@ -15161,8 +15137,8 @@
         </p:nvSpPr>
         <p:spPr>
           <a:xfrm>
-            <a:off x="2871216" y="1783080"/>
-            <a:ext cx="1883664" cy="658368"/>
+            <a:off x="2286000" y="1783080"/>
+            <a:ext cx="1554480" cy="658368"/>
           </a:xfrm>
           <a:prstGeom prst="rect">
             <a:avLst/>
@@ -15186,7 +15162,124 @@
         </p:nvSpPr>
         <p:spPr>
           <a:xfrm>
-            <a:off x="2871216" y="1783080"/>
+            <a:off x="2286000" y="1783080"/>
+            <a:ext cx="73152" cy="658368"/>
+          </a:xfrm>
+          <a:prstGeom prst="rect">
+            <a:avLst/>
+          </a:prstGeom>
+          <a:solidFill>
+            <a:srgbClr val="034EA2"/>
+          </a:solidFill>
+          <a:ln w="7620">
+            <a:solidFill>
+              <a:srgbClr val="034EA2">
+                <a:alpha val="0"/>
+              </a:srgbClr>
+            </a:solidFill>
+            <a:prstDash val="solid"/>
+          </a:ln>
+        </p:spPr>
+      </p:sp>
+      <p:sp>
+        <p:nvSpPr>
+          <p:cNvPr id="15" name="Text 13"/>
+          <p:cNvSpPr/>
+          <p:nvPr/>
+        </p:nvSpPr>
+        <p:spPr>
+          <a:xfrm>
+            <a:off x="2414016" y="1984248"/>
+            <a:ext cx="1298448" cy="182880"/>
+          </a:xfrm>
+          <a:prstGeom prst="rect">
+            <a:avLst/>
+          </a:prstGeom>
+          <a:noFill/>
+          <a:ln/>
+        </p:spPr>
+        <p:txBody>
+          <a:bodyPr wrap="square" lIns="0" tIns="0" rIns="0" bIns="0" rtlCol="0" anchor="ctr">
+            <a:normAutofit/>
+          </a:bodyPr>
+          <a:lstStyle/>
+          <a:p>
+            <a:pPr algn="ctr" indent="0" marL="0">
+              <a:buNone/>
+            </a:pPr>
+            <a:r>
+              <a:rPr lang="en-US" sz="810" b="1" dirty="0">
+                <a:solidFill>
+                  <a:srgbClr val="19226D"/>
+                </a:solidFill>
+                <a:latin typeface="Quattrocento Sans" pitchFamily="34" charset="0"/>
+                <a:ea typeface="Quattrocento Sans" pitchFamily="34" charset="-122"/>
+                <a:cs typeface="Quattrocento Sans" pitchFamily="34" charset="-120"/>
+              </a:rPr>
+              <a:t>ĐỘ SÂU</a:t>
+            </a:r>
+            <a:endParaRPr lang="en-US" sz="810" dirty="0"/>
+          </a:p>
+        </p:txBody>
+      </p:sp>
+      <p:sp>
+        <p:nvSpPr>
+          <p:cNvPr id="16" name="Shape 14"/>
+          <p:cNvSpPr/>
+          <p:nvPr/>
+        </p:nvSpPr>
+        <p:spPr>
+          <a:xfrm>
+            <a:off x="3063240" y="2487168"/>
+            <a:ext cx="0" cy="338328"/>
+          </a:xfrm>
+          <a:prstGeom prst="line">
+            <a:avLst/>
+          </a:prstGeom>
+          <a:noFill/>
+          <a:ln w="16510">
+            <a:solidFill>
+              <a:srgbClr val="034EA2"/>
+            </a:solidFill>
+            <a:prstDash val="solid"/>
+            <a:tailEnd type="triangle"/>
+          </a:ln>
+        </p:spPr>
+      </p:sp>
+      <p:sp>
+        <p:nvSpPr>
+          <p:cNvPr id="17" name="Shape 15"/>
+          <p:cNvSpPr/>
+          <p:nvPr/>
+        </p:nvSpPr>
+        <p:spPr>
+          <a:xfrm>
+            <a:off x="5148072" y="1783080"/>
+            <a:ext cx="1554480" cy="658368"/>
+          </a:xfrm>
+          <a:prstGeom prst="rect">
+            <a:avLst/>
+          </a:prstGeom>
+          <a:solidFill>
+            <a:srgbClr val="FFFFFF"/>
+          </a:solidFill>
+          <a:ln w="7620">
+            <a:solidFill>
+              <a:srgbClr val="CDCCCC"/>
+            </a:solidFill>
+            <a:prstDash val="solid"/>
+          </a:ln>
+        </p:spPr>
+      </p:sp>
+      <p:sp>
+        <p:nvSpPr>
+          <p:cNvPr id="18" name="Shape 16"/>
+          <p:cNvSpPr/>
+          <p:nvPr/>
+        </p:nvSpPr>
+        <p:spPr>
+          <a:xfrm>
+            <a:off x="5148072" y="1783080"/>
             <a:ext cx="73152" cy="658368"/>
           </a:xfrm>
           <a:prstGeom prst="rect">
@@ -15207,14 +15300,14 @@
       </p:sp>
       <p:sp>
         <p:nvSpPr>
-          <p:cNvPr id="15" name="Text 13"/>
-          <p:cNvSpPr/>
-          <p:nvPr/>
-        </p:nvSpPr>
-        <p:spPr>
-          <a:xfrm>
-            <a:off x="3035808" y="1984248"/>
-            <a:ext cx="1554480" cy="182880"/>
+          <p:cNvPr id="19" name="Text 17"/>
+          <p:cNvSpPr/>
+          <p:nvPr/>
+        </p:nvSpPr>
+        <p:spPr>
+          <a:xfrm>
+            <a:off x="5276088" y="1984248"/>
+            <a:ext cx="1298448" cy="182880"/>
           </a:xfrm>
           <a:prstGeom prst="rect">
             <a:avLst/>
@@ -15232,7 +15325,7 @@
               <a:buNone/>
             </a:pPr>
             <a:r>
-              <a:rPr lang="en-US" sz="840" b="1" dirty="0">
+              <a:rPr lang="en-US" sz="810" b="1" dirty="0">
                 <a:solidFill>
                   <a:srgbClr val="19226D"/>
                 </a:solidFill>
@@ -15242,14 +15335,14 @@
               </a:rPr>
               <a:t>CAMERA</a:t>
             </a:r>
-            <a:endParaRPr lang="en-US" sz="840" dirty="0"/>
+            <a:endParaRPr lang="en-US" sz="810" dirty="0"/>
           </a:p>
           <a:p>
             <a:pPr algn="ctr" indent="0" marL="0">
               <a:buNone/>
             </a:pPr>
             <a:r>
-              <a:rPr lang="en-US" sz="840" b="1" dirty="0">
+              <a:rPr lang="en-US" sz="810" b="1" dirty="0">
                 <a:solidFill>
                   <a:srgbClr val="19226D"/>
                 </a:solidFill>
@@ -15259,19 +15352,19 @@
               </a:rPr>
               <a:t>TÀI XẾ</a:t>
             </a:r>
-            <a:endParaRPr lang="en-US" sz="840" dirty="0"/>
-          </a:p>
-        </p:txBody>
-      </p:sp>
-      <p:sp>
-        <p:nvSpPr>
-          <p:cNvPr id="16" name="Shape 14"/>
-          <p:cNvSpPr/>
-          <p:nvPr/>
-        </p:nvSpPr>
-        <p:spPr>
-          <a:xfrm>
-            <a:off x="3813048" y="2487168"/>
+            <a:endParaRPr lang="en-US" sz="810" dirty="0"/>
+          </a:p>
+        </p:txBody>
+      </p:sp>
+      <p:sp>
+        <p:nvSpPr>
+          <p:cNvPr id="20" name="Shape 18"/>
+          <p:cNvSpPr/>
+          <p:nvPr/>
+        </p:nvSpPr>
+        <p:spPr>
+          <a:xfrm>
+            <a:off x="5925312" y="2487168"/>
             <a:ext cx="0" cy="338328"/>
           </a:xfrm>
           <a:prstGeom prst="line">
@@ -15289,14 +15382,14 @@
       </p:sp>
       <p:sp>
         <p:nvSpPr>
-          <p:cNvPr id="17" name="Shape 15"/>
-          <p:cNvSpPr/>
-          <p:nvPr/>
-        </p:nvSpPr>
-        <p:spPr>
-          <a:xfrm>
-            <a:off x="5084064" y="1783080"/>
-            <a:ext cx="1883664" cy="658368"/>
+          <p:cNvPr id="21" name="Shape 19"/>
+          <p:cNvSpPr/>
+          <p:nvPr/>
+        </p:nvSpPr>
+        <p:spPr>
+          <a:xfrm>
+            <a:off x="8284464" y="1783080"/>
+            <a:ext cx="1554480" cy="658368"/>
           </a:xfrm>
           <a:prstGeom prst="rect">
             <a:avLst/>
@@ -15314,24 +15407,24 @@
       </p:sp>
       <p:sp>
         <p:nvSpPr>
-          <p:cNvPr id="18" name="Shape 16"/>
-          <p:cNvSpPr/>
-          <p:nvPr/>
-        </p:nvSpPr>
-        <p:spPr>
-          <a:xfrm>
-            <a:off x="5084064" y="1783080"/>
+          <p:cNvPr id="22" name="Shape 20"/>
+          <p:cNvSpPr/>
+          <p:nvPr/>
+        </p:nvSpPr>
+        <p:spPr>
+          <a:xfrm>
+            <a:off x="8284464" y="1783080"/>
             <a:ext cx="73152" cy="658368"/>
           </a:xfrm>
           <a:prstGeom prst="rect">
             <a:avLst/>
           </a:prstGeom>
           <a:solidFill>
-            <a:srgbClr val="034EA2"/>
+            <a:srgbClr val="22B573"/>
           </a:solidFill>
           <a:ln w="7620">
             <a:solidFill>
-              <a:srgbClr val="034EA2">
+              <a:srgbClr val="22B573">
                 <a:alpha val="0"/>
               </a:srgbClr>
             </a:solidFill>
@@ -15341,14 +15434,14 @@
       </p:sp>
       <p:sp>
         <p:nvSpPr>
-          <p:cNvPr id="19" name="Text 17"/>
-          <p:cNvSpPr/>
-          <p:nvPr/>
-        </p:nvSpPr>
-        <p:spPr>
-          <a:xfrm>
-            <a:off x="5248656" y="1984248"/>
-            <a:ext cx="1554480" cy="182880"/>
+          <p:cNvPr id="23" name="Text 21"/>
+          <p:cNvSpPr/>
+          <p:nvPr/>
+        </p:nvSpPr>
+        <p:spPr>
+          <a:xfrm>
+            <a:off x="8412480" y="1984248"/>
+            <a:ext cx="1298448" cy="182880"/>
           </a:xfrm>
           <a:prstGeom prst="rect">
             <a:avLst/>
@@ -15366,7 +15459,7 @@
               <a:buNone/>
             </a:pPr>
             <a:r>
-              <a:rPr lang="en-US" sz="840" b="1" dirty="0">
+              <a:rPr lang="en-US" sz="810" b="1" dirty="0">
                 <a:solidFill>
                   <a:srgbClr val="19226D"/>
                 </a:solidFill>
@@ -15374,21 +15467,21 @@
                 <a:ea typeface="Quattrocento Sans" pitchFamily="34" charset="-122"/>
                 <a:cs typeface="Quattrocento Sans" pitchFamily="34" charset="-120"/>
               </a:rPr>
-              <a:t>ĐỘ SÂU</a:t>
-            </a:r>
-            <a:endParaRPr lang="en-US" sz="840" dirty="0"/>
-          </a:p>
-        </p:txBody>
-      </p:sp>
-      <p:sp>
-        <p:nvSpPr>
-          <p:cNvPr id="20" name="Shape 18"/>
-          <p:cNvSpPr/>
-          <p:nvPr/>
-        </p:nvSpPr>
-        <p:spPr>
-          <a:xfrm>
-            <a:off x="6025896" y="2487168"/>
+              <a:t>TELEMETRY</a:t>
+            </a:r>
+            <a:endParaRPr lang="en-US" sz="810" dirty="0"/>
+          </a:p>
+        </p:txBody>
+      </p:sp>
+      <p:sp>
+        <p:nvSpPr>
+          <p:cNvPr id="24" name="Shape 22"/>
+          <p:cNvSpPr/>
+          <p:nvPr/>
+        </p:nvSpPr>
+        <p:spPr>
+          <a:xfrm>
+            <a:off x="9061704" y="2487168"/>
             <a:ext cx="0" cy="338328"/>
           </a:xfrm>
           <a:prstGeom prst="line">
@@ -15397,7 +15490,7 @@
           <a:noFill/>
           <a:ln w="16510">
             <a:solidFill>
-              <a:srgbClr val="034EA2"/>
+              <a:srgbClr val="22B573"/>
             </a:solidFill>
             <a:prstDash val="solid"/>
             <a:tailEnd type="triangle"/>
@@ -15406,14 +15499,14 @@
       </p:sp>
       <p:sp>
         <p:nvSpPr>
-          <p:cNvPr id="21" name="Shape 19"/>
-          <p:cNvSpPr/>
-          <p:nvPr/>
-        </p:nvSpPr>
-        <p:spPr>
-          <a:xfrm>
-            <a:off x="7296912" y="1783080"/>
-            <a:ext cx="1883664" cy="658368"/>
+          <p:cNvPr id="25" name="Shape 23"/>
+          <p:cNvSpPr/>
+          <p:nvPr/>
+        </p:nvSpPr>
+        <p:spPr>
+          <a:xfrm>
+            <a:off x="9930384" y="1783080"/>
+            <a:ext cx="1554480" cy="658368"/>
           </a:xfrm>
           <a:prstGeom prst="rect">
             <a:avLst/>
@@ -15431,130 +15524,13 @@
       </p:sp>
       <p:sp>
         <p:nvSpPr>
-          <p:cNvPr id="22" name="Shape 20"/>
-          <p:cNvSpPr/>
-          <p:nvPr/>
-        </p:nvSpPr>
-        <p:spPr>
-          <a:xfrm>
-            <a:off x="7296912" y="1783080"/>
-            <a:ext cx="73152" cy="658368"/>
-          </a:xfrm>
-          <a:prstGeom prst="rect">
-            <a:avLst/>
-          </a:prstGeom>
-          <a:solidFill>
-            <a:srgbClr val="22B573"/>
-          </a:solidFill>
-          <a:ln w="7620">
-            <a:solidFill>
-              <a:srgbClr val="22B573">
-                <a:alpha val="0"/>
-              </a:srgbClr>
-            </a:solidFill>
-            <a:prstDash val="solid"/>
-          </a:ln>
-        </p:spPr>
-      </p:sp>
-      <p:sp>
-        <p:nvSpPr>
-          <p:cNvPr id="23" name="Text 21"/>
-          <p:cNvSpPr/>
-          <p:nvPr/>
-        </p:nvSpPr>
-        <p:spPr>
-          <a:xfrm>
-            <a:off x="7461504" y="1984248"/>
-            <a:ext cx="1554480" cy="182880"/>
-          </a:xfrm>
-          <a:prstGeom prst="rect">
-            <a:avLst/>
-          </a:prstGeom>
-          <a:noFill/>
-          <a:ln/>
-        </p:spPr>
-        <p:txBody>
-          <a:bodyPr wrap="square" lIns="0" tIns="0" rIns="0" bIns="0" rtlCol="0" anchor="ctr">
-            <a:normAutofit/>
-          </a:bodyPr>
-          <a:lstStyle/>
-          <a:p>
-            <a:pPr algn="ctr" indent="0" marL="0">
-              <a:buNone/>
-            </a:pPr>
-            <a:r>
-              <a:rPr lang="en-US" sz="840" b="1" dirty="0">
-                <a:solidFill>
-                  <a:srgbClr val="19226D"/>
-                </a:solidFill>
-                <a:latin typeface="Quattrocento Sans" pitchFamily="34" charset="0"/>
-                <a:ea typeface="Quattrocento Sans" pitchFamily="34" charset="-122"/>
-                <a:cs typeface="Quattrocento Sans" pitchFamily="34" charset="-120"/>
-              </a:rPr>
-              <a:t>TELEMETRY</a:t>
-            </a:r>
-            <a:endParaRPr lang="en-US" sz="840" dirty="0"/>
-          </a:p>
-        </p:txBody>
-      </p:sp>
-      <p:sp>
-        <p:nvSpPr>
-          <p:cNvPr id="24" name="Shape 22"/>
-          <p:cNvSpPr/>
-          <p:nvPr/>
-        </p:nvSpPr>
-        <p:spPr>
-          <a:xfrm>
-            <a:off x="8238744" y="2487168"/>
-            <a:ext cx="0" cy="338328"/>
-          </a:xfrm>
-          <a:prstGeom prst="line">
-            <a:avLst/>
-          </a:prstGeom>
-          <a:noFill/>
-          <a:ln w="16510">
-            <a:solidFill>
-              <a:srgbClr val="22B573"/>
-            </a:solidFill>
-            <a:prstDash val="solid"/>
-            <a:tailEnd type="triangle"/>
-          </a:ln>
-        </p:spPr>
-      </p:sp>
-      <p:sp>
-        <p:nvSpPr>
-          <p:cNvPr id="25" name="Shape 23"/>
-          <p:cNvSpPr/>
-          <p:nvPr/>
-        </p:nvSpPr>
-        <p:spPr>
-          <a:xfrm>
-            <a:off x="9509760" y="1783080"/>
-            <a:ext cx="1883664" cy="658368"/>
-          </a:xfrm>
-          <a:prstGeom prst="rect">
-            <a:avLst/>
-          </a:prstGeom>
-          <a:solidFill>
-            <a:srgbClr val="FFFFFF"/>
-          </a:solidFill>
-          <a:ln w="7620">
-            <a:solidFill>
-              <a:srgbClr val="CDCCCC"/>
-            </a:solidFill>
-            <a:prstDash val="solid"/>
-          </a:ln>
-        </p:spPr>
-      </p:sp>
-      <p:sp>
-        <p:nvSpPr>
           <p:cNvPr id="26" name="Shape 24"/>
           <p:cNvSpPr/>
           <p:nvPr/>
         </p:nvSpPr>
         <p:spPr>
           <a:xfrm>
-            <a:off x="9509760" y="1783080"/>
+            <a:off x="9930384" y="1783080"/>
             <a:ext cx="73152" cy="658368"/>
           </a:xfrm>
           <a:prstGeom prst="rect">
@@ -15581,8 +15557,8 @@
         </p:nvSpPr>
         <p:spPr>
           <a:xfrm>
-            <a:off x="9674352" y="1984248"/>
-            <a:ext cx="1554480" cy="182880"/>
+            <a:off x="10058400" y="1984248"/>
+            <a:ext cx="1298448" cy="182880"/>
           </a:xfrm>
           <a:prstGeom prst="rect">
             <a:avLst/>
@@ -15600,7 +15576,7 @@
               <a:buNone/>
             </a:pPr>
             <a:r>
-              <a:rPr lang="en-US" sz="840" b="1" dirty="0">
+              <a:rPr lang="en-US" sz="810" b="1" dirty="0">
                 <a:solidFill>
                   <a:srgbClr val="19226D"/>
                 </a:solidFill>
@@ -15610,14 +15586,14 @@
               </a:rPr>
               <a:t>NHÃN +</a:t>
             </a:r>
-            <a:endParaRPr lang="en-US" sz="840" dirty="0"/>
+            <a:endParaRPr lang="en-US" sz="810" dirty="0"/>
           </a:p>
           <a:p>
             <a:pPr algn="ctr" indent="0" marL="0">
               <a:buNone/>
             </a:pPr>
             <a:r>
-              <a:rPr lang="en-US" sz="840" b="1" dirty="0">
+              <a:rPr lang="en-US" sz="810" b="1" dirty="0">
                 <a:solidFill>
                   <a:srgbClr val="19226D"/>
                 </a:solidFill>
@@ -15627,7 +15603,7 @@
               </a:rPr>
               <a:t>FUSION</a:t>
             </a:r>
-            <a:endParaRPr lang="en-US" sz="840" dirty="0"/>
+            <a:endParaRPr lang="en-US" sz="810" dirty="0"/>
           </a:p>
         </p:txBody>
       </p:sp>
@@ -15639,7 +15615,7 @@
         </p:nvSpPr>
         <p:spPr>
           <a:xfrm>
-            <a:off x="10451592" y="2487168"/>
+            <a:off x="10707624" y="2487168"/>
             <a:ext cx="0" cy="338328"/>
           </a:xfrm>
           <a:prstGeom prst="line">

--- a/docs/proposal/UchiHahaha_FleetIQGuardian_Final_Round2.pptx
+++ b/docs/proposal/UchiHahaha_FleetIQGuardian_Final_Round2.pptx
@@ -15,13 +15,9 @@
     <p:sldId id="263" r:id="rId9"/>
     <p:sldId id="264" r:id="rId10"/>
     <p:sldId id="265" r:id="rId11"/>
-    <p:sldId id="266" r:id="rId12"/>
-    <p:sldId id="267" r:id="rId13"/>
-    <p:sldId id="268" r:id="rId14"/>
-    <p:sldId id="269" r:id="rId15"/>
   </p:sldIdLst>
   <p:notesMasterIdLst>
-    <p:notesMasterId r:id="rId16"/>
+    <p:notesMasterId r:id="rId12"/>
   </p:notesMasterIdLst>
   <p:sldSz cx="12191695" cy="6858000"/>
   <p:notesSz cx="6858000" cy="12191695"/>
@@ -645,358 +641,6 @@
 </p:notes>
 </file>
 
-<file path=ppt/notesSlides/notesSlide11.xml><?xml version="1.0" encoding="utf-8"?>
-<p:notes xmlns:a="http://schemas.openxmlformats.org/drawingml/2006/main" xmlns:r="http://schemas.openxmlformats.org/officeDocument/2006/relationships" xmlns:p="http://schemas.openxmlformats.org/presentationml/2006/main">
-  <p:cSld>
-    <p:spTree>
-      <p:nvGrpSpPr>
-        <p:cNvPr id="1" name=""/>
-        <p:cNvGrpSpPr/>
-        <p:nvPr/>
-      </p:nvGrpSpPr>
-      <p:grpSpPr>
-        <a:xfrm>
-          <a:off x="0" y="0"/>
-          <a:ext cx="0" cy="0"/>
-          <a:chOff x="0" y="0"/>
-          <a:chExt cx="0" cy="0"/>
-        </a:xfrm>
-      </p:grpSpPr>
-      <p:sp>
-        <p:nvSpPr>
-          <p:cNvPr id="2" name="Slide Image Placeholder 1"/>
-          <p:cNvSpPr>
-            <a:spLocks noGrp="1" noRot="1" noChangeAspect="1"/>
-          </p:cNvSpPr>
-          <p:nvPr>
-            <p:ph type="sldImg"/>
-          </p:nvPr>
-        </p:nvSpPr>
-        <p:spPr/>
-      </p:sp>
-      <p:sp>
-        <p:nvSpPr>
-          <p:cNvPr id="3" name="Notes Placeholder 2"/>
-          <p:cNvSpPr>
-            <a:spLocks noGrp="1"/>
-          </p:cNvSpPr>
-          <p:nvPr>
-            <p:ph type="body" idx="1"/>
-          </p:nvPr>
-        </p:nvSpPr>
-        <p:spPr/>
-        <p:txBody>
-          <a:bodyPr/>
-          <a:lstStyle/>
-          <a:p>
-            <a:r>
-              <a:rPr lang="en-US" dirty="0"/>
-              <a:t/>
-            </a:r>
-            <a:endParaRPr lang="en-US" dirty="0"/>
-          </a:p>
-        </p:txBody>
-      </p:sp>
-      <p:sp>
-        <p:nvSpPr>
-          <p:cNvPr id="4" name="Slide Number Placeholder 3"/>
-          <p:cNvSpPr>
-            <a:spLocks noGrp="1"/>
-          </p:cNvSpPr>
-          <p:nvPr>
-            <p:ph type="sldNum" sz="quarter" idx="10"/>
-          </p:nvPr>
-        </p:nvSpPr>
-        <p:spPr/>
-        <p:txBody>
-          <a:bodyPr/>
-          <a:lstStyle/>
-          <a:p>
-            <a:fld id="{F7021451-1387-4CA6-816F-3879F97B5CBC}" type="slidenum">
-              <a:rPr lang="en-US"/>
-              <a:t>11</a:t>
-            </a:fld>
-            <a:endParaRPr lang="en-US"/>
-          </a:p>
-        </p:txBody>
-      </p:sp>
-    </p:spTree>
-    <p:extLst>
-      <p:ext uri="{BB962C8B-B14F-4D97-AF65-F5344CB8AC3E}">
-        <p14:creationId xmlns:p14="http://schemas.microsoft.com/office/powerpoint/2010/main" val="1024086991"/>
-      </p:ext>
-    </p:extLst>
-  </p:cSld>
-  <p:clrMapOvr>
-    <a:masterClrMapping/>
-  </p:clrMapOvr>
-</p:notes>
-</file>
-
-<file path=ppt/notesSlides/notesSlide12.xml><?xml version="1.0" encoding="utf-8"?>
-<p:notes xmlns:a="http://schemas.openxmlformats.org/drawingml/2006/main" xmlns:r="http://schemas.openxmlformats.org/officeDocument/2006/relationships" xmlns:p="http://schemas.openxmlformats.org/presentationml/2006/main">
-  <p:cSld>
-    <p:spTree>
-      <p:nvGrpSpPr>
-        <p:cNvPr id="1" name=""/>
-        <p:cNvGrpSpPr/>
-        <p:nvPr/>
-      </p:nvGrpSpPr>
-      <p:grpSpPr>
-        <a:xfrm>
-          <a:off x="0" y="0"/>
-          <a:ext cx="0" cy="0"/>
-          <a:chOff x="0" y="0"/>
-          <a:chExt cx="0" cy="0"/>
-        </a:xfrm>
-      </p:grpSpPr>
-      <p:sp>
-        <p:nvSpPr>
-          <p:cNvPr id="2" name="Slide Image Placeholder 1"/>
-          <p:cNvSpPr>
-            <a:spLocks noGrp="1" noRot="1" noChangeAspect="1"/>
-          </p:cNvSpPr>
-          <p:nvPr>
-            <p:ph type="sldImg"/>
-          </p:nvPr>
-        </p:nvSpPr>
-        <p:spPr/>
-      </p:sp>
-      <p:sp>
-        <p:nvSpPr>
-          <p:cNvPr id="3" name="Notes Placeholder 2"/>
-          <p:cNvSpPr>
-            <a:spLocks noGrp="1"/>
-          </p:cNvSpPr>
-          <p:nvPr>
-            <p:ph type="body" idx="1"/>
-          </p:nvPr>
-        </p:nvSpPr>
-        <p:spPr/>
-        <p:txBody>
-          <a:bodyPr/>
-          <a:lstStyle/>
-          <a:p>
-            <a:r>
-              <a:rPr lang="en-US" dirty="0"/>
-              <a:t/>
-            </a:r>
-            <a:endParaRPr lang="en-US" dirty="0"/>
-          </a:p>
-        </p:txBody>
-      </p:sp>
-      <p:sp>
-        <p:nvSpPr>
-          <p:cNvPr id="4" name="Slide Number Placeholder 3"/>
-          <p:cNvSpPr>
-            <a:spLocks noGrp="1"/>
-          </p:cNvSpPr>
-          <p:nvPr>
-            <p:ph type="sldNum" sz="quarter" idx="10"/>
-          </p:nvPr>
-        </p:nvSpPr>
-        <p:spPr/>
-        <p:txBody>
-          <a:bodyPr/>
-          <a:lstStyle/>
-          <a:p>
-            <a:fld id="{F7021451-1387-4CA6-816F-3879F97B5CBC}" type="slidenum">
-              <a:rPr lang="en-US"/>
-              <a:t>12</a:t>
-            </a:fld>
-            <a:endParaRPr lang="en-US"/>
-          </a:p>
-        </p:txBody>
-      </p:sp>
-    </p:spTree>
-    <p:extLst>
-      <p:ext uri="{BB962C8B-B14F-4D97-AF65-F5344CB8AC3E}">
-        <p14:creationId xmlns:p14="http://schemas.microsoft.com/office/powerpoint/2010/main" val="1024086991"/>
-      </p:ext>
-    </p:extLst>
-  </p:cSld>
-  <p:clrMapOvr>
-    <a:masterClrMapping/>
-  </p:clrMapOvr>
-</p:notes>
-</file>
-
-<file path=ppt/notesSlides/notesSlide13.xml><?xml version="1.0" encoding="utf-8"?>
-<p:notes xmlns:a="http://schemas.openxmlformats.org/drawingml/2006/main" xmlns:r="http://schemas.openxmlformats.org/officeDocument/2006/relationships" xmlns:p="http://schemas.openxmlformats.org/presentationml/2006/main">
-  <p:cSld>
-    <p:spTree>
-      <p:nvGrpSpPr>
-        <p:cNvPr id="1" name=""/>
-        <p:cNvGrpSpPr/>
-        <p:nvPr/>
-      </p:nvGrpSpPr>
-      <p:grpSpPr>
-        <a:xfrm>
-          <a:off x="0" y="0"/>
-          <a:ext cx="0" cy="0"/>
-          <a:chOff x="0" y="0"/>
-          <a:chExt cx="0" cy="0"/>
-        </a:xfrm>
-      </p:grpSpPr>
-      <p:sp>
-        <p:nvSpPr>
-          <p:cNvPr id="2" name="Slide Image Placeholder 1"/>
-          <p:cNvSpPr>
-            <a:spLocks noGrp="1" noRot="1" noChangeAspect="1"/>
-          </p:cNvSpPr>
-          <p:nvPr>
-            <p:ph type="sldImg"/>
-          </p:nvPr>
-        </p:nvSpPr>
-        <p:spPr/>
-      </p:sp>
-      <p:sp>
-        <p:nvSpPr>
-          <p:cNvPr id="3" name="Notes Placeholder 2"/>
-          <p:cNvSpPr>
-            <a:spLocks noGrp="1"/>
-          </p:cNvSpPr>
-          <p:nvPr>
-            <p:ph type="body" idx="1"/>
-          </p:nvPr>
-        </p:nvSpPr>
-        <p:spPr/>
-        <p:txBody>
-          <a:bodyPr/>
-          <a:lstStyle/>
-          <a:p>
-            <a:r>
-              <a:rPr lang="en-US" dirty="0"/>
-              <a:t/>
-            </a:r>
-            <a:endParaRPr lang="en-US" dirty="0"/>
-          </a:p>
-        </p:txBody>
-      </p:sp>
-      <p:sp>
-        <p:nvSpPr>
-          <p:cNvPr id="4" name="Slide Number Placeholder 3"/>
-          <p:cNvSpPr>
-            <a:spLocks noGrp="1"/>
-          </p:cNvSpPr>
-          <p:nvPr>
-            <p:ph type="sldNum" sz="quarter" idx="10"/>
-          </p:nvPr>
-        </p:nvSpPr>
-        <p:spPr/>
-        <p:txBody>
-          <a:bodyPr/>
-          <a:lstStyle/>
-          <a:p>
-            <a:fld id="{F7021451-1387-4CA6-816F-3879F97B5CBC}" type="slidenum">
-              <a:rPr lang="en-US"/>
-              <a:t>13</a:t>
-            </a:fld>
-            <a:endParaRPr lang="en-US"/>
-          </a:p>
-        </p:txBody>
-      </p:sp>
-    </p:spTree>
-    <p:extLst>
-      <p:ext uri="{BB962C8B-B14F-4D97-AF65-F5344CB8AC3E}">
-        <p14:creationId xmlns:p14="http://schemas.microsoft.com/office/powerpoint/2010/main" val="1024086991"/>
-      </p:ext>
-    </p:extLst>
-  </p:cSld>
-  <p:clrMapOvr>
-    <a:masterClrMapping/>
-  </p:clrMapOvr>
-</p:notes>
-</file>
-
-<file path=ppt/notesSlides/notesSlide14.xml><?xml version="1.0" encoding="utf-8"?>
-<p:notes xmlns:a="http://schemas.openxmlformats.org/drawingml/2006/main" xmlns:r="http://schemas.openxmlformats.org/officeDocument/2006/relationships" xmlns:p="http://schemas.openxmlformats.org/presentationml/2006/main">
-  <p:cSld>
-    <p:spTree>
-      <p:nvGrpSpPr>
-        <p:cNvPr id="1" name=""/>
-        <p:cNvGrpSpPr/>
-        <p:nvPr/>
-      </p:nvGrpSpPr>
-      <p:grpSpPr>
-        <a:xfrm>
-          <a:off x="0" y="0"/>
-          <a:ext cx="0" cy="0"/>
-          <a:chOff x="0" y="0"/>
-          <a:chExt cx="0" cy="0"/>
-        </a:xfrm>
-      </p:grpSpPr>
-      <p:sp>
-        <p:nvSpPr>
-          <p:cNvPr id="2" name="Slide Image Placeholder 1"/>
-          <p:cNvSpPr>
-            <a:spLocks noGrp="1" noRot="1" noChangeAspect="1"/>
-          </p:cNvSpPr>
-          <p:nvPr>
-            <p:ph type="sldImg"/>
-          </p:nvPr>
-        </p:nvSpPr>
-        <p:spPr/>
-      </p:sp>
-      <p:sp>
-        <p:nvSpPr>
-          <p:cNvPr id="3" name="Notes Placeholder 2"/>
-          <p:cNvSpPr>
-            <a:spLocks noGrp="1"/>
-          </p:cNvSpPr>
-          <p:nvPr>
-            <p:ph type="body" idx="1"/>
-          </p:nvPr>
-        </p:nvSpPr>
-        <p:spPr/>
-        <p:txBody>
-          <a:bodyPr/>
-          <a:lstStyle/>
-          <a:p>
-            <a:r>
-              <a:rPr lang="en-US" dirty="0"/>
-              <a:t/>
-            </a:r>
-            <a:endParaRPr lang="en-US" dirty="0"/>
-          </a:p>
-        </p:txBody>
-      </p:sp>
-      <p:sp>
-        <p:nvSpPr>
-          <p:cNvPr id="4" name="Slide Number Placeholder 3"/>
-          <p:cNvSpPr>
-            <a:spLocks noGrp="1"/>
-          </p:cNvSpPr>
-          <p:nvPr>
-            <p:ph type="sldNum" sz="quarter" idx="10"/>
-          </p:nvPr>
-        </p:nvSpPr>
-        <p:spPr/>
-        <p:txBody>
-          <a:bodyPr/>
-          <a:lstStyle/>
-          <a:p>
-            <a:fld id="{F7021451-1387-4CA6-816F-3879F97B5CBC}" type="slidenum">
-              <a:rPr lang="en-US"/>
-              <a:t>14</a:t>
-            </a:fld>
-            <a:endParaRPr lang="en-US"/>
-          </a:p>
-        </p:txBody>
-      </p:sp>
-    </p:spTree>
-    <p:extLst>
-      <p:ext uri="{BB962C8B-B14F-4D97-AF65-F5344CB8AC3E}">
-        <p14:creationId xmlns:p14="http://schemas.microsoft.com/office/powerpoint/2010/main" val="1024086991"/>
-      </p:ext>
-    </p:extLst>
-  </p:cSld>
-  <p:clrMapOvr>
-    <a:masterClrMapping/>
-  </p:clrMapOvr>
-</p:notes>
-</file>
-
 <file path=ppt/notesSlides/notesSlide2.xml><?xml version="1.0" encoding="utf-8"?>
 <p:notes xmlns:a="http://schemas.openxmlformats.org/drawingml/2006/main" xmlns:r="http://schemas.openxmlformats.org/officeDocument/2006/relationships" xmlns:p="http://schemas.openxmlformats.org/presentationml/2006/main">
   <p:cSld>
@@ -2926,7 +2570,7 @@
                 <a:ea typeface="Quattrocento Sans" pitchFamily="34" charset="-122"/>
                 <a:cs typeface="Quattrocento Sans" pitchFamily="34" charset="-120"/>
               </a:rPr>
-              <a:t>Điểm theo rule luôn đi cùng event và bằng chứng; không được diễn giải là độ chính xác test ẩn.</a:t>
+              <a:t>Challenge #3 · evidence-first driver intelligence.</a:t>
             </a:r>
             <a:endParaRPr lang="en-US" sz="980" dirty="0"/>
           </a:p>
@@ -3045,4232 +2689,6 @@
 <file path=ppt/slides/slide10.xml><?xml version="1.0" encoding="utf-8"?>
 <p:sld xmlns:a="http://schemas.openxmlformats.org/drawingml/2006/main" xmlns:r="http://schemas.openxmlformats.org/officeDocument/2006/relationships" xmlns:p="http://schemas.openxmlformats.org/presentationml/2006/main">
   <p:cSld name="Slide 10">
-    <p:bg>
-      <p:bgPr>
-        <a:solidFill>
-          <a:srgbClr val="F4F7FC"/>
-        </a:solidFill>
-      </p:bgPr>
-    </p:bg>
-    <p:spTree>
-      <p:nvGrpSpPr>
-        <p:cNvPr id="1" name=""/>
-        <p:cNvGrpSpPr/>
-        <p:nvPr/>
-      </p:nvGrpSpPr>
-      <p:grpSpPr>
-        <a:xfrm>
-          <a:off x="0" y="0"/>
-          <a:ext cx="0" cy="0"/>
-          <a:chOff x="0" y="0"/>
-          <a:chExt cx="0" cy="0"/>
-        </a:xfrm>
-      </p:grpSpPr>
-      <p:sp>
-        <p:nvSpPr>
-          <p:cNvPr id="2" name="Shape 0"/>
-          <p:cNvSpPr/>
-          <p:nvPr/>
-        </p:nvSpPr>
-        <p:spPr>
-          <a:xfrm>
-            <a:off x="0" y="0"/>
-            <a:ext cx="12191695" cy="164592"/>
-          </a:xfrm>
-          <a:prstGeom prst="rect">
-            <a:avLst/>
-          </a:prstGeom>
-          <a:solidFill>
-            <a:srgbClr val="F37021"/>
-          </a:solidFill>
-          <a:ln w="7620">
-            <a:solidFill>
-              <a:srgbClr val="F37021">
-                <a:alpha val="0"/>
-              </a:srgbClr>
-            </a:solidFill>
-            <a:prstDash val="solid"/>
-          </a:ln>
-        </p:spPr>
-      </p:sp>
-      <p:sp>
-        <p:nvSpPr>
-          <p:cNvPr id="3" name="Text 1"/>
-          <p:cNvSpPr/>
-          <p:nvPr/>
-        </p:nvSpPr>
-        <p:spPr>
-          <a:xfrm>
-            <a:off x="548640" y="438912"/>
-            <a:ext cx="5486400" cy="137160"/>
-          </a:xfrm>
-          <a:prstGeom prst="rect">
-            <a:avLst/>
-          </a:prstGeom>
-          <a:noFill/>
-          <a:ln/>
-        </p:spPr>
-        <p:txBody>
-          <a:bodyPr wrap="square" lIns="0" tIns="0" rIns="0" bIns="0" rtlCol="0" anchor="ctr"/>
-          <a:lstStyle/>
-          <a:p>
-            <a:pPr indent="0" marL="0">
-              <a:buNone/>
-            </a:pPr>
-            <a:r>
-              <a:rPr lang="en-US" sz="880" b="1" spc="130" kern="0" dirty="0">
-                <a:solidFill>
-                  <a:srgbClr val="F37021"/>
-                </a:solidFill>
-                <a:latin typeface="Quattrocento Sans" pitchFamily="34" charset="0"/>
-                <a:ea typeface="Quattrocento Sans" pitchFamily="34" charset="-122"/>
-                <a:cs typeface="Quattrocento Sans" pitchFamily="34" charset="-120"/>
-              </a:rPr>
-              <a:t>NGUỒN MODEL</a:t>
-            </a:r>
-            <a:endParaRPr lang="en-US" sz="880" dirty="0"/>
-          </a:p>
-        </p:txBody>
-      </p:sp>
-      <p:sp>
-        <p:nvSpPr>
-          <p:cNvPr id="4" name="Text 2"/>
-          <p:cNvSpPr/>
-          <p:nvPr/>
-        </p:nvSpPr>
-        <p:spPr>
-          <a:xfrm>
-            <a:off x="548640" y="694944"/>
-            <a:ext cx="10972800" cy="438912"/>
-          </a:xfrm>
-          <a:prstGeom prst="rect">
-            <a:avLst/>
-          </a:prstGeom>
-          <a:noFill/>
-          <a:ln/>
-        </p:spPr>
-        <p:txBody>
-          <a:bodyPr wrap="square" lIns="0" tIns="0" rIns="0" bIns="0" rtlCol="0" anchor="ctr">
-            <a:normAutofit/>
-          </a:bodyPr>
-          <a:lstStyle/>
-          <a:p>
-            <a:pPr indent="0" marL="0">
-              <a:buNone/>
-            </a:pPr>
-            <a:r>
-              <a:rPr lang="en-US" sz="2700" b="1" dirty="0">
-                <a:solidFill>
-                  <a:srgbClr val="19226D"/>
-                </a:solidFill>
-                <a:latin typeface="Quattrocento Sans" pitchFamily="34" charset="0"/>
-                <a:ea typeface="Quattrocento Sans" pitchFamily="34" charset="-122"/>
-                <a:cs typeface="Quattrocento Sans" pitchFamily="34" charset="-120"/>
-              </a:rPr>
-              <a:t>MỖI TẦNG DÙNG GÌ, KHÔNG DÙNG GÌ</a:t>
-            </a:r>
-            <a:endParaRPr lang="en-US" sz="2700" dirty="0"/>
-          </a:p>
-        </p:txBody>
-      </p:sp>
-      <p:sp>
-        <p:nvSpPr>
-          <p:cNvPr id="5" name="Text 3"/>
-          <p:cNvSpPr/>
-          <p:nvPr/>
-        </p:nvSpPr>
-        <p:spPr>
-          <a:xfrm>
-            <a:off x="557784" y="1261872"/>
-            <a:ext cx="10789920" cy="237744"/>
-          </a:xfrm>
-          <a:prstGeom prst="rect">
-            <a:avLst/>
-          </a:prstGeom>
-          <a:noFill/>
-          <a:ln/>
-        </p:spPr>
-        <p:txBody>
-          <a:bodyPr wrap="square" lIns="0" tIns="0" rIns="0" bIns="0" rtlCol="0" anchor="ctr">
-            <a:normAutofit/>
-          </a:bodyPr>
-          <a:lstStyle/>
-          <a:p>
-            <a:pPr indent="0" marL="0">
-              <a:buNone/>
-            </a:pPr>
-            <a:r>
-              <a:rPr lang="en-US" sz="1080" dirty="0">
-                <a:solidFill>
-                  <a:srgbClr val="6B7A90"/>
-                </a:solidFill>
-                <a:latin typeface="Quattrocento Sans" pitchFamily="34" charset="0"/>
-                <a:ea typeface="Quattrocento Sans" pitchFamily="34" charset="-122"/>
-                <a:cs typeface="Quattrocento Sans" pitchFamily="34" charset="-120"/>
-              </a:rPr>
-              <a:t>Tách rõ precomputed label, GT depth, geometry rule và model training artifact để tránh overclaim.</a:t>
-            </a:r>
-            <a:endParaRPr lang="en-US" sz="1080" dirty="0"/>
-          </a:p>
-        </p:txBody>
-      </p:sp>
-      <p:sp>
-        <p:nvSpPr>
-          <p:cNvPr id="6" name="Shape 4"/>
-          <p:cNvSpPr/>
-          <p:nvPr/>
-        </p:nvSpPr>
-        <p:spPr>
-          <a:xfrm>
-            <a:off x="512064" y="6464808"/>
-            <a:ext cx="11155680" cy="0"/>
-          </a:xfrm>
-          <a:prstGeom prst="line">
-            <a:avLst/>
-          </a:prstGeom>
-          <a:noFill/>
-          <a:ln w="16510">
-            <a:solidFill>
-              <a:srgbClr val="CDCCCC"/>
-            </a:solidFill>
-            <a:prstDash val="solid"/>
-            <a:tailEnd type="none"/>
-          </a:ln>
-        </p:spPr>
-      </p:sp>
-      <p:sp>
-        <p:nvSpPr>
-          <p:cNvPr id="7" name="Text 5"/>
-          <p:cNvSpPr/>
-          <p:nvPr/>
-        </p:nvSpPr>
-        <p:spPr>
-          <a:xfrm>
-            <a:off x="548640" y="6556248"/>
-            <a:ext cx="7315200" cy="128016"/>
-          </a:xfrm>
-          <a:prstGeom prst="rect">
-            <a:avLst/>
-          </a:prstGeom>
-          <a:noFill/>
-          <a:ln/>
-        </p:spPr>
-        <p:txBody>
-          <a:bodyPr wrap="square" lIns="0" tIns="0" rIns="0" bIns="0" rtlCol="0" anchor="ctr"/>
-          <a:lstStyle/>
-          <a:p>
-            <a:pPr indent="0" marL="0">
-              <a:buNone/>
-            </a:pPr>
-            <a:r>
-              <a:rPr lang="en-US" sz="740" dirty="0">
-                <a:solidFill>
-                  <a:srgbClr val="6B7A90"/>
-                </a:solidFill>
-                <a:latin typeface="Quattrocento Sans" pitchFamily="34" charset="0"/>
-                <a:ea typeface="Quattrocento Sans" pitchFamily="34" charset="-122"/>
-                <a:cs typeface="Quattrocento Sans" pitchFamily="34" charset="-120"/>
-              </a:rPr>
-              <a:t>UchiHahaha | FleetIQ Guardian | AUTOMOTIVE HACKATHON 2026</a:t>
-            </a:r>
-            <a:endParaRPr lang="en-US" sz="740" dirty="0"/>
-          </a:p>
-        </p:txBody>
-      </p:sp>
-      <p:sp>
-        <p:nvSpPr>
-          <p:cNvPr id="8" name="Text 6"/>
-          <p:cNvSpPr/>
-          <p:nvPr/>
-        </p:nvSpPr>
-        <p:spPr>
-          <a:xfrm>
-            <a:off x="11027664" y="6510528"/>
-            <a:ext cx="594360" cy="137160"/>
-          </a:xfrm>
-          <a:prstGeom prst="rect">
-            <a:avLst/>
-          </a:prstGeom>
-          <a:noFill/>
-          <a:ln/>
-        </p:spPr>
-        <p:txBody>
-          <a:bodyPr wrap="square" lIns="0" tIns="0" rIns="0" bIns="0" rtlCol="0" anchor="ctr"/>
-          <a:lstStyle/>
-          <a:p>
-            <a:pPr algn="r" indent="0" marL="0">
-              <a:buNone/>
-            </a:pPr>
-            <a:r>
-              <a:rPr lang="en-US" sz="900" b="1" dirty="0">
-                <a:solidFill>
-                  <a:srgbClr val="034EA2"/>
-                </a:solidFill>
-                <a:latin typeface="Quattrocento Sans" pitchFamily="34" charset="0"/>
-                <a:ea typeface="Quattrocento Sans" pitchFamily="34" charset="-122"/>
-                <a:cs typeface="Quattrocento Sans" pitchFamily="34" charset="-120"/>
-              </a:rPr>
-              <a:t>10</a:t>
-            </a:r>
-            <a:endParaRPr lang="en-US" sz="900" dirty="0"/>
-          </a:p>
-        </p:txBody>
-      </p:sp>
-      <p:sp>
-        <p:nvSpPr>
-          <p:cNvPr id="9" name="Shape 7"/>
-          <p:cNvSpPr/>
-          <p:nvPr/>
-        </p:nvSpPr>
-        <p:spPr>
-          <a:xfrm>
-            <a:off x="658368" y="1783080"/>
-            <a:ext cx="5047488" cy="1490472"/>
-          </a:xfrm>
-          <a:prstGeom prst="rect">
-            <a:avLst/>
-          </a:prstGeom>
-          <a:solidFill>
-            <a:srgbClr val="FFFFFF"/>
-          </a:solidFill>
-          <a:ln w="7620">
-            <a:solidFill>
-              <a:srgbClr val="CDCCCC"/>
-            </a:solidFill>
-            <a:prstDash val="solid"/>
-          </a:ln>
-        </p:spPr>
-      </p:sp>
-      <p:sp>
-        <p:nvSpPr>
-          <p:cNvPr id="10" name="Shape 8"/>
-          <p:cNvSpPr/>
-          <p:nvPr/>
-        </p:nvSpPr>
-        <p:spPr>
-          <a:xfrm>
-            <a:off x="658368" y="1783080"/>
-            <a:ext cx="73152" cy="1490472"/>
-          </a:xfrm>
-          <a:prstGeom prst="rect">
-            <a:avLst/>
-          </a:prstGeom>
-          <a:solidFill>
-            <a:srgbClr val="034EA2"/>
-          </a:solidFill>
-          <a:ln w="7620">
-            <a:solidFill>
-              <a:srgbClr val="034EA2">
-                <a:alpha val="0"/>
-              </a:srgbClr>
-            </a:solidFill>
-            <a:prstDash val="solid"/>
-          </a:ln>
-        </p:spPr>
-      </p:sp>
-      <p:sp>
-        <p:nvSpPr>
-          <p:cNvPr id="11" name="Shape 9"/>
-          <p:cNvSpPr/>
-          <p:nvPr/>
-        </p:nvSpPr>
-        <p:spPr>
-          <a:xfrm>
-            <a:off x="914400" y="2029968"/>
-            <a:ext cx="1417320" cy="256032"/>
-          </a:xfrm>
-          <a:prstGeom prst="rect">
-            <a:avLst/>
-          </a:prstGeom>
-          <a:solidFill>
-            <a:srgbClr val="034EA2"/>
-          </a:solidFill>
-          <a:ln w="7620">
-            <a:solidFill>
-              <a:srgbClr val="034EA2">
-                <a:alpha val="0"/>
-              </a:srgbClr>
-            </a:solidFill>
-            <a:prstDash val="solid"/>
-          </a:ln>
-        </p:spPr>
-      </p:sp>
-      <p:sp>
-        <p:nvSpPr>
-          <p:cNvPr id="12" name="Text 10"/>
-          <p:cNvSpPr/>
-          <p:nvPr/>
-        </p:nvSpPr>
-        <p:spPr>
-          <a:xfrm>
-            <a:off x="1005840" y="2103120"/>
-            <a:ext cx="1234440" cy="91440"/>
-          </a:xfrm>
-          <a:prstGeom prst="rect">
-            <a:avLst/>
-          </a:prstGeom>
-          <a:noFill/>
-          <a:ln/>
-        </p:spPr>
-        <p:txBody>
-          <a:bodyPr wrap="square" lIns="0" tIns="0" rIns="0" bIns="0" rtlCol="0" anchor="ctr"/>
-          <a:lstStyle/>
-          <a:p>
-            <a:pPr algn="ctr" indent="0" marL="0">
-              <a:buNone/>
-            </a:pPr>
-            <a:r>
-              <a:rPr lang="en-US" sz="750" b="1" spc="60" kern="0" dirty="0">
-                <a:solidFill>
-                  <a:srgbClr val="FFFFFF"/>
-                </a:solidFill>
-                <a:latin typeface="Quattrocento Sans" pitchFamily="34" charset="0"/>
-                <a:ea typeface="Quattrocento Sans" pitchFamily="34" charset="-122"/>
-                <a:cs typeface="Quattrocento Sans" pitchFamily="34" charset="-120"/>
-              </a:rPr>
-              <a:t>ROAD OBJECT</a:t>
-            </a:r>
-            <a:endParaRPr lang="en-US" sz="750" dirty="0"/>
-          </a:p>
-        </p:txBody>
-      </p:sp>
-      <p:sp>
-        <p:nvSpPr>
-          <p:cNvPr id="13" name="Text 11"/>
-          <p:cNvSpPr/>
-          <p:nvPr/>
-        </p:nvSpPr>
-        <p:spPr>
-          <a:xfrm>
-            <a:off x="950976" y="2496312"/>
-            <a:ext cx="2331720" cy="347472"/>
-          </a:xfrm>
-          <a:prstGeom prst="rect">
-            <a:avLst/>
-          </a:prstGeom>
-          <a:noFill/>
-          <a:ln/>
-        </p:spPr>
-        <p:txBody>
-          <a:bodyPr wrap="square" lIns="0" tIns="0" rIns="0" bIns="0" rtlCol="0" anchor="ctr">
-            <a:normAutofit/>
-          </a:bodyPr>
-          <a:lstStyle/>
-          <a:p>
-            <a:pPr indent="0" marL="0">
-              <a:buNone/>
-            </a:pPr>
-            <a:r>
-              <a:rPr lang="en-US" sz="1120" b="1" dirty="0">
-                <a:solidFill>
-                  <a:srgbClr val="19226D"/>
-                </a:solidFill>
-                <a:latin typeface="Quattrocento Sans" pitchFamily="34" charset="0"/>
-                <a:ea typeface="Quattrocento Sans" pitchFamily="34" charset="-122"/>
-                <a:cs typeface="Quattrocento Sans" pitchFamily="34" charset="-120"/>
-              </a:rPr>
-              <a:t>label2_yolo_v3</a:t>
-            </a:r>
-            <a:endParaRPr lang="en-US" sz="1120" dirty="0"/>
-          </a:p>
-          <a:p>
-            <a:pPr indent="0" marL="0">
-              <a:buNone/>
-            </a:pPr>
-            <a:r>
-              <a:rPr lang="en-US" sz="1120" b="1" dirty="0">
-                <a:solidFill>
-                  <a:srgbClr val="19226D"/>
-                </a:solidFill>
-                <a:latin typeface="Quattrocento Sans" pitchFamily="34" charset="0"/>
-                <a:ea typeface="Quattrocento Sans" pitchFamily="34" charset="-122"/>
-                <a:cs typeface="Quattrocento Sans" pitchFamily="34" charset="-120"/>
-              </a:rPr>
-              <a:t>Custom YOLO v3 precomputed</a:t>
-            </a:r>
-            <a:endParaRPr lang="en-US" sz="1120" dirty="0"/>
-          </a:p>
-        </p:txBody>
-      </p:sp>
-      <p:sp>
-        <p:nvSpPr>
-          <p:cNvPr id="14" name="Text 12"/>
-          <p:cNvSpPr/>
-          <p:nvPr/>
-        </p:nvSpPr>
-        <p:spPr>
-          <a:xfrm>
-            <a:off x="3419856" y="2487168"/>
-            <a:ext cx="1847088" cy="393192"/>
-          </a:xfrm>
-          <a:prstGeom prst="rect">
-            <a:avLst/>
-          </a:prstGeom>
-          <a:noFill/>
-          <a:ln/>
-        </p:spPr>
-        <p:txBody>
-          <a:bodyPr wrap="square" lIns="0" tIns="0" rIns="0" bIns="0" rtlCol="0" anchor="ctr">
-            <a:normAutofit/>
-          </a:bodyPr>
-          <a:lstStyle/>
-          <a:p>
-            <a:pPr indent="0" marL="0">
-              <a:buNone/>
-            </a:pPr>
-            <a:r>
-              <a:rPr lang="en-US" sz="860" dirty="0">
-                <a:solidFill>
-                  <a:srgbClr val="6B7A90"/>
-                </a:solidFill>
-                <a:latin typeface="Quattrocento Sans" pitchFamily="34" charset="0"/>
-                <a:ea typeface="Quattrocento Sans" pitchFamily="34" charset="-122"/>
-                <a:cs typeface="Quattrocento Sans" pitchFamily="34" charset="-120"/>
-              </a:rPr>
-              <a:t>Training record: mAP50 0,40952</a:t>
-            </a:r>
-            <a:endParaRPr lang="en-US" sz="860" dirty="0"/>
-          </a:p>
-          <a:p>
-            <a:pPr indent="0" marL="0">
-              <a:buNone/>
-            </a:pPr>
-            <a:r>
-              <a:rPr lang="en-US" sz="860" dirty="0">
-                <a:solidFill>
-                  <a:srgbClr val="6B7A90"/>
-                </a:solidFill>
-                <a:latin typeface="Quattrocento Sans" pitchFamily="34" charset="0"/>
-                <a:ea typeface="Quattrocento Sans" pitchFamily="34" charset="-122"/>
-                <a:cs typeface="Quattrocento Sans" pitchFamily="34" charset="-120"/>
-              </a:rPr>
-              <a:t>Không re-infer live trong artifact pass</a:t>
-            </a:r>
-            <a:endParaRPr lang="en-US" sz="860" dirty="0"/>
-          </a:p>
-        </p:txBody>
-      </p:sp>
-      <p:sp>
-        <p:nvSpPr>
-          <p:cNvPr id="15" name="Shape 13"/>
-          <p:cNvSpPr/>
-          <p:nvPr/>
-        </p:nvSpPr>
-        <p:spPr>
-          <a:xfrm>
-            <a:off x="6172200" y="1783080"/>
-            <a:ext cx="5047488" cy="1490472"/>
-          </a:xfrm>
-          <a:prstGeom prst="rect">
-            <a:avLst/>
-          </a:prstGeom>
-          <a:solidFill>
-            <a:srgbClr val="FFFFFF"/>
-          </a:solidFill>
-          <a:ln w="7620">
-            <a:solidFill>
-              <a:srgbClr val="CDCCCC"/>
-            </a:solidFill>
-            <a:prstDash val="solid"/>
-          </a:ln>
-        </p:spPr>
-      </p:sp>
-      <p:sp>
-        <p:nvSpPr>
-          <p:cNvPr id="16" name="Shape 14"/>
-          <p:cNvSpPr/>
-          <p:nvPr/>
-        </p:nvSpPr>
-        <p:spPr>
-          <a:xfrm>
-            <a:off x="6172200" y="1783080"/>
-            <a:ext cx="73152" cy="1490472"/>
-          </a:xfrm>
-          <a:prstGeom prst="rect">
-            <a:avLst/>
-          </a:prstGeom>
-          <a:solidFill>
-            <a:srgbClr val="F37021"/>
-          </a:solidFill>
-          <a:ln w="7620">
-            <a:solidFill>
-              <a:srgbClr val="F37021">
-                <a:alpha val="0"/>
-              </a:srgbClr>
-            </a:solidFill>
-            <a:prstDash val="solid"/>
-          </a:ln>
-        </p:spPr>
-      </p:sp>
-      <p:sp>
-        <p:nvSpPr>
-          <p:cNvPr id="17" name="Shape 15"/>
-          <p:cNvSpPr/>
-          <p:nvPr/>
-        </p:nvSpPr>
-        <p:spPr>
-          <a:xfrm>
-            <a:off x="6428232" y="2029968"/>
-            <a:ext cx="1417320" cy="256032"/>
-          </a:xfrm>
-          <a:prstGeom prst="rect">
-            <a:avLst/>
-          </a:prstGeom>
-          <a:solidFill>
-            <a:srgbClr val="F37021"/>
-          </a:solidFill>
-          <a:ln w="7620">
-            <a:solidFill>
-              <a:srgbClr val="F37021">
-                <a:alpha val="0"/>
-              </a:srgbClr>
-            </a:solidFill>
-            <a:prstDash val="solid"/>
-          </a:ln>
-        </p:spPr>
-      </p:sp>
-      <p:sp>
-        <p:nvSpPr>
-          <p:cNvPr id="18" name="Text 16"/>
-          <p:cNvSpPr/>
-          <p:nvPr/>
-        </p:nvSpPr>
-        <p:spPr>
-          <a:xfrm>
-            <a:off x="6519672" y="2103120"/>
-            <a:ext cx="1234440" cy="91440"/>
-          </a:xfrm>
-          <a:prstGeom prst="rect">
-            <a:avLst/>
-          </a:prstGeom>
-          <a:noFill/>
-          <a:ln/>
-        </p:spPr>
-        <p:txBody>
-          <a:bodyPr wrap="square" lIns="0" tIns="0" rIns="0" bIns="0" rtlCol="0" anchor="ctr"/>
-          <a:lstStyle/>
-          <a:p>
-            <a:pPr algn="ctr" indent="0" marL="0">
-              <a:buNone/>
-            </a:pPr>
-            <a:r>
-              <a:rPr lang="en-US" sz="750" b="1" spc="60" kern="0" dirty="0">
-                <a:solidFill>
-                  <a:srgbClr val="FFFFFF"/>
-                </a:solidFill>
-                <a:latin typeface="Quattrocento Sans" pitchFamily="34" charset="0"/>
-                <a:ea typeface="Quattrocento Sans" pitchFamily="34" charset="-122"/>
-                <a:cs typeface="Quattrocento Sans" pitchFamily="34" charset="-120"/>
-              </a:rPr>
-              <a:t>KHOẢNG CÁCH / TTC</a:t>
-            </a:r>
-            <a:endParaRPr lang="en-US" sz="750" dirty="0"/>
-          </a:p>
-        </p:txBody>
-      </p:sp>
-      <p:sp>
-        <p:nvSpPr>
-          <p:cNvPr id="19" name="Text 17"/>
-          <p:cNvSpPr/>
-          <p:nvPr/>
-        </p:nvSpPr>
-        <p:spPr>
-          <a:xfrm>
-            <a:off x="6464808" y="2496312"/>
-            <a:ext cx="2331720" cy="347472"/>
-          </a:xfrm>
-          <a:prstGeom prst="rect">
-            <a:avLst/>
-          </a:prstGeom>
-          <a:noFill/>
-          <a:ln/>
-        </p:spPr>
-        <p:txBody>
-          <a:bodyPr wrap="square" lIns="0" tIns="0" rIns="0" bIns="0" rtlCol="0" anchor="ctr">
-            <a:normAutofit/>
-          </a:bodyPr>
-          <a:lstStyle/>
-          <a:p>
-            <a:pPr indent="0" marL="0">
-              <a:buNone/>
-            </a:pPr>
-            <a:r>
-              <a:rPr lang="en-US" sz="1120" b="1" dirty="0">
-                <a:solidFill>
-                  <a:srgbClr val="19226D"/>
-                </a:solidFill>
-                <a:latin typeface="Quattrocento Sans" pitchFamily="34" charset="0"/>
-                <a:ea typeface="Quattrocento Sans" pitchFamily="34" charset="-122"/>
-                <a:cs typeface="Quattrocento Sans" pitchFamily="34" charset="-120"/>
-              </a:rPr>
-              <a:t>GT depth ROI + calibration</a:t>
-            </a:r>
-            <a:endParaRPr lang="en-US" sz="1120" dirty="0"/>
-          </a:p>
-        </p:txBody>
-      </p:sp>
-      <p:sp>
-        <p:nvSpPr>
-          <p:cNvPr id="20" name="Text 18"/>
-          <p:cNvSpPr/>
-          <p:nvPr/>
-        </p:nvSpPr>
-        <p:spPr>
-          <a:xfrm>
-            <a:off x="8933688" y="2487168"/>
-            <a:ext cx="1847088" cy="393192"/>
-          </a:xfrm>
-          <a:prstGeom prst="rect">
-            <a:avLst/>
-          </a:prstGeom>
-          <a:noFill/>
-          <a:ln/>
-        </p:spPr>
-        <p:txBody>
-          <a:bodyPr wrap="square" lIns="0" tIns="0" rIns="0" bIns="0" rtlCol="0" anchor="ctr">
-            <a:normAutofit/>
-          </a:bodyPr>
-          <a:lstStyle/>
-          <a:p>
-            <a:pPr indent="0" marL="0">
-              <a:buNone/>
-            </a:pPr>
-            <a:r>
-              <a:rPr lang="en-US" sz="860" dirty="0">
-                <a:solidFill>
-                  <a:srgbClr val="6B7A90"/>
-                </a:solidFill>
-                <a:latin typeface="Quattrocento Sans" pitchFamily="34" charset="0"/>
-                <a:ea typeface="Quattrocento Sans" pitchFamily="34" charset="-122"/>
-                <a:cs typeface="Quattrocento Sans" pitchFamily="34" charset="-120"/>
-              </a:rPr>
-              <a:t>Không dùng learned depth</a:t>
-            </a:r>
-            <a:endParaRPr lang="en-US" sz="860" dirty="0"/>
-          </a:p>
-          <a:p>
-            <a:pPr indent="0" marL="0">
-              <a:buNone/>
-            </a:pPr>
-            <a:r>
-              <a:rPr lang="en-US" sz="860" dirty="0">
-                <a:solidFill>
-                  <a:srgbClr val="6B7A90"/>
-                </a:solidFill>
-                <a:latin typeface="Quattrocento Sans" pitchFamily="34" charset="0"/>
-                <a:ea typeface="Quattrocento Sans" pitchFamily="34" charset="-122"/>
-                <a:cs typeface="Quattrocento Sans" pitchFamily="34" charset="-120"/>
-              </a:rPr>
-              <a:t>Chỉ TTC object giữ lại trong corridor</a:t>
-            </a:r>
-            <a:endParaRPr lang="en-US" sz="860" dirty="0"/>
-          </a:p>
-        </p:txBody>
-      </p:sp>
-      <p:sp>
-        <p:nvSpPr>
-          <p:cNvPr id="21" name="Shape 19"/>
-          <p:cNvSpPr/>
-          <p:nvPr/>
-        </p:nvSpPr>
-        <p:spPr>
-          <a:xfrm>
-            <a:off x="658368" y="3657600"/>
-            <a:ext cx="5047488" cy="1490472"/>
-          </a:xfrm>
-          <a:prstGeom prst="rect">
-            <a:avLst/>
-          </a:prstGeom>
-          <a:solidFill>
-            <a:srgbClr val="FFFFFF"/>
-          </a:solidFill>
-          <a:ln w="7620">
-            <a:solidFill>
-              <a:srgbClr val="CDCCCC"/>
-            </a:solidFill>
-            <a:prstDash val="solid"/>
-          </a:ln>
-        </p:spPr>
-      </p:sp>
-      <p:sp>
-        <p:nvSpPr>
-          <p:cNvPr id="22" name="Shape 20"/>
-          <p:cNvSpPr/>
-          <p:nvPr/>
-        </p:nvSpPr>
-        <p:spPr>
-          <a:xfrm>
-            <a:off x="658368" y="3657600"/>
-            <a:ext cx="73152" cy="1490472"/>
-          </a:xfrm>
-          <a:prstGeom prst="rect">
-            <a:avLst/>
-          </a:prstGeom>
-          <a:solidFill>
-            <a:srgbClr val="22B573"/>
-          </a:solidFill>
-          <a:ln w="7620">
-            <a:solidFill>
-              <a:srgbClr val="22B573">
-                <a:alpha val="0"/>
-              </a:srgbClr>
-            </a:solidFill>
-            <a:prstDash val="solid"/>
-          </a:ln>
-        </p:spPr>
-      </p:sp>
-      <p:sp>
-        <p:nvSpPr>
-          <p:cNvPr id="23" name="Shape 21"/>
-          <p:cNvSpPr/>
-          <p:nvPr/>
-        </p:nvSpPr>
-        <p:spPr>
-          <a:xfrm>
-            <a:off x="914400" y="3904488"/>
-            <a:ext cx="1417320" cy="256032"/>
-          </a:xfrm>
-          <a:prstGeom prst="rect">
-            <a:avLst/>
-          </a:prstGeom>
-          <a:solidFill>
-            <a:srgbClr val="22B573"/>
-          </a:solidFill>
-          <a:ln w="7620">
-            <a:solidFill>
-              <a:srgbClr val="22B573">
-                <a:alpha val="0"/>
-              </a:srgbClr>
-            </a:solidFill>
-            <a:prstDash val="solid"/>
-          </a:ln>
-        </p:spPr>
-      </p:sp>
-      <p:sp>
-        <p:nvSpPr>
-          <p:cNvPr id="24" name="Text 22"/>
-          <p:cNvSpPr/>
-          <p:nvPr/>
-        </p:nvSpPr>
-        <p:spPr>
-          <a:xfrm>
-            <a:off x="1005840" y="3977640"/>
-            <a:ext cx="1234440" cy="91440"/>
-          </a:xfrm>
-          <a:prstGeom prst="rect">
-            <a:avLst/>
-          </a:prstGeom>
-          <a:noFill/>
-          <a:ln/>
-        </p:spPr>
-        <p:txBody>
-          <a:bodyPr wrap="square" lIns="0" tIns="0" rIns="0" bIns="0" rtlCol="0" anchor="ctr"/>
-          <a:lstStyle/>
-          <a:p>
-            <a:pPr algn="ctr" indent="0" marL="0">
-              <a:buNone/>
-            </a:pPr>
-            <a:r>
-              <a:rPr lang="en-US" sz="750" b="1" spc="60" kern="0" dirty="0">
-                <a:solidFill>
-                  <a:srgbClr val="FFFFFF"/>
-                </a:solidFill>
-                <a:latin typeface="Quattrocento Sans" pitchFamily="34" charset="0"/>
-                <a:ea typeface="Quattrocento Sans" pitchFamily="34" charset="-122"/>
-                <a:cs typeface="Quattrocento Sans" pitchFamily="34" charset="-120"/>
-              </a:rPr>
-              <a:t>DMS RUNTIME</a:t>
-            </a:r>
-            <a:endParaRPr lang="en-US" sz="750" dirty="0"/>
-          </a:p>
-        </p:txBody>
-      </p:sp>
-      <p:sp>
-        <p:nvSpPr>
-          <p:cNvPr id="25" name="Text 23"/>
-          <p:cNvSpPr/>
-          <p:nvPr/>
-        </p:nvSpPr>
-        <p:spPr>
-          <a:xfrm>
-            <a:off x="950976" y="4370832"/>
-            <a:ext cx="2331720" cy="347472"/>
-          </a:xfrm>
-          <a:prstGeom prst="rect">
-            <a:avLst/>
-          </a:prstGeom>
-          <a:noFill/>
-          <a:ln/>
-        </p:spPr>
-        <p:txBody>
-          <a:bodyPr wrap="square" lIns="0" tIns="0" rIns="0" bIns="0" rtlCol="0" anchor="ctr">
-            <a:normAutofit/>
-          </a:bodyPr>
-          <a:lstStyle/>
-          <a:p>
-            <a:pPr indent="0" marL="0">
-              <a:buNone/>
-            </a:pPr>
-            <a:r>
-              <a:rPr lang="en-US" sz="1120" b="1" dirty="0">
-                <a:solidFill>
-                  <a:srgbClr val="19226D"/>
-                </a:solidFill>
-                <a:latin typeface="Quattrocento Sans" pitchFamily="34" charset="0"/>
-                <a:ea typeface="Quattrocento Sans" pitchFamily="34" charset="-122"/>
-                <a:cs typeface="Quattrocento Sans" pitchFamily="34" charset="-120"/>
-              </a:rPr>
-              <a:t>MediaPipe Face Landmarker</a:t>
-            </a:r>
-            <a:endParaRPr lang="en-US" sz="1120" dirty="0"/>
-          </a:p>
-          <a:p>
-            <a:pPr indent="0" marL="0">
-              <a:buNone/>
-            </a:pPr>
-            <a:r>
-              <a:rPr lang="en-US" sz="1120" b="1" dirty="0">
-                <a:solidFill>
-                  <a:srgbClr val="19226D"/>
-                </a:solidFill>
-                <a:latin typeface="Quattrocento Sans" pitchFamily="34" charset="0"/>
-                <a:ea typeface="Quattrocento Sans" pitchFamily="34" charset="-122"/>
-                <a:cs typeface="Quattrocento Sans" pitchFamily="34" charset="-120"/>
-              </a:rPr>
-              <a:t>EAR / pose / PERCLOS geometry</a:t>
-            </a:r>
-            <a:endParaRPr lang="en-US" sz="1120" dirty="0"/>
-          </a:p>
-        </p:txBody>
-      </p:sp>
-      <p:sp>
-        <p:nvSpPr>
-          <p:cNvPr id="26" name="Text 24"/>
-          <p:cNvSpPr/>
-          <p:nvPr/>
-        </p:nvSpPr>
-        <p:spPr>
-          <a:xfrm>
-            <a:off x="3419856" y="4361688"/>
-            <a:ext cx="1847088" cy="393192"/>
-          </a:xfrm>
-          <a:prstGeom prst="rect">
-            <a:avLst/>
-          </a:prstGeom>
-          <a:noFill/>
-          <a:ln/>
-        </p:spPr>
-        <p:txBody>
-          <a:bodyPr wrap="square" lIns="0" tIns="0" rIns="0" bIns="0" rtlCol="0" anchor="ctr">
-            <a:normAutofit/>
-          </a:bodyPr>
-          <a:lstStyle/>
-          <a:p>
-            <a:pPr indent="0" marL="0">
-              <a:buNone/>
-            </a:pPr>
-            <a:r>
-              <a:rPr lang="en-US" sz="860" dirty="0">
-                <a:solidFill>
-                  <a:srgbClr val="6B7A90"/>
-                </a:solidFill>
-                <a:latin typeface="Quattrocento Sans" pitchFamily="34" charset="0"/>
-                <a:ea typeface="Quattrocento Sans" pitchFamily="34" charset="-122"/>
-                <a:cs typeface="Quattrocento Sans" pitchFamily="34" charset="-120"/>
-              </a:rPr>
-              <a:t>Pseudo-label rule runtime</a:t>
-            </a:r>
-            <a:endParaRPr lang="en-US" sz="860" dirty="0"/>
-          </a:p>
-          <a:p>
-            <a:pPr indent="0" marL="0">
-              <a:buNone/>
-            </a:pPr>
-            <a:r>
-              <a:rPr lang="en-US" sz="860" dirty="0">
-                <a:solidFill>
-                  <a:srgbClr val="6B7A90"/>
-                </a:solidFill>
-                <a:latin typeface="Quattrocento Sans" pitchFamily="34" charset="0"/>
-                <a:ea typeface="Quattrocento Sans" pitchFamily="34" charset="-122"/>
-                <a:cs typeface="Quattrocento Sans" pitchFamily="34" charset="-120"/>
-              </a:rPr>
-              <a:t>Checkpoint 95,17% là artifact riêng</a:t>
-            </a:r>
-            <a:endParaRPr lang="en-US" sz="860" dirty="0"/>
-          </a:p>
-        </p:txBody>
-      </p:sp>
-      <p:sp>
-        <p:nvSpPr>
-          <p:cNvPr id="27" name="Shape 25"/>
-          <p:cNvSpPr/>
-          <p:nvPr/>
-        </p:nvSpPr>
-        <p:spPr>
-          <a:xfrm>
-            <a:off x="6172200" y="3657600"/>
-            <a:ext cx="5047488" cy="1490472"/>
-          </a:xfrm>
-          <a:prstGeom prst="rect">
-            <a:avLst/>
-          </a:prstGeom>
-          <a:solidFill>
-            <a:srgbClr val="FFFFFF"/>
-          </a:solidFill>
-          <a:ln w="7620">
-            <a:solidFill>
-              <a:srgbClr val="CDCCCC"/>
-            </a:solidFill>
-            <a:prstDash val="solid"/>
-          </a:ln>
-        </p:spPr>
-      </p:sp>
-      <p:sp>
-        <p:nvSpPr>
-          <p:cNvPr id="28" name="Shape 26"/>
-          <p:cNvSpPr/>
-          <p:nvPr/>
-        </p:nvSpPr>
-        <p:spPr>
-          <a:xfrm>
-            <a:off x="6172200" y="3657600"/>
-            <a:ext cx="73152" cy="1490472"/>
-          </a:xfrm>
-          <a:prstGeom prst="rect">
-            <a:avLst/>
-          </a:prstGeom>
-          <a:solidFill>
-            <a:srgbClr val="19226D"/>
-          </a:solidFill>
-          <a:ln w="7620">
-            <a:solidFill>
-              <a:srgbClr val="19226D">
-                <a:alpha val="0"/>
-              </a:srgbClr>
-            </a:solidFill>
-            <a:prstDash val="solid"/>
-          </a:ln>
-        </p:spPr>
-      </p:sp>
-      <p:sp>
-        <p:nvSpPr>
-          <p:cNvPr id="29" name="Shape 27"/>
-          <p:cNvSpPr/>
-          <p:nvPr/>
-        </p:nvSpPr>
-        <p:spPr>
-          <a:xfrm>
-            <a:off x="6428232" y="3904488"/>
-            <a:ext cx="1417320" cy="256032"/>
-          </a:xfrm>
-          <a:prstGeom prst="rect">
-            <a:avLst/>
-          </a:prstGeom>
-          <a:solidFill>
-            <a:srgbClr val="19226D"/>
-          </a:solidFill>
-          <a:ln w="7620">
-            <a:solidFill>
-              <a:srgbClr val="19226D">
-                <a:alpha val="0"/>
-              </a:srgbClr>
-            </a:solidFill>
-            <a:prstDash val="solid"/>
-          </a:ln>
-        </p:spPr>
-      </p:sp>
-      <p:sp>
-        <p:nvSpPr>
-          <p:cNvPr id="30" name="Text 28"/>
-          <p:cNvSpPr/>
-          <p:nvPr/>
-        </p:nvSpPr>
-        <p:spPr>
-          <a:xfrm>
-            <a:off x="6519672" y="3977640"/>
-            <a:ext cx="1234440" cy="91440"/>
-          </a:xfrm>
-          <a:prstGeom prst="rect">
-            <a:avLst/>
-          </a:prstGeom>
-          <a:noFill/>
-          <a:ln/>
-        </p:spPr>
-        <p:txBody>
-          <a:bodyPr wrap="square" lIns="0" tIns="0" rIns="0" bIns="0" rtlCol="0" anchor="ctr"/>
-          <a:lstStyle/>
-          <a:p>
-            <a:pPr algn="ctr" indent="0" marL="0">
-              <a:buNone/>
-            </a:pPr>
-            <a:r>
-              <a:rPr lang="en-US" sz="750" b="1" spc="60" kern="0" dirty="0">
-                <a:solidFill>
-                  <a:srgbClr val="FFFFFF"/>
-                </a:solidFill>
-                <a:latin typeface="Quattrocento Sans" pitchFamily="34" charset="0"/>
-                <a:ea typeface="Quattrocento Sans" pitchFamily="34" charset="-122"/>
-                <a:cs typeface="Quattrocento Sans" pitchFamily="34" charset="-120"/>
-              </a:rPr>
-              <a:t>FUSION / COACHING</a:t>
-            </a:r>
-            <a:endParaRPr lang="en-US" sz="750" dirty="0"/>
-          </a:p>
-        </p:txBody>
-      </p:sp>
-      <p:sp>
-        <p:nvSpPr>
-          <p:cNvPr id="31" name="Text 29"/>
-          <p:cNvSpPr/>
-          <p:nvPr/>
-        </p:nvSpPr>
-        <p:spPr>
-          <a:xfrm>
-            <a:off x="6464808" y="4370832"/>
-            <a:ext cx="2331720" cy="347472"/>
-          </a:xfrm>
-          <a:prstGeom prst="rect">
-            <a:avLst/>
-          </a:prstGeom>
-          <a:noFill/>
-          <a:ln/>
-        </p:spPr>
-        <p:txBody>
-          <a:bodyPr wrap="square" lIns="0" tIns="0" rIns="0" bIns="0" rtlCol="0" anchor="ctr">
-            <a:normAutofit/>
-          </a:bodyPr>
-          <a:lstStyle/>
-          <a:p>
-            <a:pPr indent="0" marL="0">
-              <a:buNone/>
-            </a:pPr>
-            <a:r>
-              <a:rPr lang="en-US" sz="1120" b="1" dirty="0">
-                <a:solidFill>
-                  <a:srgbClr val="19226D"/>
-                </a:solidFill>
-                <a:latin typeface="Quattrocento Sans" pitchFamily="34" charset="0"/>
-                <a:ea typeface="Quattrocento Sans" pitchFamily="34" charset="-122"/>
-                <a:cs typeface="Quattrocento Sans" pitchFamily="34" charset="-120"/>
-              </a:rPr>
-              <a:t>RiskScorer v1 + 12 mapping rules</a:t>
-            </a:r>
-            <a:endParaRPr lang="en-US" sz="1120" dirty="0"/>
-          </a:p>
-        </p:txBody>
-      </p:sp>
-      <p:sp>
-        <p:nvSpPr>
-          <p:cNvPr id="32" name="Text 30"/>
-          <p:cNvSpPr/>
-          <p:nvPr/>
-        </p:nvSpPr>
-        <p:spPr>
-          <a:xfrm>
-            <a:off x="8933688" y="4361688"/>
-            <a:ext cx="1847088" cy="393192"/>
-          </a:xfrm>
-          <a:prstGeom prst="rect">
-            <a:avLst/>
-          </a:prstGeom>
-          <a:noFill/>
-          <a:ln/>
-        </p:spPr>
-        <p:txBody>
-          <a:bodyPr wrap="square" lIns="0" tIns="0" rIns="0" bIns="0" rtlCol="0" anchor="ctr">
-            <a:normAutofit/>
-          </a:bodyPr>
-          <a:lstStyle/>
-          <a:p>
-            <a:pPr indent="0" marL="0">
-              <a:buNone/>
-            </a:pPr>
-            <a:r>
-              <a:rPr lang="en-US" sz="860" dirty="0">
-                <a:solidFill>
-                  <a:srgbClr val="6B7A90"/>
-                </a:solidFill>
-                <a:latin typeface="Quattrocento Sans" pitchFamily="34" charset="0"/>
-                <a:ea typeface="Quattrocento Sans" pitchFamily="34" charset="-122"/>
-                <a:cs typeface="Quattrocento Sans" pitchFamily="34" charset="-120"/>
-              </a:rPr>
-              <a:t>Deterministic, replayable</a:t>
-            </a:r>
-            <a:endParaRPr lang="en-US" sz="860" dirty="0"/>
-          </a:p>
-          <a:p>
-            <a:pPr indent="0" marL="0">
-              <a:buNone/>
-            </a:pPr>
-            <a:r>
-              <a:rPr lang="en-US" sz="860" dirty="0">
-                <a:solidFill>
-                  <a:srgbClr val="6B7A90"/>
-                </a:solidFill>
-                <a:latin typeface="Quattrocento Sans" pitchFamily="34" charset="0"/>
-                <a:ea typeface="Quattrocento Sans" pitchFamily="34" charset="-122"/>
-                <a:cs typeface="Quattrocento Sans" pitchFamily="34" charset="-120"/>
-              </a:rPr>
-              <a:t>Không gọi đây là fusion model ML</a:t>
-            </a:r>
-            <a:endParaRPr lang="en-US" sz="860" dirty="0"/>
-          </a:p>
-        </p:txBody>
-      </p:sp>
-      <p:sp>
-        <p:nvSpPr>
-          <p:cNvPr id="33" name="Shape 31"/>
-          <p:cNvSpPr/>
-          <p:nvPr/>
-        </p:nvSpPr>
-        <p:spPr>
-          <a:xfrm>
-            <a:off x="658368" y="5532120"/>
-            <a:ext cx="10835640" cy="475488"/>
-          </a:xfrm>
-          <a:prstGeom prst="rect">
-            <a:avLst/>
-          </a:prstGeom>
-          <a:solidFill>
-            <a:srgbClr val="FFF0E5"/>
-          </a:solidFill>
-          <a:ln w="7620">
-            <a:solidFill>
-              <a:srgbClr val="F37021"/>
-            </a:solidFill>
-            <a:prstDash val="solid"/>
-          </a:ln>
-        </p:spPr>
-      </p:sp>
-      <p:sp>
-        <p:nvSpPr>
-          <p:cNvPr id="34" name="Text 32"/>
-          <p:cNvSpPr/>
-          <p:nvPr/>
-        </p:nvSpPr>
-        <p:spPr>
-          <a:xfrm>
-            <a:off x="914400" y="5696712"/>
-            <a:ext cx="10332720" cy="109728"/>
-          </a:xfrm>
-          <a:prstGeom prst="rect">
-            <a:avLst/>
-          </a:prstGeom>
-          <a:noFill/>
-          <a:ln/>
-        </p:spPr>
-        <p:txBody>
-          <a:bodyPr wrap="square" lIns="0" tIns="0" rIns="0" bIns="0" rtlCol="0" anchor="ctr">
-            <a:normAutofit/>
-          </a:bodyPr>
-          <a:lstStyle/>
-          <a:p>
-            <a:pPr algn="ctr" indent="0" marL="0">
-              <a:buNone/>
-            </a:pPr>
-            <a:r>
-              <a:rPr lang="en-US" sz="950" b="1" dirty="0">
-                <a:solidFill>
-                  <a:srgbClr val="19226D"/>
-                </a:solidFill>
-                <a:latin typeface="Quattrocento Sans" pitchFamily="34" charset="0"/>
-                <a:ea typeface="Quattrocento Sans" pitchFamily="34" charset="-122"/>
-                <a:cs typeface="Quattrocento Sans" pitchFamily="34" charset="-120"/>
-              </a:rPr>
-              <a:t>KHÔNG CÓ LANE MODEL: x=250..390 là fixed image corridor để lọc object; lane penalty hiện bằng 0 trong RiskScorer.</a:t>
-            </a:r>
-            <a:endParaRPr lang="en-US" sz="950" dirty="0"/>
-          </a:p>
-        </p:txBody>
-      </p:sp>
-      <p:sp>
-        <p:nvSpPr>
-          <p:cNvPr id="35" name="Text 33"/>
-          <p:cNvSpPr/>
-          <p:nvPr/>
-        </p:nvSpPr>
-        <p:spPr>
-          <a:xfrm>
-            <a:off x="548640" y="6071616"/>
-            <a:ext cx="10789920" cy="182880"/>
-          </a:xfrm>
-          <a:prstGeom prst="rect">
-            <a:avLst/>
-          </a:prstGeom>
-          <a:noFill/>
-          <a:ln/>
-        </p:spPr>
-        <p:txBody>
-          <a:bodyPr wrap="square" lIns="0" tIns="0" rIns="0" bIns="0" rtlCol="0" anchor="ctr">
-            <a:normAutofit/>
-          </a:bodyPr>
-          <a:lstStyle/>
-          <a:p>
-            <a:pPr indent="0" marL="0">
-              <a:buNone/>
-            </a:pPr>
-            <a:r>
-              <a:rPr lang="en-US" sz="980" i="1" dirty="0">
-                <a:solidFill>
-                  <a:srgbClr val="34506E"/>
-                </a:solidFill>
-                <a:latin typeface="Quattrocento Sans" pitchFamily="34" charset="0"/>
-                <a:ea typeface="Quattrocento Sans" pitchFamily="34" charset="-122"/>
-                <a:cs typeface="Quattrocento Sans" pitchFamily="34" charset="-120"/>
-              </a:rPr>
-              <a:t>Nguồn runtime: label2_yolo_v3 · GT depth · MediaPipe Face Landmarker · RiskScorer v1.</a:t>
-            </a:r>
-            <a:endParaRPr lang="en-US" sz="980" dirty="0"/>
-          </a:p>
-        </p:txBody>
-      </p:sp>
-    </p:spTree>
-  </p:cSld>
-  <p:clrMapOvr>
-    <a:masterClrMapping/>
-  </p:clrMapOvr>
-</p:sld>
-</file>
-
-<file path=ppt/slides/slide11.xml><?xml version="1.0" encoding="utf-8"?>
-<p:sld xmlns:a="http://schemas.openxmlformats.org/drawingml/2006/main" xmlns:r="http://schemas.openxmlformats.org/officeDocument/2006/relationships" xmlns:p="http://schemas.openxmlformats.org/presentationml/2006/main">
-  <p:cSld name="Slide 11">
-    <p:bg>
-      <p:bgPr>
-        <a:solidFill>
-          <a:srgbClr val="F4F7FC"/>
-        </a:solidFill>
-      </p:bgPr>
-    </p:bg>
-    <p:spTree>
-      <p:nvGrpSpPr>
-        <p:cNvPr id="1" name=""/>
-        <p:cNvGrpSpPr/>
-        <p:nvPr/>
-      </p:nvGrpSpPr>
-      <p:grpSpPr>
-        <a:xfrm>
-          <a:off x="0" y="0"/>
-          <a:ext cx="0" cy="0"/>
-          <a:chOff x="0" y="0"/>
-          <a:chExt cx="0" cy="0"/>
-        </a:xfrm>
-      </p:grpSpPr>
-      <p:sp>
-        <p:nvSpPr>
-          <p:cNvPr id="2" name="Shape 0"/>
-          <p:cNvSpPr/>
-          <p:nvPr/>
-        </p:nvSpPr>
-        <p:spPr>
-          <a:xfrm>
-            <a:off x="0" y="0"/>
-            <a:ext cx="12191695" cy="164592"/>
-          </a:xfrm>
-          <a:prstGeom prst="rect">
-            <a:avLst/>
-          </a:prstGeom>
-          <a:solidFill>
-            <a:srgbClr val="F37021"/>
-          </a:solidFill>
-          <a:ln w="7620">
-            <a:solidFill>
-              <a:srgbClr val="F37021">
-                <a:alpha val="0"/>
-              </a:srgbClr>
-            </a:solidFill>
-            <a:prstDash val="solid"/>
-          </a:ln>
-        </p:spPr>
-      </p:sp>
-      <p:sp>
-        <p:nvSpPr>
-          <p:cNvPr id="3" name="Text 1"/>
-          <p:cNvSpPr/>
-          <p:nvPr/>
-        </p:nvSpPr>
-        <p:spPr>
-          <a:xfrm>
-            <a:off x="548640" y="438912"/>
-            <a:ext cx="5486400" cy="137160"/>
-          </a:xfrm>
-          <a:prstGeom prst="rect">
-            <a:avLst/>
-          </a:prstGeom>
-          <a:noFill/>
-          <a:ln/>
-        </p:spPr>
-        <p:txBody>
-          <a:bodyPr wrap="square" lIns="0" tIns="0" rIns="0" bIns="0" rtlCol="0" anchor="ctr"/>
-          <a:lstStyle/>
-          <a:p>
-            <a:pPr indent="0" marL="0">
-              <a:buNone/>
-            </a:pPr>
-            <a:r>
-              <a:rPr lang="en-US" sz="880" b="1" spc="130" kern="0" dirty="0">
-                <a:solidFill>
-                  <a:srgbClr val="F37021"/>
-                </a:solidFill>
-                <a:latin typeface="Quattrocento Sans" pitchFamily="34" charset="0"/>
-                <a:ea typeface="Quattrocento Sans" pitchFamily="34" charset="-122"/>
-                <a:cs typeface="Quattrocento Sans" pitchFamily="34" charset="-120"/>
-              </a:rPr>
-              <a:t>KIỂM CHỨNG</a:t>
-            </a:r>
-            <a:endParaRPr lang="en-US" sz="880" dirty="0"/>
-          </a:p>
-        </p:txBody>
-      </p:sp>
-      <p:sp>
-        <p:nvSpPr>
-          <p:cNvPr id="4" name="Text 2"/>
-          <p:cNvSpPr/>
-          <p:nvPr/>
-        </p:nvSpPr>
-        <p:spPr>
-          <a:xfrm>
-            <a:off x="548640" y="694944"/>
-            <a:ext cx="10972800" cy="438912"/>
-          </a:xfrm>
-          <a:prstGeom prst="rect">
-            <a:avLst/>
-          </a:prstGeom>
-          <a:noFill/>
-          <a:ln/>
-        </p:spPr>
-        <p:txBody>
-          <a:bodyPr wrap="square" lIns="0" tIns="0" rIns="0" bIns="0" rtlCol="0" anchor="ctr">
-            <a:normAutofit/>
-          </a:bodyPr>
-          <a:lstStyle/>
-          <a:p>
-            <a:pPr indent="0" marL="0">
-              <a:buNone/>
-            </a:pPr>
-            <a:r>
-              <a:rPr lang="en-US" sz="2700" b="1" dirty="0">
-                <a:solidFill>
-                  <a:srgbClr val="19226D"/>
-                </a:solidFill>
-                <a:latin typeface="Quattrocento Sans" pitchFamily="34" charset="0"/>
-                <a:ea typeface="Quattrocento Sans" pitchFamily="34" charset="-122"/>
-                <a:cs typeface="Quattrocento Sans" pitchFamily="34" charset="-120"/>
-              </a:rPr>
-              <a:t>CÓ CHỈ SỐ CHO MÔ HÌNH, CÓ GIỚI HẠN CHO SẢN PHẨM</a:t>
-            </a:r>
-            <a:endParaRPr lang="en-US" sz="2700" dirty="0"/>
-          </a:p>
-        </p:txBody>
-      </p:sp>
-      <p:sp>
-        <p:nvSpPr>
-          <p:cNvPr id="5" name="Text 3"/>
-          <p:cNvSpPr/>
-          <p:nvPr/>
-        </p:nvSpPr>
-        <p:spPr>
-          <a:xfrm>
-            <a:off x="557784" y="1261872"/>
-            <a:ext cx="10789920" cy="237744"/>
-          </a:xfrm>
-          <a:prstGeom prst="rect">
-            <a:avLst/>
-          </a:prstGeom>
-          <a:noFill/>
-          <a:ln/>
-        </p:spPr>
-        <p:txBody>
-          <a:bodyPr wrap="square" lIns="0" tIns="0" rIns="0" bIns="0" rtlCol="0" anchor="ctr">
-            <a:normAutofit/>
-          </a:bodyPr>
-          <a:lstStyle/>
-          <a:p>
-            <a:pPr indent="0" marL="0">
-              <a:buNone/>
-            </a:pPr>
-            <a:r>
-              <a:rPr lang="en-US" sz="1080" dirty="0">
-                <a:solidFill>
-                  <a:srgbClr val="6B7A90"/>
-                </a:solidFill>
-                <a:latin typeface="Quattrocento Sans" pitchFamily="34" charset="0"/>
-                <a:ea typeface="Quattrocento Sans" pitchFamily="34" charset="-122"/>
-                <a:cs typeface="Quattrocento Sans" pitchFamily="34" charset="-120"/>
-              </a:rPr>
-              <a:t>Đánh giá training artifact và rule output đội xe là hai phạm vi khác nhau.</a:t>
-            </a:r>
-            <a:endParaRPr lang="en-US" sz="1080" dirty="0"/>
-          </a:p>
-        </p:txBody>
-      </p:sp>
-      <p:sp>
-        <p:nvSpPr>
-          <p:cNvPr id="6" name="Shape 4"/>
-          <p:cNvSpPr/>
-          <p:nvPr/>
-        </p:nvSpPr>
-        <p:spPr>
-          <a:xfrm>
-            <a:off x="512064" y="6464808"/>
-            <a:ext cx="11155680" cy="0"/>
-          </a:xfrm>
-          <a:prstGeom prst="line">
-            <a:avLst/>
-          </a:prstGeom>
-          <a:noFill/>
-          <a:ln w="16510">
-            <a:solidFill>
-              <a:srgbClr val="CDCCCC"/>
-            </a:solidFill>
-            <a:prstDash val="solid"/>
-            <a:tailEnd type="none"/>
-          </a:ln>
-        </p:spPr>
-      </p:sp>
-      <p:sp>
-        <p:nvSpPr>
-          <p:cNvPr id="7" name="Text 5"/>
-          <p:cNvSpPr/>
-          <p:nvPr/>
-        </p:nvSpPr>
-        <p:spPr>
-          <a:xfrm>
-            <a:off x="548640" y="6556248"/>
-            <a:ext cx="7315200" cy="128016"/>
-          </a:xfrm>
-          <a:prstGeom prst="rect">
-            <a:avLst/>
-          </a:prstGeom>
-          <a:noFill/>
-          <a:ln/>
-        </p:spPr>
-        <p:txBody>
-          <a:bodyPr wrap="square" lIns="0" tIns="0" rIns="0" bIns="0" rtlCol="0" anchor="ctr"/>
-          <a:lstStyle/>
-          <a:p>
-            <a:pPr indent="0" marL="0">
-              <a:buNone/>
-            </a:pPr>
-            <a:r>
-              <a:rPr lang="en-US" sz="740" dirty="0">
-                <a:solidFill>
-                  <a:srgbClr val="6B7A90"/>
-                </a:solidFill>
-                <a:latin typeface="Quattrocento Sans" pitchFamily="34" charset="0"/>
-                <a:ea typeface="Quattrocento Sans" pitchFamily="34" charset="-122"/>
-                <a:cs typeface="Quattrocento Sans" pitchFamily="34" charset="-120"/>
-              </a:rPr>
-              <a:t>UchiHahaha | FleetIQ Guardian | AUTOMOTIVE HACKATHON 2026</a:t>
-            </a:r>
-            <a:endParaRPr lang="en-US" sz="740" dirty="0"/>
-          </a:p>
-        </p:txBody>
-      </p:sp>
-      <p:sp>
-        <p:nvSpPr>
-          <p:cNvPr id="8" name="Text 6"/>
-          <p:cNvSpPr/>
-          <p:nvPr/>
-        </p:nvSpPr>
-        <p:spPr>
-          <a:xfrm>
-            <a:off x="11027664" y="6510528"/>
-            <a:ext cx="594360" cy="137160"/>
-          </a:xfrm>
-          <a:prstGeom prst="rect">
-            <a:avLst/>
-          </a:prstGeom>
-          <a:noFill/>
-          <a:ln/>
-        </p:spPr>
-        <p:txBody>
-          <a:bodyPr wrap="square" lIns="0" tIns="0" rIns="0" bIns="0" rtlCol="0" anchor="ctr"/>
-          <a:lstStyle/>
-          <a:p>
-            <a:pPr algn="r" indent="0" marL="0">
-              <a:buNone/>
-            </a:pPr>
-            <a:r>
-              <a:rPr lang="en-US" sz="900" b="1" dirty="0">
-                <a:solidFill>
-                  <a:srgbClr val="034EA2"/>
-                </a:solidFill>
-                <a:latin typeface="Quattrocento Sans" pitchFamily="34" charset="0"/>
-                <a:ea typeface="Quattrocento Sans" pitchFamily="34" charset="-122"/>
-                <a:cs typeface="Quattrocento Sans" pitchFamily="34" charset="-120"/>
-              </a:rPr>
-              <a:t>11</a:t>
-            </a:r>
-            <a:endParaRPr lang="en-US" sz="900" dirty="0"/>
-          </a:p>
-        </p:txBody>
-      </p:sp>
-      <p:sp>
-        <p:nvSpPr>
-          <p:cNvPr id="9" name="Shape 7"/>
-          <p:cNvSpPr/>
-          <p:nvPr/>
-        </p:nvSpPr>
-        <p:spPr>
-          <a:xfrm>
-            <a:off x="658368" y="1828800"/>
-            <a:ext cx="3291840" cy="3154680"/>
-          </a:xfrm>
-          <a:prstGeom prst="rect">
-            <a:avLst/>
-          </a:prstGeom>
-          <a:solidFill>
-            <a:srgbClr val="FFFFFF"/>
-          </a:solidFill>
-          <a:ln w="7620">
-            <a:solidFill>
-              <a:srgbClr val="CDCCCC"/>
-            </a:solidFill>
-            <a:prstDash val="solid"/>
-          </a:ln>
-        </p:spPr>
-      </p:sp>
-      <p:sp>
-        <p:nvSpPr>
-          <p:cNvPr id="10" name="Shape 8"/>
-          <p:cNvSpPr/>
-          <p:nvPr/>
-        </p:nvSpPr>
-        <p:spPr>
-          <a:xfrm>
-            <a:off x="658368" y="1828800"/>
-            <a:ext cx="73152" cy="3154680"/>
-          </a:xfrm>
-          <a:prstGeom prst="rect">
-            <a:avLst/>
-          </a:prstGeom>
-          <a:solidFill>
-            <a:srgbClr val="034EA2"/>
-          </a:solidFill>
-          <a:ln w="7620">
-            <a:solidFill>
-              <a:srgbClr val="034EA2">
-                <a:alpha val="0"/>
-              </a:srgbClr>
-            </a:solidFill>
-            <a:prstDash val="solid"/>
-          </a:ln>
-        </p:spPr>
-      </p:sp>
-      <p:sp>
-        <p:nvSpPr>
-          <p:cNvPr id="11" name="Text 9"/>
-          <p:cNvSpPr/>
-          <p:nvPr/>
-        </p:nvSpPr>
-        <p:spPr>
-          <a:xfrm>
-            <a:off x="969264" y="2267712"/>
-            <a:ext cx="2468880" cy="438912"/>
-          </a:xfrm>
-          <a:prstGeom prst="rect">
-            <a:avLst/>
-          </a:prstGeom>
-          <a:noFill/>
-          <a:ln/>
-        </p:spPr>
-        <p:txBody>
-          <a:bodyPr wrap="square" lIns="0" tIns="0" rIns="0" bIns="0" rtlCol="0" anchor="ctr"/>
-          <a:lstStyle/>
-          <a:p>
-            <a:pPr algn="ctr" indent="0" marL="0">
-              <a:buNone/>
-            </a:pPr>
-            <a:r>
-              <a:rPr lang="en-US" sz="3000" b="1" dirty="0">
-                <a:solidFill>
-                  <a:srgbClr val="034EA2"/>
-                </a:solidFill>
-                <a:latin typeface="Quattrocento Sans" pitchFamily="34" charset="0"/>
-                <a:ea typeface="Quattrocento Sans" pitchFamily="34" charset="-122"/>
-                <a:cs typeface="Quattrocento Sans" pitchFamily="34" charset="-120"/>
-              </a:rPr>
-              <a:t>95,17%</a:t>
-            </a:r>
-            <a:endParaRPr lang="en-US" sz="3000" dirty="0"/>
-          </a:p>
-        </p:txBody>
-      </p:sp>
-      <p:sp>
-        <p:nvSpPr>
-          <p:cNvPr id="12" name="Text 10"/>
-          <p:cNvSpPr/>
-          <p:nvPr/>
-        </p:nvSpPr>
-        <p:spPr>
-          <a:xfrm>
-            <a:off x="969264" y="2834640"/>
-            <a:ext cx="2468880" cy="146304"/>
-          </a:xfrm>
-          <a:prstGeom prst="rect">
-            <a:avLst/>
-          </a:prstGeom>
-          <a:noFill/>
-          <a:ln/>
-        </p:spPr>
-        <p:txBody>
-          <a:bodyPr wrap="square" lIns="0" tIns="0" rIns="0" bIns="0" rtlCol="0" anchor="ctr">
-            <a:normAutofit/>
-          </a:bodyPr>
-          <a:lstStyle/>
-          <a:p>
-            <a:pPr algn="ctr" indent="0" marL="0">
-              <a:buNone/>
-            </a:pPr>
-            <a:r>
-              <a:rPr lang="en-US" sz="830" b="1" dirty="0">
-                <a:solidFill>
-                  <a:srgbClr val="19226D"/>
-                </a:solidFill>
-                <a:latin typeface="Quattrocento Sans" pitchFamily="34" charset="0"/>
-                <a:ea typeface="Quattrocento Sans" pitchFamily="34" charset="-122"/>
-                <a:cs typeface="Quattrocento Sans" pitchFamily="34" charset="-120"/>
-              </a:rPr>
-              <a:t>DMS SEQUENCE CHECKPOINT OFFLINE</a:t>
-            </a:r>
-            <a:endParaRPr lang="en-US" sz="830" dirty="0"/>
-          </a:p>
-        </p:txBody>
-      </p:sp>
-      <p:sp>
-        <p:nvSpPr>
-          <p:cNvPr id="13" name="Text 11"/>
-          <p:cNvSpPr/>
-          <p:nvPr/>
-        </p:nvSpPr>
-        <p:spPr>
-          <a:xfrm>
-            <a:off x="960120" y="3236976"/>
-            <a:ext cx="2505456" cy="283464"/>
-          </a:xfrm>
-          <a:prstGeom prst="rect">
-            <a:avLst/>
-          </a:prstGeom>
-          <a:noFill/>
-          <a:ln/>
-        </p:spPr>
-        <p:txBody>
-          <a:bodyPr wrap="square" lIns="0" tIns="0" rIns="0" bIns="0" rtlCol="0" anchor="ctr">
-            <a:normAutofit/>
-          </a:bodyPr>
-          <a:lstStyle/>
-          <a:p>
-            <a:pPr algn="ctr" indent="0" marL="0">
-              <a:buNone/>
-            </a:pPr>
-            <a:r>
-              <a:rPr lang="en-US" sz="850" dirty="0">
-                <a:solidFill>
-                  <a:srgbClr val="34506E"/>
-                </a:solidFill>
-                <a:latin typeface="Quattrocento Sans" pitchFamily="34" charset="0"/>
-                <a:ea typeface="Quattrocento Sans" pitchFamily="34" charset="-122"/>
-                <a:cs typeface="Quattrocento Sans" pitchFamily="34" charset="-120"/>
-              </a:rPr>
-              <a:t>Validation epoch 7; không phải hiệu năng DMS geometry runtime của demo.</a:t>
-            </a:r>
-            <a:endParaRPr lang="en-US" sz="850" dirty="0"/>
-          </a:p>
-        </p:txBody>
-      </p:sp>
-      <p:sp>
-        <p:nvSpPr>
-          <p:cNvPr id="14" name="Shape 12"/>
-          <p:cNvSpPr/>
-          <p:nvPr/>
-        </p:nvSpPr>
-        <p:spPr>
-          <a:xfrm>
-            <a:off x="4425696" y="1828800"/>
-            <a:ext cx="3291840" cy="3154680"/>
-          </a:xfrm>
-          <a:prstGeom prst="rect">
-            <a:avLst/>
-          </a:prstGeom>
-          <a:solidFill>
-            <a:srgbClr val="FFFFFF"/>
-          </a:solidFill>
-          <a:ln w="7620">
-            <a:solidFill>
-              <a:srgbClr val="CDCCCC"/>
-            </a:solidFill>
-            <a:prstDash val="solid"/>
-          </a:ln>
-        </p:spPr>
-      </p:sp>
-      <p:sp>
-        <p:nvSpPr>
-          <p:cNvPr id="15" name="Shape 13"/>
-          <p:cNvSpPr/>
-          <p:nvPr/>
-        </p:nvSpPr>
-        <p:spPr>
-          <a:xfrm>
-            <a:off x="4425696" y="1828800"/>
-            <a:ext cx="73152" cy="3154680"/>
-          </a:xfrm>
-          <a:prstGeom prst="rect">
-            <a:avLst/>
-          </a:prstGeom>
-          <a:solidFill>
-            <a:srgbClr val="F37021"/>
-          </a:solidFill>
-          <a:ln w="7620">
-            <a:solidFill>
-              <a:srgbClr val="F37021">
-                <a:alpha val="0"/>
-              </a:srgbClr>
-            </a:solidFill>
-            <a:prstDash val="solid"/>
-          </a:ln>
-        </p:spPr>
-      </p:sp>
-      <p:sp>
-        <p:nvSpPr>
-          <p:cNvPr id="16" name="Text 14"/>
-          <p:cNvSpPr/>
-          <p:nvPr/>
-        </p:nvSpPr>
-        <p:spPr>
-          <a:xfrm>
-            <a:off x="4736592" y="2267712"/>
-            <a:ext cx="2468880" cy="438912"/>
-          </a:xfrm>
-          <a:prstGeom prst="rect">
-            <a:avLst/>
-          </a:prstGeom>
-          <a:noFill/>
-          <a:ln/>
-        </p:spPr>
-        <p:txBody>
-          <a:bodyPr wrap="square" lIns="0" tIns="0" rIns="0" bIns="0" rtlCol="0" anchor="ctr"/>
-          <a:lstStyle/>
-          <a:p>
-            <a:pPr algn="ctr" indent="0" marL="0">
-              <a:buNone/>
-            </a:pPr>
-            <a:r>
-              <a:rPr lang="en-US" sz="3000" b="1" dirty="0">
-                <a:solidFill>
-                  <a:srgbClr val="F37021"/>
-                </a:solidFill>
-                <a:latin typeface="Quattrocento Sans" pitchFamily="34" charset="0"/>
-                <a:ea typeface="Quattrocento Sans" pitchFamily="34" charset="-122"/>
-                <a:cs typeface="Quattrocento Sans" pitchFamily="34" charset="-120"/>
-              </a:rPr>
-              <a:t>0,40952</a:t>
-            </a:r>
-            <a:endParaRPr lang="en-US" sz="3000" dirty="0"/>
-          </a:p>
-        </p:txBody>
-      </p:sp>
-      <p:sp>
-        <p:nvSpPr>
-          <p:cNvPr id="17" name="Text 15"/>
-          <p:cNvSpPr/>
-          <p:nvPr/>
-        </p:nvSpPr>
-        <p:spPr>
-          <a:xfrm>
-            <a:off x="4736592" y="2834640"/>
-            <a:ext cx="2468880" cy="146304"/>
-          </a:xfrm>
-          <a:prstGeom prst="rect">
-            <a:avLst/>
-          </a:prstGeom>
-          <a:noFill/>
-          <a:ln/>
-        </p:spPr>
-        <p:txBody>
-          <a:bodyPr wrap="square" lIns="0" tIns="0" rIns="0" bIns="0" rtlCol="0" anchor="ctr"/>
-          <a:lstStyle/>
-          <a:p>
-            <a:pPr algn="ctr" indent="0" marL="0">
-              <a:buNone/>
-            </a:pPr>
-            <a:r>
-              <a:rPr lang="en-US" sz="920" b="1" dirty="0">
-                <a:solidFill>
-                  <a:srgbClr val="19226D"/>
-                </a:solidFill>
-                <a:latin typeface="Quattrocento Sans" pitchFamily="34" charset="0"/>
-                <a:ea typeface="Quattrocento Sans" pitchFamily="34" charset="-122"/>
-                <a:cs typeface="Quattrocento Sans" pitchFamily="34" charset="-120"/>
-              </a:rPr>
-              <a:t>YOLO v3 · mAP50 tốt nhất</a:t>
-            </a:r>
-            <a:endParaRPr lang="en-US" sz="920" dirty="0"/>
-          </a:p>
-        </p:txBody>
-      </p:sp>
-      <p:sp>
-        <p:nvSpPr>
-          <p:cNvPr id="18" name="Text 16"/>
-          <p:cNvSpPr/>
-          <p:nvPr/>
-        </p:nvSpPr>
-        <p:spPr>
-          <a:xfrm>
-            <a:off x="4736592" y="3273552"/>
-            <a:ext cx="2468880" cy="228600"/>
-          </a:xfrm>
-          <a:prstGeom prst="rect">
-            <a:avLst/>
-          </a:prstGeom>
-          <a:noFill/>
-          <a:ln/>
-        </p:spPr>
-        <p:txBody>
-          <a:bodyPr wrap="square" lIns="0" tIns="0" rIns="0" bIns="0" rtlCol="0" anchor="ctr">
-            <a:normAutofit/>
-          </a:bodyPr>
-          <a:lstStyle/>
-          <a:p>
-            <a:pPr algn="ctr" indent="0" marL="0">
-              <a:buNone/>
-            </a:pPr>
-            <a:r>
-              <a:rPr lang="en-US" sz="900" dirty="0">
-                <a:solidFill>
-                  <a:srgbClr val="34506E"/>
-                </a:solidFill>
-                <a:latin typeface="Quattrocento Sans" pitchFamily="34" charset="0"/>
-                <a:ea typeface="Quattrocento Sans" pitchFamily="34" charset="-122"/>
-                <a:cs typeface="Quattrocento Sans" pitchFamily="34" charset="-120"/>
-              </a:rPr>
-              <a:t>Kết quả v3 được ghi nhận tại epoch 43.</a:t>
-            </a:r>
-            <a:endParaRPr lang="en-US" sz="900" dirty="0"/>
-          </a:p>
-        </p:txBody>
-      </p:sp>
-      <p:sp>
-        <p:nvSpPr>
-          <p:cNvPr id="19" name="Shape 17"/>
-          <p:cNvSpPr/>
-          <p:nvPr/>
-        </p:nvSpPr>
-        <p:spPr>
-          <a:xfrm>
-            <a:off x="8193024" y="1828800"/>
-            <a:ext cx="3291840" cy="3154680"/>
-          </a:xfrm>
-          <a:prstGeom prst="rect">
-            <a:avLst/>
-          </a:prstGeom>
-          <a:solidFill>
-            <a:srgbClr val="0B1020"/>
-          </a:solidFill>
-          <a:ln w="7620">
-            <a:solidFill>
-              <a:srgbClr val="0B1020">
-                <a:alpha val="0"/>
-              </a:srgbClr>
-            </a:solidFill>
-            <a:prstDash val="solid"/>
-          </a:ln>
-        </p:spPr>
-      </p:sp>
-      <p:sp>
-        <p:nvSpPr>
-          <p:cNvPr id="20" name="Text 18"/>
-          <p:cNvSpPr/>
-          <p:nvPr/>
-        </p:nvSpPr>
-        <p:spPr>
-          <a:xfrm>
-            <a:off x="8449056" y="2240280"/>
-            <a:ext cx="2788920" cy="411480"/>
-          </a:xfrm>
-          <a:prstGeom prst="rect">
-            <a:avLst/>
-          </a:prstGeom>
-          <a:noFill/>
-          <a:ln/>
-        </p:spPr>
-        <p:txBody>
-          <a:bodyPr wrap="square" lIns="0" tIns="0" rIns="0" bIns="0" rtlCol="0" anchor="ctr"/>
-          <a:lstStyle/>
-          <a:p>
-            <a:pPr algn="ctr" indent="0" marL="0">
-              <a:buNone/>
-            </a:pPr>
-            <a:r>
-              <a:rPr lang="en-US" sz="2800" b="1" dirty="0">
-                <a:solidFill>
-                  <a:srgbClr val="F37021"/>
-                </a:solidFill>
-                <a:latin typeface="Quattrocento Sans" pitchFamily="34" charset="0"/>
-                <a:ea typeface="Quattrocento Sans" pitchFamily="34" charset="-122"/>
-                <a:cs typeface="Quattrocento Sans" pitchFamily="34" charset="-120"/>
-              </a:rPr>
-              <a:t>17.999</a:t>
-            </a:r>
-            <a:endParaRPr lang="en-US" sz="2800" dirty="0"/>
-          </a:p>
-        </p:txBody>
-      </p:sp>
-      <p:sp>
-        <p:nvSpPr>
-          <p:cNvPr id="21" name="Text 19"/>
-          <p:cNvSpPr/>
-          <p:nvPr/>
-        </p:nvSpPr>
-        <p:spPr>
-          <a:xfrm>
-            <a:off x="8449056" y="2816352"/>
-            <a:ext cx="2788920" cy="146304"/>
-          </a:xfrm>
-          <a:prstGeom prst="rect">
-            <a:avLst/>
-          </a:prstGeom>
-          <a:noFill/>
-          <a:ln/>
-        </p:spPr>
-        <p:txBody>
-          <a:bodyPr wrap="square" lIns="0" tIns="0" rIns="0" bIns="0" rtlCol="0" anchor="ctr"/>
-          <a:lstStyle/>
-          <a:p>
-            <a:pPr algn="ctr" indent="0" marL="0">
-              <a:buNone/>
-            </a:pPr>
-            <a:r>
-              <a:rPr lang="en-US" sz="900" b="1" dirty="0">
-                <a:solidFill>
-                  <a:srgbClr val="FFFFFF"/>
-                </a:solidFill>
-                <a:latin typeface="Quattrocento Sans" pitchFamily="34" charset="0"/>
-                <a:ea typeface="Quattrocento Sans" pitchFamily="34" charset="-122"/>
-                <a:cs typeface="Quattrocento Sans" pitchFamily="34" charset="-120"/>
-              </a:rPr>
-              <a:t>FRAME ĐƯỢC GẮN NHÃN</a:t>
-            </a:r>
-            <a:endParaRPr lang="en-US" sz="900" dirty="0"/>
-          </a:p>
-        </p:txBody>
-      </p:sp>
-      <p:sp>
-        <p:nvSpPr>
-          <p:cNvPr id="22" name="Shape 20"/>
-          <p:cNvSpPr/>
-          <p:nvPr/>
-        </p:nvSpPr>
-        <p:spPr>
-          <a:xfrm>
-            <a:off x="8485632" y="3401568"/>
-            <a:ext cx="1133856" cy="329184"/>
-          </a:xfrm>
-          <a:prstGeom prst="rect">
-            <a:avLst/>
-          </a:prstGeom>
-          <a:solidFill>
-            <a:srgbClr val="034EA2"/>
-          </a:solidFill>
-          <a:ln w="7620">
-            <a:solidFill>
-              <a:srgbClr val="034EA2">
-                <a:alpha val="0"/>
-              </a:srgbClr>
-            </a:solidFill>
-            <a:prstDash val="solid"/>
-          </a:ln>
-        </p:spPr>
-      </p:sp>
-      <p:sp>
-        <p:nvSpPr>
-          <p:cNvPr id="23" name="Text 21"/>
-          <p:cNvSpPr/>
-          <p:nvPr/>
-        </p:nvSpPr>
-        <p:spPr>
-          <a:xfrm>
-            <a:off x="8485632" y="3511296"/>
-            <a:ext cx="1133856" cy="73152"/>
-          </a:xfrm>
-          <a:prstGeom prst="rect">
-            <a:avLst/>
-          </a:prstGeom>
-          <a:noFill/>
-          <a:ln/>
-        </p:spPr>
-        <p:txBody>
-          <a:bodyPr wrap="square" lIns="0" tIns="0" rIns="0" bIns="0" rtlCol="0" anchor="ctr">
-            <a:normAutofit/>
-          </a:bodyPr>
-          <a:lstStyle/>
-          <a:p>
-            <a:pPr algn="ctr" indent="0" marL="0">
-              <a:buNone/>
-            </a:pPr>
-            <a:r>
-              <a:rPr lang="en-US" sz="680" b="1" dirty="0">
-                <a:solidFill>
-                  <a:srgbClr val="FFFFFF"/>
-                </a:solidFill>
-                <a:latin typeface="Quattrocento Sans" pitchFamily="34" charset="0"/>
-                <a:ea typeface="Quattrocento Sans" pitchFamily="34" charset="-122"/>
-                <a:cs typeface="Quattrocento Sans" pitchFamily="34" charset="-120"/>
-              </a:rPr>
-              <a:t>Xe</a:t>
-            </a:r>
-            <a:endParaRPr lang="en-US" sz="680" dirty="0"/>
-          </a:p>
-        </p:txBody>
-      </p:sp>
-      <p:sp>
-        <p:nvSpPr>
-          <p:cNvPr id="24" name="Shape 22"/>
-          <p:cNvSpPr/>
-          <p:nvPr/>
-        </p:nvSpPr>
-        <p:spPr>
-          <a:xfrm>
-            <a:off x="9838944" y="3401568"/>
-            <a:ext cx="1133856" cy="329184"/>
-          </a:xfrm>
-          <a:prstGeom prst="rect">
-            <a:avLst/>
-          </a:prstGeom>
-          <a:solidFill>
-            <a:srgbClr val="034EA2"/>
-          </a:solidFill>
-          <a:ln w="7620">
-            <a:solidFill>
-              <a:srgbClr val="034EA2">
-                <a:alpha val="0"/>
-              </a:srgbClr>
-            </a:solidFill>
-            <a:prstDash val="solid"/>
-          </a:ln>
-        </p:spPr>
-      </p:sp>
-      <p:sp>
-        <p:nvSpPr>
-          <p:cNvPr id="25" name="Text 23"/>
-          <p:cNvSpPr/>
-          <p:nvPr/>
-        </p:nvSpPr>
-        <p:spPr>
-          <a:xfrm>
-            <a:off x="9838944" y="3511296"/>
-            <a:ext cx="1133856" cy="73152"/>
-          </a:xfrm>
-          <a:prstGeom prst="rect">
-            <a:avLst/>
-          </a:prstGeom>
-          <a:noFill/>
-          <a:ln/>
-        </p:spPr>
-        <p:txBody>
-          <a:bodyPr wrap="square" lIns="0" tIns="0" rIns="0" bIns="0" rtlCol="0" anchor="ctr">
-            <a:normAutofit/>
-          </a:bodyPr>
-          <a:lstStyle/>
-          <a:p>
-            <a:pPr algn="ctr" indent="0" marL="0">
-              <a:buNone/>
-            </a:pPr>
-            <a:r>
-              <a:rPr lang="en-US" sz="680" b="1" dirty="0">
-                <a:solidFill>
-                  <a:srgbClr val="FFFFFF"/>
-                </a:solidFill>
-                <a:latin typeface="Quattrocento Sans" pitchFamily="34" charset="0"/>
-                <a:ea typeface="Quattrocento Sans" pitchFamily="34" charset="-122"/>
-                <a:cs typeface="Quattrocento Sans" pitchFamily="34" charset="-120"/>
-              </a:rPr>
-              <a:t>Người</a:t>
-            </a:r>
-            <a:endParaRPr lang="en-US" sz="680" dirty="0"/>
-          </a:p>
-        </p:txBody>
-      </p:sp>
-      <p:sp>
-        <p:nvSpPr>
-          <p:cNvPr id="26" name="Shape 24"/>
-          <p:cNvSpPr/>
-          <p:nvPr/>
-        </p:nvSpPr>
-        <p:spPr>
-          <a:xfrm>
-            <a:off x="8485632" y="3931920"/>
-            <a:ext cx="1133856" cy="329184"/>
-          </a:xfrm>
-          <a:prstGeom prst="rect">
-            <a:avLst/>
-          </a:prstGeom>
-          <a:solidFill>
-            <a:srgbClr val="F37021"/>
-          </a:solidFill>
-          <a:ln w="7620">
-            <a:solidFill>
-              <a:srgbClr val="F37021">
-                <a:alpha val="0"/>
-              </a:srgbClr>
-            </a:solidFill>
-            <a:prstDash val="solid"/>
-          </a:ln>
-        </p:spPr>
-      </p:sp>
-      <p:sp>
-        <p:nvSpPr>
-          <p:cNvPr id="27" name="Text 25"/>
-          <p:cNvSpPr/>
-          <p:nvPr/>
-        </p:nvSpPr>
-        <p:spPr>
-          <a:xfrm>
-            <a:off x="8485632" y="4041648"/>
-            <a:ext cx="1133856" cy="73152"/>
-          </a:xfrm>
-          <a:prstGeom prst="rect">
-            <a:avLst/>
-          </a:prstGeom>
-          <a:noFill/>
-          <a:ln/>
-        </p:spPr>
-        <p:txBody>
-          <a:bodyPr wrap="square" lIns="0" tIns="0" rIns="0" bIns="0" rtlCol="0" anchor="ctr">
-            <a:normAutofit/>
-          </a:bodyPr>
-          <a:lstStyle/>
-          <a:p>
-            <a:pPr algn="ctr" indent="0" marL="0">
-              <a:buNone/>
-            </a:pPr>
-            <a:r>
-              <a:rPr lang="en-US" sz="680" b="1" dirty="0">
-                <a:solidFill>
-                  <a:srgbClr val="FFFFFF"/>
-                </a:solidFill>
-                <a:latin typeface="Quattrocento Sans" pitchFamily="34" charset="0"/>
-                <a:ea typeface="Quattrocento Sans" pitchFamily="34" charset="-122"/>
-                <a:cs typeface="Quattrocento Sans" pitchFamily="34" charset="-120"/>
-              </a:rPr>
-              <a:t>Xe máy</a:t>
-            </a:r>
-            <a:endParaRPr lang="en-US" sz="680" dirty="0"/>
-          </a:p>
-        </p:txBody>
-      </p:sp>
-      <p:sp>
-        <p:nvSpPr>
-          <p:cNvPr id="28" name="Shape 26"/>
-          <p:cNvSpPr/>
-          <p:nvPr/>
-        </p:nvSpPr>
-        <p:spPr>
-          <a:xfrm>
-            <a:off x="9838944" y="3931920"/>
-            <a:ext cx="1133856" cy="329184"/>
-          </a:xfrm>
-          <a:prstGeom prst="rect">
-            <a:avLst/>
-          </a:prstGeom>
-          <a:solidFill>
-            <a:srgbClr val="034EA2"/>
-          </a:solidFill>
-          <a:ln w="7620">
-            <a:solidFill>
-              <a:srgbClr val="034EA2">
-                <a:alpha val="0"/>
-              </a:srgbClr>
-            </a:solidFill>
-            <a:prstDash val="solid"/>
-          </a:ln>
-        </p:spPr>
-      </p:sp>
-      <p:sp>
-        <p:nvSpPr>
-          <p:cNvPr id="29" name="Text 27"/>
-          <p:cNvSpPr/>
-          <p:nvPr/>
-        </p:nvSpPr>
-        <p:spPr>
-          <a:xfrm>
-            <a:off x="9838944" y="4041648"/>
-            <a:ext cx="1133856" cy="73152"/>
-          </a:xfrm>
-          <a:prstGeom prst="rect">
-            <a:avLst/>
-          </a:prstGeom>
-          <a:noFill/>
-          <a:ln/>
-        </p:spPr>
-        <p:txBody>
-          <a:bodyPr wrap="square" lIns="0" tIns="0" rIns="0" bIns="0" rtlCol="0" anchor="ctr">
-            <a:normAutofit/>
-          </a:bodyPr>
-          <a:lstStyle/>
-          <a:p>
-            <a:pPr algn="ctr" indent="0" marL="0">
-              <a:buNone/>
-            </a:pPr>
-            <a:r>
-              <a:rPr lang="en-US" sz="680" b="1" dirty="0">
-                <a:solidFill>
-                  <a:srgbClr val="FFFFFF"/>
-                </a:solidFill>
-                <a:latin typeface="Quattrocento Sans" pitchFamily="34" charset="0"/>
-                <a:ea typeface="Quattrocento Sans" pitchFamily="34" charset="-122"/>
-                <a:cs typeface="Quattrocento Sans" pitchFamily="34" charset="-120"/>
-              </a:rPr>
-              <a:t>Bối cảnh làn</a:t>
-            </a:r>
-            <a:endParaRPr lang="en-US" sz="680" dirty="0"/>
-          </a:p>
-        </p:txBody>
-      </p:sp>
-      <p:sp>
-        <p:nvSpPr>
-          <p:cNvPr id="30" name="Text 28"/>
-          <p:cNvSpPr/>
-          <p:nvPr/>
-        </p:nvSpPr>
-        <p:spPr>
-          <a:xfrm>
-            <a:off x="914400" y="5330952"/>
-            <a:ext cx="10287000" cy="164592"/>
-          </a:xfrm>
-          <a:prstGeom prst="rect">
-            <a:avLst/>
-          </a:prstGeom>
-          <a:noFill/>
-          <a:ln/>
-        </p:spPr>
-        <p:txBody>
-          <a:bodyPr wrap="square" lIns="0" tIns="0" rIns="0" bIns="0" rtlCol="0" anchor="ctr">
-            <a:normAutofit/>
-          </a:bodyPr>
-          <a:lstStyle/>
-          <a:p>
-            <a:pPr algn="ctr" indent="0" marL="0">
-              <a:buNone/>
-            </a:pPr>
-            <a:r>
-              <a:rPr lang="en-US" sz="930" b="1" dirty="0">
-                <a:solidFill>
-                  <a:srgbClr val="F37021"/>
-                </a:solidFill>
-                <a:latin typeface="Quattrocento Sans" pitchFamily="34" charset="0"/>
-                <a:ea typeface="Quattrocento Sans" pitchFamily="34" charset="-122"/>
-                <a:cs typeface="Quattrocento Sans" pitchFamily="34" charset="-120"/>
-              </a:rPr>
-              <a:t>GIỚI HẠN: không diễn giải điểm theo rule là độ chính xác kiểm thử ẩn hoặc xếp hạng an toàn toàn đội.</a:t>
-            </a:r>
-            <a:endParaRPr lang="en-US" sz="930" dirty="0"/>
-          </a:p>
-        </p:txBody>
-      </p:sp>
-      <p:sp>
-        <p:nvSpPr>
-          <p:cNvPr id="31" name="Text 29"/>
-          <p:cNvSpPr/>
-          <p:nvPr/>
-        </p:nvSpPr>
-        <p:spPr>
-          <a:xfrm>
-            <a:off x="548640" y="6071616"/>
-            <a:ext cx="10789920" cy="182880"/>
-          </a:xfrm>
-          <a:prstGeom prst="rect">
-            <a:avLst/>
-          </a:prstGeom>
-          <a:noFill/>
-          <a:ln/>
-        </p:spPr>
-        <p:txBody>
-          <a:bodyPr wrap="square" lIns="0" tIns="0" rIns="0" bIns="0" rtlCol="0" anchor="ctr">
-            <a:normAutofit/>
-          </a:bodyPr>
-          <a:lstStyle/>
-          <a:p>
-            <a:pPr indent="0" marL="0">
-              <a:buNone/>
-            </a:pPr>
-            <a:r>
-              <a:rPr lang="en-US" sz="980" i="1" dirty="0">
-                <a:solidFill>
-                  <a:srgbClr val="34506E"/>
-                </a:solidFill>
-                <a:latin typeface="Quattrocento Sans" pitchFamily="34" charset="0"/>
-                <a:ea typeface="Quattrocento Sans" pitchFamily="34" charset="-122"/>
-                <a:cs typeface="Quattrocento Sans" pitchFamily="34" charset="-120"/>
-              </a:rPr>
-              <a:t>Nguồn: DMS offline checkpoint · YOLO v3 epoch 43 · label2_custom export.</a:t>
-            </a:r>
-            <a:endParaRPr lang="en-US" sz="980" dirty="0"/>
-          </a:p>
-        </p:txBody>
-      </p:sp>
-    </p:spTree>
-  </p:cSld>
-  <p:clrMapOvr>
-    <a:masterClrMapping/>
-  </p:clrMapOvr>
-</p:sld>
-</file>
-
-<file path=ppt/slides/slide12.xml><?xml version="1.0" encoding="utf-8"?>
-<p:sld xmlns:a="http://schemas.openxmlformats.org/drawingml/2006/main" xmlns:r="http://schemas.openxmlformats.org/officeDocument/2006/relationships" xmlns:p="http://schemas.openxmlformats.org/presentationml/2006/main">
-  <p:cSld name="Slide 12">
-    <p:bg>
-      <p:bgPr>
-        <a:solidFill>
-          <a:srgbClr val="F4F7FC"/>
-        </a:solidFill>
-      </p:bgPr>
-    </p:bg>
-    <p:spTree>
-      <p:nvGrpSpPr>
-        <p:cNvPr id="1" name=""/>
-        <p:cNvGrpSpPr/>
-        <p:nvPr/>
-      </p:nvGrpSpPr>
-      <p:grpSpPr>
-        <a:xfrm>
-          <a:off x="0" y="0"/>
-          <a:ext cx="0" cy="0"/>
-          <a:chOff x="0" y="0"/>
-          <a:chExt cx="0" cy="0"/>
-        </a:xfrm>
-      </p:grpSpPr>
-      <p:sp>
-        <p:nvSpPr>
-          <p:cNvPr id="2" name="Shape 0"/>
-          <p:cNvSpPr/>
-          <p:nvPr/>
-        </p:nvSpPr>
-        <p:spPr>
-          <a:xfrm>
-            <a:off x="0" y="0"/>
-            <a:ext cx="12191695" cy="164592"/>
-          </a:xfrm>
-          <a:prstGeom prst="rect">
-            <a:avLst/>
-          </a:prstGeom>
-          <a:solidFill>
-            <a:srgbClr val="F37021"/>
-          </a:solidFill>
-          <a:ln w="7620">
-            <a:solidFill>
-              <a:srgbClr val="F37021">
-                <a:alpha val="0"/>
-              </a:srgbClr>
-            </a:solidFill>
-            <a:prstDash val="solid"/>
-          </a:ln>
-        </p:spPr>
-      </p:sp>
-      <p:sp>
-        <p:nvSpPr>
-          <p:cNvPr id="3" name="Text 1"/>
-          <p:cNvSpPr/>
-          <p:nvPr/>
-        </p:nvSpPr>
-        <p:spPr>
-          <a:xfrm>
-            <a:off x="548640" y="438912"/>
-            <a:ext cx="5486400" cy="137160"/>
-          </a:xfrm>
-          <a:prstGeom prst="rect">
-            <a:avLst/>
-          </a:prstGeom>
-          <a:noFill/>
-          <a:ln/>
-        </p:spPr>
-        <p:txBody>
-          <a:bodyPr wrap="square" lIns="0" tIns="0" rIns="0" bIns="0" rtlCol="0" anchor="ctr"/>
-          <a:lstStyle/>
-          <a:p>
-            <a:pPr indent="0" marL="0">
-              <a:buNone/>
-            </a:pPr>
-            <a:r>
-              <a:rPr lang="en-US" sz="880" b="1" spc="130" kern="0" dirty="0">
-                <a:solidFill>
-                  <a:srgbClr val="F37021"/>
-                </a:solidFill>
-                <a:latin typeface="Quattrocento Sans" pitchFamily="34" charset="0"/>
-                <a:ea typeface="Quattrocento Sans" pitchFamily="34" charset="-122"/>
-                <a:cs typeface="Quattrocento Sans" pitchFamily="34" charset="-120"/>
-              </a:rPr>
-              <a:t>KIỂM SOÁT RỦI RO</a:t>
-            </a:r>
-            <a:endParaRPr lang="en-US" sz="880" dirty="0"/>
-          </a:p>
-        </p:txBody>
-      </p:sp>
-      <p:sp>
-        <p:nvSpPr>
-          <p:cNvPr id="4" name="Text 2"/>
-          <p:cNvSpPr/>
-          <p:nvPr/>
-        </p:nvSpPr>
-        <p:spPr>
-          <a:xfrm>
-            <a:off x="548640" y="694944"/>
-            <a:ext cx="10972800" cy="438912"/>
-          </a:xfrm>
-          <a:prstGeom prst="rect">
-            <a:avLst/>
-          </a:prstGeom>
-          <a:noFill/>
-          <a:ln/>
-        </p:spPr>
-        <p:txBody>
-          <a:bodyPr wrap="square" lIns="0" tIns="0" rIns="0" bIns="0" rtlCol="0" anchor="ctr">
-            <a:normAutofit/>
-          </a:bodyPr>
-          <a:lstStyle/>
-          <a:p>
-            <a:pPr indent="0" marL="0">
-              <a:buNone/>
-            </a:pPr>
-            <a:r>
-              <a:rPr lang="en-US" sz="2700" b="1" dirty="0">
-                <a:solidFill>
-                  <a:srgbClr val="19226D"/>
-                </a:solidFill>
-                <a:latin typeface="Quattrocento Sans" pitchFamily="34" charset="0"/>
-                <a:ea typeface="Quattrocento Sans" pitchFamily="34" charset="-122"/>
-                <a:cs typeface="Quattrocento Sans" pitchFamily="34" charset="-120"/>
-              </a:rPr>
-              <a:t>MINH BẠCH GIỚI HẠN ĐỂ DEMO ĐÁNG TIN</a:t>
-            </a:r>
-            <a:endParaRPr lang="en-US" sz="2700" dirty="0"/>
-          </a:p>
-        </p:txBody>
-      </p:sp>
-      <p:sp>
-        <p:nvSpPr>
-          <p:cNvPr id="5" name="Text 3"/>
-          <p:cNvSpPr/>
-          <p:nvPr/>
-        </p:nvSpPr>
-        <p:spPr>
-          <a:xfrm>
-            <a:off x="557784" y="1261872"/>
-            <a:ext cx="10789920" cy="237744"/>
-          </a:xfrm>
-          <a:prstGeom prst="rect">
-            <a:avLst/>
-          </a:prstGeom>
-          <a:noFill/>
-          <a:ln/>
-        </p:spPr>
-        <p:txBody>
-          <a:bodyPr wrap="square" lIns="0" tIns="0" rIns="0" bIns="0" rtlCol="0" anchor="ctr">
-            <a:normAutofit/>
-          </a:bodyPr>
-          <a:lstStyle/>
-          <a:p>
-            <a:pPr indent="0" marL="0">
-              <a:buNone/>
-            </a:pPr>
-            <a:r>
-              <a:rPr lang="en-US" sz="1080" dirty="0">
-                <a:solidFill>
-                  <a:srgbClr val="6B7A90"/>
-                </a:solidFill>
-                <a:latin typeface="Quattrocento Sans" pitchFamily="34" charset="0"/>
-                <a:ea typeface="Quattrocento Sans" pitchFamily="34" charset="-122"/>
-                <a:cs typeface="Quattrocento Sans" pitchFamily="34" charset="-120"/>
-              </a:rPr>
-              <a:t>Sản phẩm hiển thị trạng thái thiếu dữ liệu, không tạo ra bằng chứng hoặc điểm số giả.</a:t>
-            </a:r>
-            <a:endParaRPr lang="en-US" sz="1080" dirty="0"/>
-          </a:p>
-        </p:txBody>
-      </p:sp>
-      <p:sp>
-        <p:nvSpPr>
-          <p:cNvPr id="6" name="Shape 4"/>
-          <p:cNvSpPr/>
-          <p:nvPr/>
-        </p:nvSpPr>
-        <p:spPr>
-          <a:xfrm>
-            <a:off x="512064" y="6464808"/>
-            <a:ext cx="11155680" cy="0"/>
-          </a:xfrm>
-          <a:prstGeom prst="line">
-            <a:avLst/>
-          </a:prstGeom>
-          <a:noFill/>
-          <a:ln w="16510">
-            <a:solidFill>
-              <a:srgbClr val="CDCCCC"/>
-            </a:solidFill>
-            <a:prstDash val="solid"/>
-            <a:tailEnd type="none"/>
-          </a:ln>
-        </p:spPr>
-      </p:sp>
-      <p:sp>
-        <p:nvSpPr>
-          <p:cNvPr id="7" name="Text 5"/>
-          <p:cNvSpPr/>
-          <p:nvPr/>
-        </p:nvSpPr>
-        <p:spPr>
-          <a:xfrm>
-            <a:off x="548640" y="6556248"/>
-            <a:ext cx="7315200" cy="128016"/>
-          </a:xfrm>
-          <a:prstGeom prst="rect">
-            <a:avLst/>
-          </a:prstGeom>
-          <a:noFill/>
-          <a:ln/>
-        </p:spPr>
-        <p:txBody>
-          <a:bodyPr wrap="square" lIns="0" tIns="0" rIns="0" bIns="0" rtlCol="0" anchor="ctr"/>
-          <a:lstStyle/>
-          <a:p>
-            <a:pPr indent="0" marL="0">
-              <a:buNone/>
-            </a:pPr>
-            <a:r>
-              <a:rPr lang="en-US" sz="740" dirty="0">
-                <a:solidFill>
-                  <a:srgbClr val="6B7A90"/>
-                </a:solidFill>
-                <a:latin typeface="Quattrocento Sans" pitchFamily="34" charset="0"/>
-                <a:ea typeface="Quattrocento Sans" pitchFamily="34" charset="-122"/>
-                <a:cs typeface="Quattrocento Sans" pitchFamily="34" charset="-120"/>
-              </a:rPr>
-              <a:t>UchiHahaha | FleetIQ Guardian | AUTOMOTIVE HACKATHON 2026</a:t>
-            </a:r>
-            <a:endParaRPr lang="en-US" sz="740" dirty="0"/>
-          </a:p>
-        </p:txBody>
-      </p:sp>
-      <p:sp>
-        <p:nvSpPr>
-          <p:cNvPr id="8" name="Text 6"/>
-          <p:cNvSpPr/>
-          <p:nvPr/>
-        </p:nvSpPr>
-        <p:spPr>
-          <a:xfrm>
-            <a:off x="11027664" y="6510528"/>
-            <a:ext cx="594360" cy="137160"/>
-          </a:xfrm>
-          <a:prstGeom prst="rect">
-            <a:avLst/>
-          </a:prstGeom>
-          <a:noFill/>
-          <a:ln/>
-        </p:spPr>
-        <p:txBody>
-          <a:bodyPr wrap="square" lIns="0" tIns="0" rIns="0" bIns="0" rtlCol="0" anchor="ctr"/>
-          <a:lstStyle/>
-          <a:p>
-            <a:pPr algn="r" indent="0" marL="0">
-              <a:buNone/>
-            </a:pPr>
-            <a:r>
-              <a:rPr lang="en-US" sz="900" b="1" dirty="0">
-                <a:solidFill>
-                  <a:srgbClr val="034EA2"/>
-                </a:solidFill>
-                <a:latin typeface="Quattrocento Sans" pitchFamily="34" charset="0"/>
-                <a:ea typeface="Quattrocento Sans" pitchFamily="34" charset="-122"/>
-                <a:cs typeface="Quattrocento Sans" pitchFamily="34" charset="-120"/>
-              </a:rPr>
-              <a:t>12</a:t>
-            </a:r>
-            <a:endParaRPr lang="en-US" sz="900" dirty="0"/>
-          </a:p>
-        </p:txBody>
-      </p:sp>
-      <p:sp>
-        <p:nvSpPr>
-          <p:cNvPr id="9" name="Shape 7"/>
-          <p:cNvSpPr/>
-          <p:nvPr/>
-        </p:nvSpPr>
-        <p:spPr>
-          <a:xfrm>
-            <a:off x="658368" y="1828800"/>
-            <a:ext cx="5029200" cy="1325880"/>
-          </a:xfrm>
-          <a:prstGeom prst="rect">
-            <a:avLst/>
-          </a:prstGeom>
-          <a:solidFill>
-            <a:srgbClr val="FFFFFF"/>
-          </a:solidFill>
-          <a:ln w="7620">
-            <a:solidFill>
-              <a:srgbClr val="CDCCCC"/>
-            </a:solidFill>
-            <a:prstDash val="solid"/>
-          </a:ln>
-        </p:spPr>
-      </p:sp>
-      <p:sp>
-        <p:nvSpPr>
-          <p:cNvPr id="10" name="Shape 8"/>
-          <p:cNvSpPr/>
-          <p:nvPr/>
-        </p:nvSpPr>
-        <p:spPr>
-          <a:xfrm>
-            <a:off x="658368" y="1828800"/>
-            <a:ext cx="73152" cy="1325880"/>
-          </a:xfrm>
-          <a:prstGeom prst="rect">
-            <a:avLst/>
-          </a:prstGeom>
-          <a:solidFill>
-            <a:srgbClr val="034EA2"/>
-          </a:solidFill>
-          <a:ln w="7620">
-            <a:solidFill>
-              <a:srgbClr val="034EA2">
-                <a:alpha val="0"/>
-              </a:srgbClr>
-            </a:solidFill>
-            <a:prstDash val="solid"/>
-          </a:ln>
-        </p:spPr>
-      </p:sp>
-      <p:sp>
-        <p:nvSpPr>
-          <p:cNvPr id="11" name="Text 9"/>
-          <p:cNvSpPr/>
-          <p:nvPr/>
-        </p:nvSpPr>
-        <p:spPr>
-          <a:xfrm>
-            <a:off x="932688" y="2103120"/>
-            <a:ext cx="1463040" cy="164592"/>
-          </a:xfrm>
-          <a:prstGeom prst="rect">
-            <a:avLst/>
-          </a:prstGeom>
-          <a:noFill/>
-          <a:ln/>
-        </p:spPr>
-        <p:txBody>
-          <a:bodyPr wrap="square" lIns="0" tIns="0" rIns="0" bIns="0" rtlCol="0" anchor="ctr">
-            <a:normAutofit/>
-          </a:bodyPr>
-          <a:lstStyle/>
-          <a:p>
-            <a:pPr indent="0" marL="0">
-              <a:buNone/>
-            </a:pPr>
-            <a:r>
-              <a:rPr lang="en-US" sz="1100" b="1" dirty="0">
-                <a:solidFill>
-                  <a:srgbClr val="034EA2"/>
-                </a:solidFill>
-                <a:latin typeface="Quattrocento Sans" pitchFamily="34" charset="0"/>
-                <a:ea typeface="Quattrocento Sans" pitchFamily="34" charset="-122"/>
-                <a:cs typeface="Quattrocento Sans" pitchFamily="34" charset="-120"/>
-              </a:rPr>
-              <a:t>Đồng bộ media</a:t>
-            </a:r>
-            <a:endParaRPr lang="en-US" sz="1100" dirty="0"/>
-          </a:p>
-        </p:txBody>
-      </p:sp>
-      <p:sp>
-        <p:nvSpPr>
-          <p:cNvPr id="12" name="Text 10"/>
-          <p:cNvSpPr/>
-          <p:nvPr/>
-        </p:nvSpPr>
-        <p:spPr>
-          <a:xfrm>
-            <a:off x="2441448" y="2084832"/>
-            <a:ext cx="2788920" cy="502920"/>
-          </a:xfrm>
-          <a:prstGeom prst="rect">
-            <a:avLst/>
-          </a:prstGeom>
-          <a:noFill/>
-          <a:ln/>
-        </p:spPr>
-        <p:txBody>
-          <a:bodyPr wrap="square" lIns="0" tIns="0" rIns="0" bIns="0" rtlCol="0" anchor="ctr">
-            <a:normAutofit/>
-          </a:bodyPr>
-          <a:lstStyle/>
-          <a:p>
-            <a:pPr indent="0" marL="0">
-              <a:buNone/>
-            </a:pPr>
-            <a:r>
-              <a:rPr lang="en-US" sz="900" dirty="0">
-                <a:solidFill>
-                  <a:srgbClr val="34506E"/>
-                </a:solidFill>
-                <a:latin typeface="Quattrocento Sans" pitchFamily="34" charset="0"/>
-                <a:ea typeface="Quattrocento Sans" pitchFamily="34" charset="-122"/>
-                <a:cs typeface="Quattrocento Sans" pitchFamily="34" charset="-120"/>
-              </a:rPr>
-              <a:t>T01d–T10d có 0–1799. T08d/1615 thiếu source road-left và replay chèn marker unavailable, không thay frame lân cận.</a:t>
-            </a:r>
-            <a:endParaRPr lang="en-US" sz="900" dirty="0"/>
-          </a:p>
-        </p:txBody>
-      </p:sp>
-      <p:sp>
-        <p:nvSpPr>
-          <p:cNvPr id="13" name="Shape 11"/>
-          <p:cNvSpPr/>
-          <p:nvPr/>
-        </p:nvSpPr>
-        <p:spPr>
-          <a:xfrm>
-            <a:off x="6172200" y="1828800"/>
-            <a:ext cx="5029200" cy="1325880"/>
-          </a:xfrm>
-          <a:prstGeom prst="rect">
-            <a:avLst/>
-          </a:prstGeom>
-          <a:solidFill>
-            <a:srgbClr val="FFFFFF"/>
-          </a:solidFill>
-          <a:ln w="7620">
-            <a:solidFill>
-              <a:srgbClr val="CDCCCC"/>
-            </a:solidFill>
-            <a:prstDash val="solid"/>
-          </a:ln>
-        </p:spPr>
-      </p:sp>
-      <p:sp>
-        <p:nvSpPr>
-          <p:cNvPr id="14" name="Shape 12"/>
-          <p:cNvSpPr/>
-          <p:nvPr/>
-        </p:nvSpPr>
-        <p:spPr>
-          <a:xfrm>
-            <a:off x="6172200" y="1828800"/>
-            <a:ext cx="73152" cy="1325880"/>
-          </a:xfrm>
-          <a:prstGeom prst="rect">
-            <a:avLst/>
-          </a:prstGeom>
-          <a:solidFill>
-            <a:srgbClr val="F37021"/>
-          </a:solidFill>
-          <a:ln w="7620">
-            <a:solidFill>
-              <a:srgbClr val="F37021">
-                <a:alpha val="0"/>
-              </a:srgbClr>
-            </a:solidFill>
-            <a:prstDash val="solid"/>
-          </a:ln>
-        </p:spPr>
-      </p:sp>
-      <p:sp>
-        <p:nvSpPr>
-          <p:cNvPr id="15" name="Text 13"/>
-          <p:cNvSpPr/>
-          <p:nvPr/>
-        </p:nvSpPr>
-        <p:spPr>
-          <a:xfrm>
-            <a:off x="6446520" y="2103120"/>
-            <a:ext cx="1463040" cy="164592"/>
-          </a:xfrm>
-          <a:prstGeom prst="rect">
-            <a:avLst/>
-          </a:prstGeom>
-          <a:noFill/>
-          <a:ln/>
-        </p:spPr>
-        <p:txBody>
-          <a:bodyPr wrap="square" lIns="0" tIns="0" rIns="0" bIns="0" rtlCol="0" anchor="ctr">
-            <a:normAutofit/>
-          </a:bodyPr>
-          <a:lstStyle/>
-          <a:p>
-            <a:pPr indent="0" marL="0">
-              <a:buNone/>
-            </a:pPr>
-            <a:r>
-              <a:rPr lang="en-US" sz="1100" b="1" dirty="0">
-                <a:solidFill>
-                  <a:srgbClr val="F37021"/>
-                </a:solidFill>
-                <a:latin typeface="Quattrocento Sans" pitchFamily="34" charset="0"/>
-                <a:ea typeface="Quattrocento Sans" pitchFamily="34" charset="-122"/>
-                <a:cs typeface="Quattrocento Sans" pitchFamily="34" charset="-120"/>
-              </a:rPr>
-              <a:t>DMS</a:t>
-            </a:r>
-            <a:endParaRPr lang="en-US" sz="1100" dirty="0"/>
-          </a:p>
-        </p:txBody>
-      </p:sp>
-      <p:sp>
-        <p:nvSpPr>
-          <p:cNvPr id="16" name="Text 14"/>
-          <p:cNvSpPr/>
-          <p:nvPr/>
-        </p:nvSpPr>
-        <p:spPr>
-          <a:xfrm>
-            <a:off x="7955280" y="2084832"/>
-            <a:ext cx="2788920" cy="502920"/>
-          </a:xfrm>
-          <a:prstGeom prst="rect">
-            <a:avLst/>
-          </a:prstGeom>
-          <a:noFill/>
-          <a:ln/>
-        </p:spPr>
-        <p:txBody>
-          <a:bodyPr wrap="square" lIns="0" tIns="0" rIns="0" bIns="0" rtlCol="0" anchor="ctr">
-            <a:normAutofit/>
-          </a:bodyPr>
-          <a:lstStyle/>
-          <a:p>
-            <a:pPr indent="0" marL="0">
-              <a:buNone/>
-            </a:pPr>
-            <a:r>
-              <a:rPr lang="en-US" sz="900" dirty="0">
-                <a:solidFill>
-                  <a:srgbClr val="34506E"/>
-                </a:solidFill>
-                <a:latin typeface="Quattrocento Sans" pitchFamily="34" charset="0"/>
-                <a:ea typeface="Quattrocento Sans" pitchFamily="34" charset="-122"/>
-                <a:cs typeface="Quattrocento Sans" pitchFamily="34" charset="-120"/>
-              </a:rPr>
-              <a:t>DMS state đến từ geometry rule; deck và UI không gọi đó là checkpoint inference đã đánh giá trên test ẩn.</a:t>
-            </a:r>
-            <a:endParaRPr lang="en-US" sz="900" dirty="0"/>
-          </a:p>
-        </p:txBody>
-      </p:sp>
-      <p:sp>
-        <p:nvSpPr>
-          <p:cNvPr id="17" name="Shape 15"/>
-          <p:cNvSpPr/>
-          <p:nvPr/>
-        </p:nvSpPr>
-        <p:spPr>
-          <a:xfrm>
-            <a:off x="658368" y="3520440"/>
-            <a:ext cx="5029200" cy="1325880"/>
-          </a:xfrm>
-          <a:prstGeom prst="rect">
-            <a:avLst/>
-          </a:prstGeom>
-          <a:solidFill>
-            <a:srgbClr val="FFFFFF"/>
-          </a:solidFill>
-          <a:ln w="7620">
-            <a:solidFill>
-              <a:srgbClr val="CDCCCC"/>
-            </a:solidFill>
-            <a:prstDash val="solid"/>
-          </a:ln>
-        </p:spPr>
-      </p:sp>
-      <p:sp>
-        <p:nvSpPr>
-          <p:cNvPr id="18" name="Shape 16"/>
-          <p:cNvSpPr/>
-          <p:nvPr/>
-        </p:nvSpPr>
-        <p:spPr>
-          <a:xfrm>
-            <a:off x="658368" y="3520440"/>
-            <a:ext cx="73152" cy="1325880"/>
-          </a:xfrm>
-          <a:prstGeom prst="rect">
-            <a:avLst/>
-          </a:prstGeom>
-          <a:solidFill>
-            <a:srgbClr val="22B573"/>
-          </a:solidFill>
-          <a:ln w="7620">
-            <a:solidFill>
-              <a:srgbClr val="22B573">
-                <a:alpha val="0"/>
-              </a:srgbClr>
-            </a:solidFill>
-            <a:prstDash val="solid"/>
-          </a:ln>
-        </p:spPr>
-      </p:sp>
-      <p:sp>
-        <p:nvSpPr>
-          <p:cNvPr id="19" name="Text 17"/>
-          <p:cNvSpPr/>
-          <p:nvPr/>
-        </p:nvSpPr>
-        <p:spPr>
-          <a:xfrm>
-            <a:off x="932688" y="3794760"/>
-            <a:ext cx="1463040" cy="164592"/>
-          </a:xfrm>
-          <a:prstGeom prst="rect">
-            <a:avLst/>
-          </a:prstGeom>
-          <a:noFill/>
-          <a:ln/>
-        </p:spPr>
-        <p:txBody>
-          <a:bodyPr wrap="square" lIns="0" tIns="0" rIns="0" bIns="0" rtlCol="0" anchor="ctr">
-            <a:normAutofit/>
-          </a:bodyPr>
-          <a:lstStyle/>
-          <a:p>
-            <a:pPr indent="0" marL="0">
-              <a:buNone/>
-            </a:pPr>
-            <a:r>
-              <a:rPr lang="en-US" sz="1100" b="1" dirty="0">
-                <a:solidFill>
-                  <a:srgbClr val="22B573"/>
-                </a:solidFill>
-                <a:latin typeface="Quattrocento Sans" pitchFamily="34" charset="0"/>
-                <a:ea typeface="Quattrocento Sans" pitchFamily="34" charset="-122"/>
-                <a:cs typeface="Quattrocento Sans" pitchFamily="34" charset="-120"/>
-              </a:rPr>
-              <a:t>Điểm theo rule</a:t>
-            </a:r>
-            <a:endParaRPr lang="en-US" sz="1100" dirty="0"/>
-          </a:p>
-        </p:txBody>
-      </p:sp>
-      <p:sp>
-        <p:nvSpPr>
-          <p:cNvPr id="20" name="Text 18"/>
-          <p:cNvSpPr/>
-          <p:nvPr/>
-        </p:nvSpPr>
-        <p:spPr>
-          <a:xfrm>
-            <a:off x="2441448" y="3776472"/>
-            <a:ext cx="2788920" cy="502920"/>
-          </a:xfrm>
-          <a:prstGeom prst="rect">
-            <a:avLst/>
-          </a:prstGeom>
-          <a:noFill/>
-          <a:ln/>
-        </p:spPr>
-        <p:txBody>
-          <a:bodyPr wrap="square" lIns="0" tIns="0" rIns="0" bIns="0" rtlCol="0" anchor="ctr">
-            <a:normAutofit/>
-          </a:bodyPr>
-          <a:lstStyle/>
-          <a:p>
-            <a:pPr indent="0" marL="0">
-              <a:buNone/>
-            </a:pPr>
-            <a:r>
-              <a:rPr lang="en-US" sz="900" dirty="0">
-                <a:solidFill>
-                  <a:srgbClr val="34506E"/>
-                </a:solidFill>
-                <a:latin typeface="Quattrocento Sans" pitchFamily="34" charset="0"/>
-                <a:ea typeface="Quattrocento Sans" pitchFamily="34" charset="-122"/>
-                <a:cs typeface="Quattrocento Sans" pitchFamily="34" charset="-120"/>
-              </a:rPr>
-              <a:t>Chạy từ artifact chuyến và hiển thị kèm evidence; không xếp hạng hoặc tính trung bình fleet.</a:t>
-            </a:r>
-            <a:endParaRPr lang="en-US" sz="900" dirty="0"/>
-          </a:p>
-        </p:txBody>
-      </p:sp>
-      <p:sp>
-        <p:nvSpPr>
-          <p:cNvPr id="21" name="Shape 19"/>
-          <p:cNvSpPr/>
-          <p:nvPr/>
-        </p:nvSpPr>
-        <p:spPr>
-          <a:xfrm>
-            <a:off x="6172200" y="3520440"/>
-            <a:ext cx="5029200" cy="1325880"/>
-          </a:xfrm>
-          <a:prstGeom prst="rect">
-            <a:avLst/>
-          </a:prstGeom>
-          <a:solidFill>
-            <a:srgbClr val="FFFFFF"/>
-          </a:solidFill>
-          <a:ln w="7620">
-            <a:solidFill>
-              <a:srgbClr val="CDCCCC"/>
-            </a:solidFill>
-            <a:prstDash val="solid"/>
-          </a:ln>
-        </p:spPr>
-      </p:sp>
-      <p:sp>
-        <p:nvSpPr>
-          <p:cNvPr id="22" name="Shape 20"/>
-          <p:cNvSpPr/>
-          <p:nvPr/>
-        </p:nvSpPr>
-        <p:spPr>
-          <a:xfrm>
-            <a:off x="6172200" y="3520440"/>
-            <a:ext cx="73152" cy="1325880"/>
-          </a:xfrm>
-          <a:prstGeom prst="rect">
-            <a:avLst/>
-          </a:prstGeom>
-          <a:solidFill>
-            <a:srgbClr val="19226D"/>
-          </a:solidFill>
-          <a:ln w="7620">
-            <a:solidFill>
-              <a:srgbClr val="19226D">
-                <a:alpha val="0"/>
-              </a:srgbClr>
-            </a:solidFill>
-            <a:prstDash val="solid"/>
-          </a:ln>
-        </p:spPr>
-      </p:sp>
-      <p:sp>
-        <p:nvSpPr>
-          <p:cNvPr id="23" name="Text 21"/>
-          <p:cNvSpPr/>
-          <p:nvPr/>
-        </p:nvSpPr>
-        <p:spPr>
-          <a:xfrm>
-            <a:off x="6446520" y="3794760"/>
-            <a:ext cx="1463040" cy="164592"/>
-          </a:xfrm>
-          <a:prstGeom prst="rect">
-            <a:avLst/>
-          </a:prstGeom>
-          <a:noFill/>
-          <a:ln/>
-        </p:spPr>
-        <p:txBody>
-          <a:bodyPr wrap="square" lIns="0" tIns="0" rIns="0" bIns="0" rtlCol="0" anchor="ctr">
-            <a:normAutofit/>
-          </a:bodyPr>
-          <a:lstStyle/>
-          <a:p>
-            <a:pPr indent="0" marL="0">
-              <a:buNone/>
-            </a:pPr>
-            <a:r>
-              <a:rPr lang="en-US" sz="1100" b="1" dirty="0">
-                <a:solidFill>
-                  <a:srgbClr val="19226D"/>
-                </a:solidFill>
-                <a:latin typeface="Quattrocento Sans" pitchFamily="34" charset="0"/>
-                <a:ea typeface="Quattrocento Sans" pitchFamily="34" charset="-122"/>
-                <a:cs typeface="Quattrocento Sans" pitchFamily="34" charset="-120"/>
-              </a:rPr>
-              <a:t>Kiểm thử ẩn</a:t>
-            </a:r>
-            <a:endParaRPr lang="en-US" sz="1100" dirty="0"/>
-          </a:p>
-        </p:txBody>
-      </p:sp>
-      <p:sp>
-        <p:nvSpPr>
-          <p:cNvPr id="24" name="Text 22"/>
-          <p:cNvSpPr/>
-          <p:nvPr/>
-        </p:nvSpPr>
-        <p:spPr>
-          <a:xfrm>
-            <a:off x="7955280" y="3776472"/>
-            <a:ext cx="2788920" cy="502920"/>
-          </a:xfrm>
-          <a:prstGeom prst="rect">
-            <a:avLst/>
-          </a:prstGeom>
-          <a:noFill/>
-          <a:ln/>
-        </p:spPr>
-        <p:txBody>
-          <a:bodyPr wrap="square" lIns="0" tIns="0" rIns="0" bIns="0" rtlCol="0" anchor="ctr">
-            <a:normAutofit/>
-          </a:bodyPr>
-          <a:lstStyle/>
-          <a:p>
-            <a:pPr indent="0" marL="0">
-              <a:buNone/>
-            </a:pPr>
-            <a:r>
-              <a:rPr lang="en-US" sz="900" dirty="0">
-                <a:solidFill>
-                  <a:srgbClr val="34506E"/>
-                </a:solidFill>
-                <a:latin typeface="Quattrocento Sans" pitchFamily="34" charset="0"/>
-                <a:ea typeface="Quattrocento Sans" pitchFamily="34" charset="-122"/>
-                <a:cs typeface="Quattrocento Sans" pitchFamily="34" charset="-120"/>
-              </a:rPr>
-              <a:t>Ground truth T01d–T10d bị che; không suy diễn độ chính xác từ tập thực hành.</a:t>
-            </a:r>
-            <a:endParaRPr lang="en-US" sz="900" dirty="0"/>
-          </a:p>
-        </p:txBody>
-      </p:sp>
-      <p:sp>
-        <p:nvSpPr>
-          <p:cNvPr id="25" name="Text 23"/>
-          <p:cNvSpPr/>
-          <p:nvPr/>
-        </p:nvSpPr>
-        <p:spPr>
-          <a:xfrm>
-            <a:off x="548640" y="6071616"/>
-            <a:ext cx="10789920" cy="182880"/>
-          </a:xfrm>
-          <a:prstGeom prst="rect">
-            <a:avLst/>
-          </a:prstGeom>
-          <a:noFill/>
-          <a:ln/>
-        </p:spPr>
-        <p:txBody>
-          <a:bodyPr wrap="square" lIns="0" tIns="0" rIns="0" bIns="0" rtlCol="0" anchor="ctr">
-            <a:normAutofit/>
-          </a:bodyPr>
-          <a:lstStyle/>
-          <a:p>
-            <a:pPr indent="0" marL="0">
-              <a:buNone/>
-            </a:pPr>
-            <a:r>
-              <a:rPr lang="en-US" sz="980" i="1" dirty="0">
-                <a:solidFill>
-                  <a:srgbClr val="34506E"/>
-                </a:solidFill>
-                <a:latin typeface="Quattrocento Sans" pitchFamily="34" charset="0"/>
-                <a:ea typeface="Quattrocento Sans" pitchFamily="34" charset="-122"/>
-                <a:cs typeface="Quattrocento Sans" pitchFamily="34" charset="-120"/>
-              </a:rPr>
-              <a:t>UX theo bằng chứng: media thiếu được biểu diễn rõ; score luôn đi cùng rule, event và frame liên kết.</a:t>
-            </a:r>
-            <a:endParaRPr lang="en-US" sz="980" dirty="0"/>
-          </a:p>
-        </p:txBody>
-      </p:sp>
-    </p:spTree>
-  </p:cSld>
-  <p:clrMapOvr>
-    <a:masterClrMapping/>
-  </p:clrMapOvr>
-</p:sld>
-</file>
-
-<file path=ppt/slides/slide13.xml><?xml version="1.0" encoding="utf-8"?>
-<p:sld xmlns:a="http://schemas.openxmlformats.org/drawingml/2006/main" xmlns:r="http://schemas.openxmlformats.org/officeDocument/2006/relationships" xmlns:p="http://schemas.openxmlformats.org/presentationml/2006/main">
-  <p:cSld name="Slide 13">
-    <p:bg>
-      <p:bgPr>
-        <a:solidFill>
-          <a:srgbClr val="F4F7FC"/>
-        </a:solidFill>
-      </p:bgPr>
-    </p:bg>
-    <p:spTree>
-      <p:nvGrpSpPr>
-        <p:cNvPr id="1" name=""/>
-        <p:cNvGrpSpPr/>
-        <p:nvPr/>
-      </p:nvGrpSpPr>
-      <p:grpSpPr>
-        <a:xfrm>
-          <a:off x="0" y="0"/>
-          <a:ext cx="0" cy="0"/>
-          <a:chOff x="0" y="0"/>
-          <a:chExt cx="0" cy="0"/>
-        </a:xfrm>
-      </p:grpSpPr>
-      <p:sp>
-        <p:nvSpPr>
-          <p:cNvPr id="2" name="Shape 0"/>
-          <p:cNvSpPr/>
-          <p:nvPr/>
-        </p:nvSpPr>
-        <p:spPr>
-          <a:xfrm>
-            <a:off x="0" y="0"/>
-            <a:ext cx="12191695" cy="164592"/>
-          </a:xfrm>
-          <a:prstGeom prst="rect">
-            <a:avLst/>
-          </a:prstGeom>
-          <a:solidFill>
-            <a:srgbClr val="F37021"/>
-          </a:solidFill>
-          <a:ln w="7620">
-            <a:solidFill>
-              <a:srgbClr val="F37021">
-                <a:alpha val="0"/>
-              </a:srgbClr>
-            </a:solidFill>
-            <a:prstDash val="solid"/>
-          </a:ln>
-        </p:spPr>
-      </p:sp>
-      <p:sp>
-        <p:nvSpPr>
-          <p:cNvPr id="3" name="Text 1"/>
-          <p:cNvSpPr/>
-          <p:nvPr/>
-        </p:nvSpPr>
-        <p:spPr>
-          <a:xfrm>
-            <a:off x="548640" y="438912"/>
-            <a:ext cx="5486400" cy="137160"/>
-          </a:xfrm>
-          <a:prstGeom prst="rect">
-            <a:avLst/>
-          </a:prstGeom>
-          <a:noFill/>
-          <a:ln/>
-        </p:spPr>
-        <p:txBody>
-          <a:bodyPr wrap="square" lIns="0" tIns="0" rIns="0" bIns="0" rtlCol="0" anchor="ctr"/>
-          <a:lstStyle/>
-          <a:p>
-            <a:pPr indent="0" marL="0">
-              <a:buNone/>
-            </a:pPr>
-            <a:r>
-              <a:rPr lang="en-US" sz="880" b="1" spc="130" kern="0" dirty="0">
-                <a:solidFill>
-                  <a:srgbClr val="F37021"/>
-                </a:solidFill>
-                <a:latin typeface="Quattrocento Sans" pitchFamily="34" charset="0"/>
-                <a:ea typeface="Quattrocento Sans" pitchFamily="34" charset="-122"/>
-                <a:cs typeface="Quattrocento Sans" pitchFamily="34" charset="-120"/>
-              </a:rPr>
-              <a:t>SẴN SÀNG TRÌNH DIỄN</a:t>
-            </a:r>
-            <a:endParaRPr lang="en-US" sz="880" dirty="0"/>
-          </a:p>
-        </p:txBody>
-      </p:sp>
-      <p:sp>
-        <p:nvSpPr>
-          <p:cNvPr id="4" name="Text 2"/>
-          <p:cNvSpPr/>
-          <p:nvPr/>
-        </p:nvSpPr>
-        <p:spPr>
-          <a:xfrm>
-            <a:off x="548640" y="694944"/>
-            <a:ext cx="10972800" cy="438912"/>
-          </a:xfrm>
-          <a:prstGeom prst="rect">
-            <a:avLst/>
-          </a:prstGeom>
-          <a:noFill/>
-          <a:ln/>
-        </p:spPr>
-        <p:txBody>
-          <a:bodyPr wrap="square" lIns="0" tIns="0" rIns="0" bIns="0" rtlCol="0" anchor="ctr">
-            <a:normAutofit/>
-          </a:bodyPr>
-          <a:lstStyle/>
-          <a:p>
-            <a:pPr indent="0" marL="0">
-              <a:buNone/>
-            </a:pPr>
-            <a:r>
-              <a:rPr lang="en-US" sz="2700" b="1" dirty="0">
-                <a:solidFill>
-                  <a:srgbClr val="19226D"/>
-                </a:solidFill>
-                <a:latin typeface="Quattrocento Sans" pitchFamily="34" charset="0"/>
-                <a:ea typeface="Quattrocento Sans" pitchFamily="34" charset="-122"/>
-                <a:cs typeface="Quattrocento Sans" pitchFamily="34" charset="-120"/>
-              </a:rPr>
-              <a:t>MỘT LUỒNG QUYẾT ĐỊNH HOÀN CHỈNH CHO FLEET MANAGER</a:t>
-            </a:r>
-            <a:endParaRPr lang="en-US" sz="2700" dirty="0"/>
-          </a:p>
-        </p:txBody>
-      </p:sp>
-      <p:sp>
-        <p:nvSpPr>
-          <p:cNvPr id="5" name="Text 3"/>
-          <p:cNvSpPr/>
-          <p:nvPr/>
-        </p:nvSpPr>
-        <p:spPr>
-          <a:xfrm>
-            <a:off x="557784" y="1261872"/>
-            <a:ext cx="10789920" cy="237744"/>
-          </a:xfrm>
-          <a:prstGeom prst="rect">
-            <a:avLst/>
-          </a:prstGeom>
-          <a:noFill/>
-          <a:ln/>
-        </p:spPr>
-        <p:txBody>
-          <a:bodyPr wrap="square" lIns="0" tIns="0" rIns="0" bIns="0" rtlCol="0" anchor="ctr">
-            <a:normAutofit/>
-          </a:bodyPr>
-          <a:lstStyle/>
-          <a:p>
-            <a:pPr indent="0" marL="0">
-              <a:buNone/>
-            </a:pPr>
-            <a:r>
-              <a:rPr lang="en-US" sz="1080" dirty="0">
-                <a:solidFill>
-                  <a:srgbClr val="6B7A90"/>
-                </a:solidFill>
-                <a:latin typeface="Quattrocento Sans" pitchFamily="34" charset="0"/>
-                <a:ea typeface="Quattrocento Sans" pitchFamily="34" charset="-122"/>
-                <a:cs typeface="Quattrocento Sans" pitchFamily="34" charset="-120"/>
-              </a:rPr>
-              <a:t>Từ chuyến cần xem đến coaching, mọi bước đều có ngữ cảnh để người vận hành hành động.</a:t>
-            </a:r>
-            <a:endParaRPr lang="en-US" sz="1080" dirty="0"/>
-          </a:p>
-        </p:txBody>
-      </p:sp>
-      <p:sp>
-        <p:nvSpPr>
-          <p:cNvPr id="6" name="Shape 4"/>
-          <p:cNvSpPr/>
-          <p:nvPr/>
-        </p:nvSpPr>
-        <p:spPr>
-          <a:xfrm>
-            <a:off x="512064" y="6464808"/>
-            <a:ext cx="11155680" cy="0"/>
-          </a:xfrm>
-          <a:prstGeom prst="line">
-            <a:avLst/>
-          </a:prstGeom>
-          <a:noFill/>
-          <a:ln w="16510">
-            <a:solidFill>
-              <a:srgbClr val="CDCCCC"/>
-            </a:solidFill>
-            <a:prstDash val="solid"/>
-            <a:tailEnd type="none"/>
-          </a:ln>
-        </p:spPr>
-      </p:sp>
-      <p:sp>
-        <p:nvSpPr>
-          <p:cNvPr id="7" name="Text 5"/>
-          <p:cNvSpPr/>
-          <p:nvPr/>
-        </p:nvSpPr>
-        <p:spPr>
-          <a:xfrm>
-            <a:off x="548640" y="6556248"/>
-            <a:ext cx="7315200" cy="128016"/>
-          </a:xfrm>
-          <a:prstGeom prst="rect">
-            <a:avLst/>
-          </a:prstGeom>
-          <a:noFill/>
-          <a:ln/>
-        </p:spPr>
-        <p:txBody>
-          <a:bodyPr wrap="square" lIns="0" tIns="0" rIns="0" bIns="0" rtlCol="0" anchor="ctr"/>
-          <a:lstStyle/>
-          <a:p>
-            <a:pPr indent="0" marL="0">
-              <a:buNone/>
-            </a:pPr>
-            <a:r>
-              <a:rPr lang="en-US" sz="740" dirty="0">
-                <a:solidFill>
-                  <a:srgbClr val="6B7A90"/>
-                </a:solidFill>
-                <a:latin typeface="Quattrocento Sans" pitchFamily="34" charset="0"/>
-                <a:ea typeface="Quattrocento Sans" pitchFamily="34" charset="-122"/>
-                <a:cs typeface="Quattrocento Sans" pitchFamily="34" charset="-120"/>
-              </a:rPr>
-              <a:t>UchiHahaha | FleetIQ Guardian | AUTOMOTIVE HACKATHON 2026</a:t>
-            </a:r>
-            <a:endParaRPr lang="en-US" sz="740" dirty="0"/>
-          </a:p>
-        </p:txBody>
-      </p:sp>
-      <p:sp>
-        <p:nvSpPr>
-          <p:cNvPr id="8" name="Text 6"/>
-          <p:cNvSpPr/>
-          <p:nvPr/>
-        </p:nvSpPr>
-        <p:spPr>
-          <a:xfrm>
-            <a:off x="11027664" y="6510528"/>
-            <a:ext cx="594360" cy="137160"/>
-          </a:xfrm>
-          <a:prstGeom prst="rect">
-            <a:avLst/>
-          </a:prstGeom>
-          <a:noFill/>
-          <a:ln/>
-        </p:spPr>
-        <p:txBody>
-          <a:bodyPr wrap="square" lIns="0" tIns="0" rIns="0" bIns="0" rtlCol="0" anchor="ctr"/>
-          <a:lstStyle/>
-          <a:p>
-            <a:pPr algn="r" indent="0" marL="0">
-              <a:buNone/>
-            </a:pPr>
-            <a:r>
-              <a:rPr lang="en-US" sz="900" b="1" dirty="0">
-                <a:solidFill>
-                  <a:srgbClr val="034EA2"/>
-                </a:solidFill>
-                <a:latin typeface="Quattrocento Sans" pitchFamily="34" charset="0"/>
-                <a:ea typeface="Quattrocento Sans" pitchFamily="34" charset="-122"/>
-                <a:cs typeface="Quattrocento Sans" pitchFamily="34" charset="-120"/>
-              </a:rPr>
-              <a:t>13</a:t>
-            </a:r>
-            <a:endParaRPr lang="en-US" sz="900" dirty="0"/>
-          </a:p>
-        </p:txBody>
-      </p:sp>
-      <p:sp>
-        <p:nvSpPr>
-          <p:cNvPr id="9" name="Shape 7"/>
-          <p:cNvSpPr/>
-          <p:nvPr/>
-        </p:nvSpPr>
-        <p:spPr>
-          <a:xfrm>
-            <a:off x="676656" y="1874520"/>
-            <a:ext cx="3236976" cy="2194560"/>
-          </a:xfrm>
-          <a:prstGeom prst="rect">
-            <a:avLst/>
-          </a:prstGeom>
-          <a:solidFill>
-            <a:srgbClr val="FFFFFF"/>
-          </a:solidFill>
-          <a:ln w="7620">
-            <a:solidFill>
-              <a:srgbClr val="CDCCCC"/>
-            </a:solidFill>
-            <a:prstDash val="solid"/>
-          </a:ln>
-        </p:spPr>
-      </p:sp>
-      <p:sp>
-        <p:nvSpPr>
-          <p:cNvPr id="10" name="Shape 8"/>
-          <p:cNvSpPr/>
-          <p:nvPr/>
-        </p:nvSpPr>
-        <p:spPr>
-          <a:xfrm>
-            <a:off x="676656" y="1874520"/>
-            <a:ext cx="73152" cy="2194560"/>
-          </a:xfrm>
-          <a:prstGeom prst="rect">
-            <a:avLst/>
-          </a:prstGeom>
-          <a:solidFill>
-            <a:srgbClr val="034EA2"/>
-          </a:solidFill>
-          <a:ln w="7620">
-            <a:solidFill>
-              <a:srgbClr val="034EA2">
-                <a:alpha val="0"/>
-              </a:srgbClr>
-            </a:solidFill>
-            <a:prstDash val="solid"/>
-          </a:ln>
-        </p:spPr>
-      </p:sp>
-      <p:sp>
-        <p:nvSpPr>
-          <p:cNvPr id="11" name="Shape 9"/>
-          <p:cNvSpPr/>
-          <p:nvPr/>
-        </p:nvSpPr>
-        <p:spPr>
-          <a:xfrm>
-            <a:off x="950976" y="2157984"/>
-            <a:ext cx="1005840" cy="256032"/>
-          </a:xfrm>
-          <a:prstGeom prst="rect">
-            <a:avLst/>
-          </a:prstGeom>
-          <a:solidFill>
-            <a:srgbClr val="034EA2"/>
-          </a:solidFill>
-          <a:ln w="7620">
-            <a:solidFill>
-              <a:srgbClr val="034EA2">
-                <a:alpha val="0"/>
-              </a:srgbClr>
-            </a:solidFill>
-            <a:prstDash val="solid"/>
-          </a:ln>
-        </p:spPr>
-      </p:sp>
-      <p:sp>
-        <p:nvSpPr>
-          <p:cNvPr id="12" name="Text 10"/>
-          <p:cNvSpPr/>
-          <p:nvPr/>
-        </p:nvSpPr>
-        <p:spPr>
-          <a:xfrm>
-            <a:off x="1042416" y="2231136"/>
-            <a:ext cx="822960" cy="91440"/>
-          </a:xfrm>
-          <a:prstGeom prst="rect">
-            <a:avLst/>
-          </a:prstGeom>
-          <a:noFill/>
-          <a:ln/>
-        </p:spPr>
-        <p:txBody>
-          <a:bodyPr wrap="square" lIns="0" tIns="0" rIns="0" bIns="0" rtlCol="0" anchor="ctr"/>
-          <a:lstStyle/>
-          <a:p>
-            <a:pPr algn="ctr" indent="0" marL="0">
-              <a:buNone/>
-            </a:pPr>
-            <a:r>
-              <a:rPr lang="en-US" sz="750" b="1" spc="60" kern="0" dirty="0">
-                <a:solidFill>
-                  <a:srgbClr val="FFFFFF"/>
-                </a:solidFill>
-                <a:latin typeface="Quattrocento Sans" pitchFamily="34" charset="0"/>
-                <a:ea typeface="Quattrocento Sans" pitchFamily="34" charset="-122"/>
-                <a:cs typeface="Quattrocento Sans" pitchFamily="34" charset="-120"/>
-              </a:rPr>
-              <a:t>MỞ</a:t>
-            </a:r>
-            <a:endParaRPr lang="en-US" sz="750" dirty="0"/>
-          </a:p>
-        </p:txBody>
-      </p:sp>
-      <p:sp>
-        <p:nvSpPr>
-          <p:cNvPr id="13" name="Text 11"/>
-          <p:cNvSpPr/>
-          <p:nvPr/>
-        </p:nvSpPr>
-        <p:spPr>
-          <a:xfrm>
-            <a:off x="950976" y="2697480"/>
-            <a:ext cx="2468880" cy="237744"/>
-          </a:xfrm>
-          <a:prstGeom prst="rect">
-            <a:avLst/>
-          </a:prstGeom>
-          <a:noFill/>
-          <a:ln/>
-        </p:spPr>
-        <p:txBody>
-          <a:bodyPr wrap="square" lIns="0" tIns="0" rIns="0" bIns="0" rtlCol="0" anchor="ctr">
-            <a:normAutofit/>
-          </a:bodyPr>
-          <a:lstStyle/>
-          <a:p>
-            <a:pPr indent="0" marL="0">
-              <a:buNone/>
-            </a:pPr>
-            <a:r>
-              <a:rPr lang="en-US" sz="1500" b="1" dirty="0">
-                <a:solidFill>
-                  <a:srgbClr val="19226D"/>
-                </a:solidFill>
-                <a:latin typeface="Quattrocento Sans" pitchFamily="34" charset="0"/>
-                <a:ea typeface="Quattrocento Sans" pitchFamily="34" charset="-122"/>
-                <a:cs typeface="Quattrocento Sans" pitchFamily="34" charset="-120"/>
-              </a:rPr>
-              <a:t>Chọn đúng chuyến</a:t>
-            </a:r>
-            <a:endParaRPr lang="en-US" sz="1500" dirty="0"/>
-          </a:p>
-        </p:txBody>
-      </p:sp>
-      <p:sp>
-        <p:nvSpPr>
-          <p:cNvPr id="14" name="Text 12"/>
-          <p:cNvSpPr/>
-          <p:nvPr/>
-        </p:nvSpPr>
-        <p:spPr>
-          <a:xfrm>
-            <a:off x="950976" y="3227832"/>
-            <a:ext cx="2487168" cy="438912"/>
-          </a:xfrm>
-          <a:prstGeom prst="rect">
-            <a:avLst/>
-          </a:prstGeom>
-          <a:noFill/>
-          <a:ln/>
-        </p:spPr>
-        <p:txBody>
-          <a:bodyPr wrap="square" lIns="0" tIns="0" rIns="0" bIns="0" rtlCol="0" anchor="ctr">
-            <a:normAutofit/>
-          </a:bodyPr>
-          <a:lstStyle/>
-          <a:p>
-            <a:pPr indent="0" marL="0">
-              <a:buNone/>
-            </a:pPr>
-            <a:r>
-              <a:rPr lang="en-US" sz="930" dirty="0">
-                <a:solidFill>
-                  <a:srgbClr val="6B7A90"/>
-                </a:solidFill>
-                <a:latin typeface="Quattrocento Sans" pitchFamily="34" charset="0"/>
-                <a:ea typeface="Quattrocento Sans" pitchFamily="34" charset="-122"/>
-                <a:cs typeface="Quattrocento Sans" pitchFamily="34" charset="-120"/>
-              </a:rPr>
-              <a:t>Dashboard hiển thị điểm theo rule và những event cần ưu tiên xem lại.</a:t>
-            </a:r>
-            <a:endParaRPr lang="en-US" sz="930" dirty="0"/>
-          </a:p>
-        </p:txBody>
-      </p:sp>
-      <p:sp>
-        <p:nvSpPr>
-          <p:cNvPr id="15" name="Shape 13"/>
-          <p:cNvSpPr/>
-          <p:nvPr/>
-        </p:nvSpPr>
-        <p:spPr>
-          <a:xfrm>
-            <a:off x="4407408" y="1874520"/>
-            <a:ext cx="3236976" cy="2194560"/>
-          </a:xfrm>
-          <a:prstGeom prst="rect">
-            <a:avLst/>
-          </a:prstGeom>
-          <a:solidFill>
-            <a:srgbClr val="FFFFFF"/>
-          </a:solidFill>
-          <a:ln w="7620">
-            <a:solidFill>
-              <a:srgbClr val="CDCCCC"/>
-            </a:solidFill>
-            <a:prstDash val="solid"/>
-          </a:ln>
-        </p:spPr>
-      </p:sp>
-      <p:sp>
-        <p:nvSpPr>
-          <p:cNvPr id="16" name="Shape 14"/>
-          <p:cNvSpPr/>
-          <p:nvPr/>
-        </p:nvSpPr>
-        <p:spPr>
-          <a:xfrm>
-            <a:off x="4407408" y="1874520"/>
-            <a:ext cx="73152" cy="2194560"/>
-          </a:xfrm>
-          <a:prstGeom prst="rect">
-            <a:avLst/>
-          </a:prstGeom>
-          <a:solidFill>
-            <a:srgbClr val="F37021"/>
-          </a:solidFill>
-          <a:ln w="7620">
-            <a:solidFill>
-              <a:srgbClr val="F37021">
-                <a:alpha val="0"/>
-              </a:srgbClr>
-            </a:solidFill>
-            <a:prstDash val="solid"/>
-          </a:ln>
-        </p:spPr>
-      </p:sp>
-      <p:sp>
-        <p:nvSpPr>
-          <p:cNvPr id="17" name="Shape 15"/>
-          <p:cNvSpPr/>
-          <p:nvPr/>
-        </p:nvSpPr>
-        <p:spPr>
-          <a:xfrm>
-            <a:off x="4681728" y="2157984"/>
-            <a:ext cx="1005840" cy="256032"/>
-          </a:xfrm>
-          <a:prstGeom prst="rect">
-            <a:avLst/>
-          </a:prstGeom>
-          <a:solidFill>
-            <a:srgbClr val="F37021"/>
-          </a:solidFill>
-          <a:ln w="7620">
-            <a:solidFill>
-              <a:srgbClr val="F37021">
-                <a:alpha val="0"/>
-              </a:srgbClr>
-            </a:solidFill>
-            <a:prstDash val="solid"/>
-          </a:ln>
-        </p:spPr>
-      </p:sp>
-      <p:sp>
-        <p:nvSpPr>
-          <p:cNvPr id="18" name="Text 16"/>
-          <p:cNvSpPr/>
-          <p:nvPr/>
-        </p:nvSpPr>
-        <p:spPr>
-          <a:xfrm>
-            <a:off x="4773168" y="2231136"/>
-            <a:ext cx="822960" cy="91440"/>
-          </a:xfrm>
-          <a:prstGeom prst="rect">
-            <a:avLst/>
-          </a:prstGeom>
-          <a:noFill/>
-          <a:ln/>
-        </p:spPr>
-        <p:txBody>
-          <a:bodyPr wrap="square" lIns="0" tIns="0" rIns="0" bIns="0" rtlCol="0" anchor="ctr"/>
-          <a:lstStyle/>
-          <a:p>
-            <a:pPr algn="ctr" indent="0" marL="0">
-              <a:buNone/>
-            </a:pPr>
-            <a:r>
-              <a:rPr lang="en-US" sz="750" b="1" spc="60" kern="0" dirty="0">
-                <a:solidFill>
-                  <a:srgbClr val="FFFFFF"/>
-                </a:solidFill>
-                <a:latin typeface="Quattrocento Sans" pitchFamily="34" charset="0"/>
-                <a:ea typeface="Quattrocento Sans" pitchFamily="34" charset="-122"/>
-                <a:cs typeface="Quattrocento Sans" pitchFamily="34" charset="-120"/>
-              </a:rPr>
-              <a:t>KIỂM</a:t>
-            </a:r>
-            <a:endParaRPr lang="en-US" sz="750" dirty="0"/>
-          </a:p>
-        </p:txBody>
-      </p:sp>
-      <p:sp>
-        <p:nvSpPr>
-          <p:cNvPr id="19" name="Text 17"/>
-          <p:cNvSpPr/>
-          <p:nvPr/>
-        </p:nvSpPr>
-        <p:spPr>
-          <a:xfrm>
-            <a:off x="4681728" y="2697480"/>
-            <a:ext cx="2468880" cy="237744"/>
-          </a:xfrm>
-          <a:prstGeom prst="rect">
-            <a:avLst/>
-          </a:prstGeom>
-          <a:noFill/>
-          <a:ln/>
-        </p:spPr>
-        <p:txBody>
-          <a:bodyPr wrap="square" lIns="0" tIns="0" rIns="0" bIns="0" rtlCol="0" anchor="ctr">
-            <a:normAutofit/>
-          </a:bodyPr>
-          <a:lstStyle/>
-          <a:p>
-            <a:pPr indent="0" marL="0">
-              <a:buNone/>
-            </a:pPr>
-            <a:r>
-              <a:rPr lang="en-US" sz="1500" b="1" dirty="0">
-                <a:solidFill>
-                  <a:srgbClr val="19226D"/>
-                </a:solidFill>
-                <a:latin typeface="Quattrocento Sans" pitchFamily="34" charset="0"/>
-                <a:ea typeface="Quattrocento Sans" pitchFamily="34" charset="-122"/>
-                <a:cs typeface="Quattrocento Sans" pitchFamily="34" charset="-120"/>
-              </a:rPr>
-              <a:t>Xem đúng bối cảnh</a:t>
-            </a:r>
-            <a:endParaRPr lang="en-US" sz="1500" dirty="0"/>
-          </a:p>
-        </p:txBody>
-      </p:sp>
-      <p:sp>
-        <p:nvSpPr>
-          <p:cNvPr id="20" name="Text 18"/>
-          <p:cNvSpPr/>
-          <p:nvPr/>
-        </p:nvSpPr>
-        <p:spPr>
-          <a:xfrm>
-            <a:off x="4681728" y="3227832"/>
-            <a:ext cx="2487168" cy="438912"/>
-          </a:xfrm>
-          <a:prstGeom prst="rect">
-            <a:avLst/>
-          </a:prstGeom>
-          <a:noFill/>
-          <a:ln/>
-        </p:spPr>
-        <p:txBody>
-          <a:bodyPr wrap="square" lIns="0" tIns="0" rIns="0" bIns="0" rtlCol="0" anchor="ctr">
-            <a:normAutofit/>
-          </a:bodyPr>
-          <a:lstStyle/>
-          <a:p>
-            <a:pPr indent="0" marL="0">
-              <a:buNone/>
-            </a:pPr>
-            <a:r>
-              <a:rPr lang="en-US" sz="930" dirty="0">
-                <a:solidFill>
-                  <a:srgbClr val="6B7A90"/>
-                </a:solidFill>
-                <a:latin typeface="Quattrocento Sans" pitchFamily="34" charset="0"/>
-                <a:ea typeface="Quattrocento Sans" pitchFamily="34" charset="-122"/>
-                <a:cs typeface="Quattrocento Sans" pitchFamily="34" charset="-120"/>
-              </a:rPr>
-              <a:t>Timeline mở camera đường, DMS và telemetry tại cùng một khung hình.</a:t>
-            </a:r>
-            <a:endParaRPr lang="en-US" sz="930" dirty="0"/>
-          </a:p>
-        </p:txBody>
-      </p:sp>
-      <p:sp>
-        <p:nvSpPr>
-          <p:cNvPr id="21" name="Shape 19"/>
-          <p:cNvSpPr/>
-          <p:nvPr/>
-        </p:nvSpPr>
-        <p:spPr>
-          <a:xfrm>
-            <a:off x="8138160" y="1874520"/>
-            <a:ext cx="3236976" cy="2194560"/>
-          </a:xfrm>
-          <a:prstGeom prst="rect">
-            <a:avLst/>
-          </a:prstGeom>
-          <a:solidFill>
-            <a:srgbClr val="FFFFFF"/>
-          </a:solidFill>
-          <a:ln w="7620">
-            <a:solidFill>
-              <a:srgbClr val="CDCCCC"/>
-            </a:solidFill>
-            <a:prstDash val="solid"/>
-          </a:ln>
-        </p:spPr>
-      </p:sp>
-      <p:sp>
-        <p:nvSpPr>
-          <p:cNvPr id="22" name="Shape 20"/>
-          <p:cNvSpPr/>
-          <p:nvPr/>
-        </p:nvSpPr>
-        <p:spPr>
-          <a:xfrm>
-            <a:off x="8138160" y="1874520"/>
-            <a:ext cx="73152" cy="2194560"/>
-          </a:xfrm>
-          <a:prstGeom prst="rect">
-            <a:avLst/>
-          </a:prstGeom>
-          <a:solidFill>
-            <a:srgbClr val="22B573"/>
-          </a:solidFill>
-          <a:ln w="7620">
-            <a:solidFill>
-              <a:srgbClr val="22B573">
-                <a:alpha val="0"/>
-              </a:srgbClr>
-            </a:solidFill>
-            <a:prstDash val="solid"/>
-          </a:ln>
-        </p:spPr>
-      </p:sp>
-      <p:sp>
-        <p:nvSpPr>
-          <p:cNvPr id="23" name="Shape 21"/>
-          <p:cNvSpPr/>
-          <p:nvPr/>
-        </p:nvSpPr>
-        <p:spPr>
-          <a:xfrm>
-            <a:off x="8412480" y="2157984"/>
-            <a:ext cx="1005840" cy="256032"/>
-          </a:xfrm>
-          <a:prstGeom prst="rect">
-            <a:avLst/>
-          </a:prstGeom>
-          <a:solidFill>
-            <a:srgbClr val="22B573"/>
-          </a:solidFill>
-          <a:ln w="7620">
-            <a:solidFill>
-              <a:srgbClr val="22B573">
-                <a:alpha val="0"/>
-              </a:srgbClr>
-            </a:solidFill>
-            <a:prstDash val="solid"/>
-          </a:ln>
-        </p:spPr>
-      </p:sp>
-      <p:sp>
-        <p:nvSpPr>
-          <p:cNvPr id="24" name="Text 22"/>
-          <p:cNvSpPr/>
-          <p:nvPr/>
-        </p:nvSpPr>
-        <p:spPr>
-          <a:xfrm>
-            <a:off x="8503920" y="2231136"/>
-            <a:ext cx="822960" cy="91440"/>
-          </a:xfrm>
-          <a:prstGeom prst="rect">
-            <a:avLst/>
-          </a:prstGeom>
-          <a:noFill/>
-          <a:ln/>
-        </p:spPr>
-        <p:txBody>
-          <a:bodyPr wrap="square" lIns="0" tIns="0" rIns="0" bIns="0" rtlCol="0" anchor="ctr"/>
-          <a:lstStyle/>
-          <a:p>
-            <a:pPr algn="ctr" indent="0" marL="0">
-              <a:buNone/>
-            </a:pPr>
-            <a:r>
-              <a:rPr lang="en-US" sz="750" b="1" spc="60" kern="0" dirty="0">
-                <a:solidFill>
-                  <a:srgbClr val="FFFFFF"/>
-                </a:solidFill>
-                <a:latin typeface="Quattrocento Sans" pitchFamily="34" charset="0"/>
-                <a:ea typeface="Quattrocento Sans" pitchFamily="34" charset="-122"/>
-                <a:cs typeface="Quattrocento Sans" pitchFamily="34" charset="-120"/>
-              </a:rPr>
-              <a:t>HÀNH ĐỘNG</a:t>
-            </a:r>
-            <a:endParaRPr lang="en-US" sz="750" dirty="0"/>
-          </a:p>
-        </p:txBody>
-      </p:sp>
-      <p:sp>
-        <p:nvSpPr>
-          <p:cNvPr id="25" name="Text 23"/>
-          <p:cNvSpPr/>
-          <p:nvPr/>
-        </p:nvSpPr>
-        <p:spPr>
-          <a:xfrm>
-            <a:off x="8412480" y="2697480"/>
-            <a:ext cx="2468880" cy="237744"/>
-          </a:xfrm>
-          <a:prstGeom prst="rect">
-            <a:avLst/>
-          </a:prstGeom>
-          <a:noFill/>
-          <a:ln/>
-        </p:spPr>
-        <p:txBody>
-          <a:bodyPr wrap="square" lIns="0" tIns="0" rIns="0" bIns="0" rtlCol="0" anchor="ctr">
-            <a:normAutofit/>
-          </a:bodyPr>
-          <a:lstStyle/>
-          <a:p>
-            <a:pPr indent="0" marL="0">
-              <a:buNone/>
-            </a:pPr>
-            <a:r>
-              <a:rPr lang="en-US" sz="1500" b="1" dirty="0">
-                <a:solidFill>
-                  <a:srgbClr val="19226D"/>
-                </a:solidFill>
-                <a:latin typeface="Quattrocento Sans" pitchFamily="34" charset="0"/>
-                <a:ea typeface="Quattrocento Sans" pitchFamily="34" charset="-122"/>
-                <a:cs typeface="Quattrocento Sans" pitchFamily="34" charset="-120"/>
-              </a:rPr>
-              <a:t>Gán coaching rõ ràng</a:t>
-            </a:r>
-            <a:endParaRPr lang="en-US" sz="1500" dirty="0"/>
-          </a:p>
-        </p:txBody>
-      </p:sp>
-      <p:sp>
-        <p:nvSpPr>
-          <p:cNvPr id="26" name="Text 24"/>
-          <p:cNvSpPr/>
-          <p:nvPr/>
-        </p:nvSpPr>
-        <p:spPr>
-          <a:xfrm>
-            <a:off x="8412480" y="3227832"/>
-            <a:ext cx="2487168" cy="438912"/>
-          </a:xfrm>
-          <a:prstGeom prst="rect">
-            <a:avLst/>
-          </a:prstGeom>
-          <a:noFill/>
-          <a:ln/>
-        </p:spPr>
-        <p:txBody>
-          <a:bodyPr wrap="square" lIns="0" tIns="0" rIns="0" bIns="0" rtlCol="0" anchor="ctr">
-            <a:normAutofit/>
-          </a:bodyPr>
-          <a:lstStyle/>
-          <a:p>
-            <a:pPr indent="0" marL="0">
-              <a:buNone/>
-            </a:pPr>
-            <a:r>
-              <a:rPr lang="en-US" sz="930" dirty="0">
-                <a:solidFill>
-                  <a:srgbClr val="6B7A90"/>
-                </a:solidFill>
-                <a:latin typeface="Quattrocento Sans" pitchFamily="34" charset="0"/>
-                <a:ea typeface="Quattrocento Sans" pitchFamily="34" charset="-122"/>
-                <a:cs typeface="Quattrocento Sans" pitchFamily="34" charset="-120"/>
-              </a:rPr>
-              <a:t>Kết thúc bằng hướng dẫn liên kết với bằng chứng, không phải cảnh báo chung chung.</a:t>
-            </a:r>
-            <a:endParaRPr lang="en-US" sz="930" dirty="0"/>
-          </a:p>
-        </p:txBody>
-      </p:sp>
-      <p:sp>
-        <p:nvSpPr>
-          <p:cNvPr id="27" name="Shape 25"/>
-          <p:cNvSpPr/>
-          <p:nvPr/>
-        </p:nvSpPr>
-        <p:spPr>
-          <a:xfrm>
-            <a:off x="676656" y="4535424"/>
-            <a:ext cx="10789920" cy="850392"/>
-          </a:xfrm>
-          <a:prstGeom prst="rect">
-            <a:avLst/>
-          </a:prstGeom>
-          <a:solidFill>
-            <a:srgbClr val="19226D"/>
-          </a:solidFill>
-          <a:ln w="7620">
-            <a:solidFill>
-              <a:srgbClr val="19226D">
-                <a:alpha val="0"/>
-              </a:srgbClr>
-            </a:solidFill>
-            <a:prstDash val="solid"/>
-          </a:ln>
-        </p:spPr>
-      </p:sp>
-      <p:sp>
-        <p:nvSpPr>
-          <p:cNvPr id="28" name="Text 26"/>
-          <p:cNvSpPr/>
-          <p:nvPr/>
-        </p:nvSpPr>
-        <p:spPr>
-          <a:xfrm>
-            <a:off x="914400" y="4818888"/>
-            <a:ext cx="10287000" cy="146304"/>
-          </a:xfrm>
-          <a:prstGeom prst="rect">
-            <a:avLst/>
-          </a:prstGeom>
-          <a:noFill/>
-          <a:ln/>
-        </p:spPr>
-        <p:txBody>
-          <a:bodyPr wrap="square" lIns="0" tIns="0" rIns="0" bIns="0" rtlCol="0" anchor="ctr">
-            <a:normAutofit/>
-          </a:bodyPr>
-          <a:lstStyle/>
-          <a:p>
-            <a:pPr algn="ctr" indent="0" marL="0">
-              <a:buNone/>
-            </a:pPr>
-            <a:r>
-              <a:rPr lang="en-US" sz="1050" b="1" dirty="0">
-                <a:solidFill>
-                  <a:srgbClr val="FFFFFF"/>
-                </a:solidFill>
-                <a:latin typeface="Quattrocento Sans" pitchFamily="34" charset="0"/>
-                <a:ea typeface="Quattrocento Sans" pitchFamily="34" charset="-122"/>
-                <a:cs typeface="Quattrocento Sans" pitchFamily="34" charset="-120"/>
-              </a:rPr>
-              <a:t>MVP ĐÃ SẴN SÀNG: dashboard · trip replay · event evidence · điểm theo rule · coaching có ngữ cảnh.</a:t>
-            </a:r>
-            <a:endParaRPr lang="en-US" sz="1050" dirty="0"/>
-          </a:p>
-        </p:txBody>
-      </p:sp>
-      <p:sp>
-        <p:nvSpPr>
-          <p:cNvPr id="29" name="Text 27"/>
-          <p:cNvSpPr/>
-          <p:nvPr/>
-        </p:nvSpPr>
-        <p:spPr>
-          <a:xfrm>
-            <a:off x="548640" y="6071616"/>
-            <a:ext cx="10789920" cy="182880"/>
-          </a:xfrm>
-          <a:prstGeom prst="rect">
-            <a:avLst/>
-          </a:prstGeom>
-          <a:noFill/>
-          <a:ln/>
-        </p:spPr>
-        <p:txBody>
-          <a:bodyPr wrap="square" lIns="0" tIns="0" rIns="0" bIns="0" rtlCol="0" anchor="ctr">
-            <a:normAutofit/>
-          </a:bodyPr>
-          <a:lstStyle/>
-          <a:p>
-            <a:pPr indent="0" marL="0">
-              <a:buNone/>
-            </a:pPr>
-            <a:r>
-              <a:rPr lang="en-US" sz="980" i="1" dirty="0">
-                <a:solidFill>
-                  <a:srgbClr val="34506E"/>
-                </a:solidFill>
-                <a:latin typeface="Quattrocento Sans" pitchFamily="34" charset="0"/>
-                <a:ea typeface="Quattrocento Sans" pitchFamily="34" charset="-122"/>
-                <a:cs typeface="Quattrocento Sans" pitchFamily="34" charset="-120"/>
-              </a:rPr>
-              <a:t>Demo flow: dashboard → chuyến rủi ro → timeline → evidence → điểm theo rule → coaching.</a:t>
-            </a:r>
-            <a:endParaRPr lang="en-US" sz="980" dirty="0"/>
-          </a:p>
-        </p:txBody>
-      </p:sp>
-    </p:spTree>
-  </p:cSld>
-  <p:clrMapOvr>
-    <a:masterClrMapping/>
-  </p:clrMapOvr>
-</p:sld>
-</file>
-
-<file path=ppt/slides/slide14.xml><?xml version="1.0" encoding="utf-8"?>
-<p:sld xmlns:a="http://schemas.openxmlformats.org/drawingml/2006/main" xmlns:r="http://schemas.openxmlformats.org/officeDocument/2006/relationships" xmlns:p="http://schemas.openxmlformats.org/presentationml/2006/main">
-  <p:cSld name="Slide 14">
     <p:bg>
       <p:bgPr>
         <a:solidFill>
@@ -8135,7 +3553,7 @@
                 <a:ea typeface="Quattrocento Sans" pitchFamily="34" charset="-122"/>
                 <a:cs typeface="Quattrocento Sans" pitchFamily="34" charset="-120"/>
               </a:rPr>
-              <a:t>10 TRIP ANALYSIS</a:t>
+              <a:t>TRIP REPLAY</a:t>
             </a:r>
             <a:endParaRPr lang="en-US" sz="860" dirty="0"/>
           </a:p>
@@ -8152,7 +3570,7 @@
                 <a:ea typeface="Quattrocento Sans" pitchFamily="34" charset="-122"/>
                 <a:cs typeface="Quattrocento Sans" pitchFamily="34" charset="-120"/>
               </a:rPr>
-              <a:t>1.800 FRAME / TRIP · EVENT REPLAY</a:t>
+              <a:t>EVIDENCE-LINKED COACHING</a:t>
             </a:r>
             <a:endParaRPr lang="en-US" sz="860" dirty="0"/>
           </a:p>
@@ -8232,7 +3650,7 @@
                 <a:ea typeface="Quattrocento Sans" pitchFamily="34" charset="-122"/>
                 <a:cs typeface="Quattrocento Sans" pitchFamily="34" charset="-120"/>
               </a:rPr>
-              <a:t>Bản trình bày cuối | Claim được giới hạn bởi bằng chứng hiện có.</a:t>
+              <a:t>FleetIQ Guardian · Challenge #3 · UchiHahaha.</a:t>
             </a:r>
             <a:endParaRPr lang="en-US" sz="980" dirty="0"/>
           </a:p>
@@ -8334,7 +3752,7 @@
                 <a:ea typeface="Quattrocento Sans" pitchFamily="34" charset="-122"/>
                 <a:cs typeface="Quattrocento Sans" pitchFamily="34" charset="-120"/>
               </a:rPr>
-              <a:t>14</a:t>
+              <a:t>10</a:t>
             </a:r>
             <a:endParaRPr lang="en-US" sz="900" dirty="0"/>
           </a:p>
@@ -8514,7 +3932,7 @@
                 <a:ea typeface="Quattrocento Sans" pitchFamily="34" charset="-122"/>
                 <a:cs typeface="Quattrocento Sans" pitchFamily="34" charset="-120"/>
               </a:rPr>
-              <a:t>Quản lý đội xe cần biết chuyến nào cần xem, vì sao và bằng chứng nằm ở đâu.</a:t>
+              <a:t>Quản lý đội xe cần biết chuyến nào cần xem và vì sao.</a:t>
             </a:r>
             <a:endParaRPr lang="en-US" sz="1080" dirty="0"/>
           </a:p>
@@ -9424,7 +4842,7 @@
                 <a:ea typeface="Quattrocento Sans" pitchFamily="34" charset="-122"/>
                 <a:cs typeface="Quattrocento Sans" pitchFamily="34" charset="-120"/>
               </a:rPr>
-              <a:t>FleetIQ Guardian dùng chấm điểm và TTC như động cơ để tạo quy trình cho Challenge #3.</a:t>
+              <a:t>FleetIQ Guardian biến tín hiệu đa nguồn thành quyết định có thể hành động.</a:t>
             </a:r>
             <a:endParaRPr lang="en-US" sz="1080" dirty="0"/>
           </a:p>
@@ -10361,7 +5779,7 @@
                 <a:ea typeface="Quattrocento Sans" pitchFamily="34" charset="-122"/>
                 <a:cs typeface="Quattrocento Sans" pitchFamily="34" charset="-120"/>
               </a:rPr>
-              <a:t>Chúng tôi khai thác toàn bộ dữ liệu starter kit thay vì chỉ trình diễn một mô hình đơn lẻ.</a:t>
+              <a:t>Các tín hiệu được đưa về cùng một dòng thời gian để tạo bối cảnh vận hành.</a:t>
             </a:r>
             <a:endParaRPr lang="en-US" sz="1080" dirty="0"/>
           </a:p>
@@ -11394,7 +6812,7 @@
                 <a:ea typeface="Quattrocento Sans" pitchFamily="34" charset="-122"/>
                 <a:cs typeface="Quattrocento Sans" pitchFamily="34" charset="-120"/>
               </a:rPr>
-              <a:t>17.999</a:t>
+              <a:t>10</a:t>
             </a:r>
             <a:endParaRPr lang="en-US" sz="2800" dirty="0"/>
           </a:p>
@@ -11435,7 +6853,7 @@
                 <a:ea typeface="Quattrocento Sans" pitchFamily="34" charset="-122"/>
                 <a:cs typeface="Quattrocento Sans" pitchFamily="34" charset="-120"/>
               </a:rPr>
-              <a:t>KHUNG HÌNH ĐƯỢC GẮN NHÃN</a:t>
+              <a:t>TRIP REPLAYS</a:t>
             </a:r>
             <a:endParaRPr lang="en-US" sz="740" dirty="0"/>
           </a:p>
@@ -11697,7 +7115,7 @@
                 <a:ea typeface="Quattrocento Sans" pitchFamily="34" charset="-122"/>
                 <a:cs typeface="Quattrocento Sans" pitchFamily="34" charset="-120"/>
               </a:rPr>
-              <a:t>Giao diện bắt đầu bằng công việc vận hành, không phải landing page.</a:t>
+              <a:t>Quy trình review đi từ danh sách ưu tiên tới coaching.</a:t>
             </a:r>
             <a:endParaRPr lang="en-US" sz="1080" dirty="0"/>
           </a:p>
@@ -11999,7 +7417,7 @@
                 <a:ea typeface="Quattrocento Sans" pitchFamily="34" charset="-122"/>
                 <a:cs typeface="Quattrocento Sans" pitchFamily="34" charset="-120"/>
               </a:rPr>
-              <a:t>Mở điểm theo rule và bằng chứng liên kết.</a:t>
+              <a:t>Mở điểm an toàn và event liên kết.</a:t>
             </a:r>
             <a:endParaRPr lang="en-US" sz="920" dirty="0"/>
           </a:p>
@@ -12630,7 +8048,7 @@
                 <a:ea typeface="Quattrocento Sans" pitchFamily="34" charset="-122"/>
                 <a:cs typeface="Quattrocento Sans" pitchFamily="34" charset="-120"/>
               </a:rPr>
-              <a:t>Gán coaching</a:t>
+              <a:t>Giao coaching</a:t>
             </a:r>
             <a:endParaRPr lang="en-US" sz="1400" dirty="0"/>
           </a:p>
@@ -12735,7 +8153,7 @@
                 <a:ea typeface="Quattrocento Sans" pitchFamily="34" charset="-122"/>
                 <a:cs typeface="Quattrocento Sans" pitchFamily="34" charset="-120"/>
               </a:rPr>
-              <a:t>Điểm theo rule được tạo từ artifact chuyến; không dùng để tuyên bố độ chính xác hay xếp hạng fleet.</a:t>
+              <a:t>Mỗi bước đều mở được một evidence window để người vận hành kiểm tra và hành động.</a:t>
             </a:r>
             <a:endParaRPr lang="en-US" sz="1050" dirty="0"/>
           </a:p>
@@ -12874,7 +8292,7 @@
                 <a:ea typeface="Quattrocento Sans" pitchFamily="34" charset="-122"/>
                 <a:cs typeface="Quattrocento Sans" pitchFamily="34" charset="-120"/>
               </a:rPr>
-              <a:t>MỘT KHUNG HÌNH, BỐN TÍN HIỆU CÓ THỂ KIỂM TRA</a:t>
+              <a:t>ĐIỀU GÌ ĐANG XẢY RA TRÊN ĐƯỜNG?</a:t>
             </a:r>
             <a:endParaRPr lang="en-US" sz="2700" dirty="0"/>
           </a:p>
@@ -12915,7 +8333,7 @@
                 <a:ea typeface="Quattrocento Sans" pitchFamily="34" charset="-122"/>
                 <a:cs typeface="Quattrocento Sans" pitchFamily="34" charset="-120"/>
               </a:rPr>
-              <a:t>Khung 1010 được đọc lại từ YOLOP overlay, artifact road/DMS/fusion và CSV sau full pipeline.</a:t>
+              <a:t>Một event được kiểm tra từ road risk, driver attention và bối cảnh vận hành.</a:t>
             </a:r>
             <a:endParaRPr lang="en-US" sz="1080" dirty="0"/>
           </a:p>
@@ -13082,8 +8500,194 @@
         </p:nvSpPr>
         <p:spPr>
           <a:xfrm>
-            <a:off x="1874520" y="4572000"/>
-            <a:ext cx="4251960" cy="256032"/>
+            <a:off x="804672" y="4590288"/>
+            <a:ext cx="6391656" cy="411480"/>
+          </a:xfrm>
+          <a:prstGeom prst="rect">
+            <a:avLst/>
+          </a:prstGeom>
+          <a:solidFill>
+            <a:srgbClr val="0B1020"/>
+          </a:solidFill>
+          <a:ln w="7620">
+            <a:solidFill>
+              <a:srgbClr val="0B1020">
+                <a:alpha val="0"/>
+              </a:srgbClr>
+            </a:solidFill>
+            <a:prstDash val="solid"/>
+          </a:ln>
+        </p:spPr>
+      </p:sp>
+      <p:sp>
+        <p:nvSpPr>
+          <p:cNvPr id="12" name="Shape 9"/>
+          <p:cNvSpPr/>
+          <p:nvPr/>
+        </p:nvSpPr>
+        <p:spPr>
+          <a:xfrm>
+            <a:off x="7680960" y="1828800"/>
+            <a:ext cx="3822192" cy="914400"/>
+          </a:xfrm>
+          <a:prstGeom prst="rect">
+            <a:avLst/>
+          </a:prstGeom>
+          <a:solidFill>
+            <a:srgbClr val="FFFFFF"/>
+          </a:solidFill>
+          <a:ln w="7620">
+            <a:solidFill>
+              <a:srgbClr val="CDCCCC"/>
+            </a:solidFill>
+            <a:prstDash val="solid"/>
+          </a:ln>
+        </p:spPr>
+      </p:sp>
+      <p:sp>
+        <p:nvSpPr>
+          <p:cNvPr id="13" name="Shape 10"/>
+          <p:cNvSpPr/>
+          <p:nvPr/>
+        </p:nvSpPr>
+        <p:spPr>
+          <a:xfrm>
+            <a:off x="7680960" y="1828800"/>
+            <a:ext cx="73152" cy="914400"/>
+          </a:xfrm>
+          <a:prstGeom prst="rect">
+            <a:avLst/>
+          </a:prstGeom>
+          <a:solidFill>
+            <a:srgbClr val="F37021"/>
+          </a:solidFill>
+          <a:ln w="7620">
+            <a:solidFill>
+              <a:srgbClr val="F37021">
+                <a:alpha val="0"/>
+              </a:srgbClr>
+            </a:solidFill>
+            <a:prstDash val="solid"/>
+          </a:ln>
+        </p:spPr>
+      </p:sp>
+      <p:sp>
+        <p:nvSpPr>
+          <p:cNvPr id="14" name="Text 11"/>
+          <p:cNvSpPr/>
+          <p:nvPr/>
+        </p:nvSpPr>
+        <p:spPr>
+          <a:xfrm>
+            <a:off x="7973568" y="2075688"/>
+            <a:ext cx="3200400" cy="164592"/>
+          </a:xfrm>
+          <a:prstGeom prst="rect">
+            <a:avLst/>
+          </a:prstGeom>
+          <a:noFill/>
+          <a:ln/>
+        </p:spPr>
+        <p:txBody>
+          <a:bodyPr wrap="square" lIns="0" tIns="0" rIns="0" bIns="0" rtlCol="0" anchor="ctr">
+            <a:normAutofit/>
+          </a:bodyPr>
+          <a:lstStyle/>
+          <a:p>
+            <a:pPr indent="0" marL="0">
+              <a:buNone/>
+            </a:pPr>
+            <a:r>
+              <a:rPr lang="en-US" sz="1120" b="1" dirty="0">
+                <a:solidFill>
+                  <a:srgbClr val="19226D"/>
+                </a:solidFill>
+                <a:latin typeface="Quattrocento Sans" pitchFamily="34" charset="0"/>
+                <a:ea typeface="Quattrocento Sans" pitchFamily="34" charset="-122"/>
+                <a:cs typeface="Quattrocento Sans" pitchFamily="34" charset="-120"/>
+              </a:rPr>
+              <a:t>ROAD / XE PHÍA TRƯỚC</a:t>
+            </a:r>
+            <a:endParaRPr lang="en-US" sz="1120" dirty="0"/>
+          </a:p>
+        </p:txBody>
+      </p:sp>
+      <p:sp>
+        <p:nvSpPr>
+          <p:cNvPr id="15" name="Text 12"/>
+          <p:cNvSpPr/>
+          <p:nvPr/>
+        </p:nvSpPr>
+        <p:spPr>
+          <a:xfrm>
+            <a:off x="7973568" y="2359152"/>
+            <a:ext cx="3154680" cy="128016"/>
+          </a:xfrm>
+          <a:prstGeom prst="rect">
+            <a:avLst/>
+          </a:prstGeom>
+          <a:noFill/>
+          <a:ln/>
+        </p:spPr>
+        <p:txBody>
+          <a:bodyPr wrap="square" lIns="0" tIns="0" rIns="0" bIns="0" rtlCol="0" anchor="ctr">
+            <a:normAutofit/>
+          </a:bodyPr>
+          <a:lstStyle/>
+          <a:p>
+            <a:pPr indent="0" marL="0">
+              <a:buNone/>
+            </a:pPr>
+            <a:r>
+              <a:rPr lang="en-US" sz="880" dirty="0">
+                <a:solidFill>
+                  <a:srgbClr val="6B7A90"/>
+                </a:solidFill>
+                <a:latin typeface="Quattrocento Sans" pitchFamily="34" charset="0"/>
+                <a:ea typeface="Quattrocento Sans" pitchFamily="34" charset="-122"/>
+                <a:cs typeface="Quattrocento Sans" pitchFamily="34" charset="-120"/>
+              </a:rPr>
+              <a:t>20.40 m · TTC 1.601 s</a:t>
+            </a:r>
+            <a:endParaRPr lang="en-US" sz="880" dirty="0"/>
+          </a:p>
+        </p:txBody>
+      </p:sp>
+      <p:sp>
+        <p:nvSpPr>
+          <p:cNvPr id="16" name="Shape 13"/>
+          <p:cNvSpPr/>
+          <p:nvPr/>
+        </p:nvSpPr>
+        <p:spPr>
+          <a:xfrm>
+            <a:off x="7680960" y="2907792"/>
+            <a:ext cx="3822192" cy="914400"/>
+          </a:xfrm>
+          <a:prstGeom prst="rect">
+            <a:avLst/>
+          </a:prstGeom>
+          <a:solidFill>
+            <a:srgbClr val="FFFFFF"/>
+          </a:solidFill>
+          <a:ln w="7620">
+            <a:solidFill>
+              <a:srgbClr val="CDCCCC"/>
+            </a:solidFill>
+            <a:prstDash val="solid"/>
+          </a:ln>
+        </p:spPr>
+      </p:sp>
+      <p:sp>
+        <p:nvSpPr>
+          <p:cNvPr id="17" name="Shape 14"/>
+          <p:cNvSpPr/>
+          <p:nvPr/>
+        </p:nvSpPr>
+        <p:spPr>
+          <a:xfrm>
+            <a:off x="7680960" y="2907792"/>
+            <a:ext cx="73152" cy="914400"/>
           </a:xfrm>
           <a:prstGeom prst="rect">
             <a:avLst/>
@@ -13103,104 +8707,13 @@
       </p:sp>
       <p:sp>
         <p:nvSpPr>
-          <p:cNvPr id="12" name="Text 9"/>
-          <p:cNvSpPr/>
-          <p:nvPr/>
-        </p:nvSpPr>
-        <p:spPr>
-          <a:xfrm>
-            <a:off x="1965960" y="4645152"/>
-            <a:ext cx="4069080" cy="91440"/>
-          </a:xfrm>
-          <a:prstGeom prst="rect">
-            <a:avLst/>
-          </a:prstGeom>
-          <a:noFill/>
-          <a:ln/>
-        </p:spPr>
-        <p:txBody>
-          <a:bodyPr wrap="square" lIns="0" tIns="0" rIns="0" bIns="0" rtlCol="0" anchor="ctr"/>
-          <a:lstStyle/>
-          <a:p>
-            <a:pPr algn="ctr" indent="0" marL="0">
-              <a:buNone/>
-            </a:pPr>
-            <a:r>
-              <a:rPr lang="en-US" sz="750" b="1" spc="60" kern="0" dirty="0">
-                <a:solidFill>
-                  <a:srgbClr val="FFFFFF"/>
-                </a:solidFill>
-                <a:latin typeface="Quattrocento Sans" pitchFamily="34" charset="0"/>
-                <a:ea typeface="Quattrocento Sans" pitchFamily="34" charset="-122"/>
-                <a:cs typeface="Quattrocento Sans" pitchFamily="34" charset="-120"/>
-              </a:rPr>
-              <a:t>T01D · FRAME 1010 · YOLOP OVERLAY</a:t>
-            </a:r>
-            <a:endParaRPr lang="en-US" sz="750" dirty="0"/>
-          </a:p>
-        </p:txBody>
-      </p:sp>
-      <p:sp>
-        <p:nvSpPr>
-          <p:cNvPr id="13" name="Shape 10"/>
-          <p:cNvSpPr/>
-          <p:nvPr/>
-        </p:nvSpPr>
-        <p:spPr>
-          <a:xfrm>
-            <a:off x="7680960" y="1828800"/>
-            <a:ext cx="3822192" cy="914400"/>
-          </a:xfrm>
-          <a:prstGeom prst="rect">
-            <a:avLst/>
-          </a:prstGeom>
-          <a:solidFill>
-            <a:srgbClr val="FFFFFF"/>
-          </a:solidFill>
-          <a:ln w="7620">
-            <a:solidFill>
-              <a:srgbClr val="CDCCCC"/>
-            </a:solidFill>
-            <a:prstDash val="solid"/>
-          </a:ln>
-        </p:spPr>
-      </p:sp>
-      <p:sp>
-        <p:nvSpPr>
-          <p:cNvPr id="14" name="Shape 11"/>
-          <p:cNvSpPr/>
-          <p:nvPr/>
-        </p:nvSpPr>
-        <p:spPr>
-          <a:xfrm>
-            <a:off x="7680960" y="1828800"/>
-            <a:ext cx="73152" cy="914400"/>
-          </a:xfrm>
-          <a:prstGeom prst="rect">
-            <a:avLst/>
-          </a:prstGeom>
-          <a:solidFill>
-            <a:srgbClr val="F37021"/>
-          </a:solidFill>
-          <a:ln w="7620">
-            <a:solidFill>
-              <a:srgbClr val="F37021">
-                <a:alpha val="0"/>
-              </a:srgbClr>
-            </a:solidFill>
-            <a:prstDash val="solid"/>
-          </a:ln>
-        </p:spPr>
-      </p:sp>
-      <p:sp>
-        <p:nvSpPr>
-          <p:cNvPr id="15" name="Text 12"/>
-          <p:cNvSpPr/>
-          <p:nvPr/>
-        </p:nvSpPr>
-        <p:spPr>
-          <a:xfrm>
-            <a:off x="7973568" y="2075688"/>
+          <p:cNvPr id="18" name="Text 15"/>
+          <p:cNvSpPr/>
+          <p:nvPr/>
+        </p:nvSpPr>
+        <p:spPr>
+          <a:xfrm>
+            <a:off x="7973568" y="3154680"/>
             <a:ext cx="3200400" cy="164592"/>
           </a:xfrm>
           <a:prstGeom prst="rect">
@@ -13227,7 +8740,7 @@
                 <a:ea typeface="Quattrocento Sans" pitchFamily="34" charset="-122"/>
                 <a:cs typeface="Quattrocento Sans" pitchFamily="34" charset="-120"/>
               </a:rPr>
-              <a:t>ROAD / IN-LANE CAR</a:t>
+              <a:t>DMS / DRIVER DROWSY</a:t>
             </a:r>
             <a:endParaRPr lang="en-US" sz="1120" dirty="0"/>
           </a:p>
@@ -13235,13 +8748,13 @@
       </p:sp>
       <p:sp>
         <p:nvSpPr>
-          <p:cNvPr id="16" name="Text 13"/>
-          <p:cNvSpPr/>
-          <p:nvPr/>
-        </p:nvSpPr>
-        <p:spPr>
-          <a:xfrm>
-            <a:off x="7973568" y="2359152"/>
+          <p:cNvPr id="19" name="Text 16"/>
+          <p:cNvSpPr/>
+          <p:nvPr/>
+        </p:nvSpPr>
+        <p:spPr>
+          <a:xfrm>
+            <a:off x="7973568" y="3438144"/>
             <a:ext cx="3154680" cy="128016"/>
           </a:xfrm>
           <a:prstGeom prst="rect">
@@ -13268,7 +8781,7 @@
                 <a:ea typeface="Quattrocento Sans" pitchFamily="34" charset="-122"/>
                 <a:cs typeface="Quattrocento Sans" pitchFamily="34" charset="-120"/>
               </a:rPr>
-              <a:t>20.40 m · TTC 1.601 s · confidence 0.8837</a:t>
+              <a:t>Trạng thái drowsy · confidence 85%</a:t>
             </a:r>
             <a:endParaRPr lang="en-US" sz="880" dirty="0"/>
           </a:p>
@@ -13276,14 +8789,14 @@
       </p:sp>
       <p:sp>
         <p:nvSpPr>
-          <p:cNvPr id="17" name="Shape 14"/>
-          <p:cNvSpPr/>
-          <p:nvPr/>
-        </p:nvSpPr>
-        <p:spPr>
-          <a:xfrm>
-            <a:off x="7680960" y="2907792"/>
-            <a:ext cx="3822192" cy="914400"/>
+          <p:cNvPr id="20" name="Shape 17"/>
+          <p:cNvSpPr/>
+          <p:nvPr/>
+        </p:nvSpPr>
+        <p:spPr>
+          <a:xfrm>
+            <a:off x="7680960" y="3986784"/>
+            <a:ext cx="3822192" cy="1179576"/>
           </a:xfrm>
           <a:prstGeom prst="rect">
             <a:avLst/>
@@ -13301,24 +8814,24 @@
       </p:sp>
       <p:sp>
         <p:nvSpPr>
-          <p:cNvPr id="18" name="Shape 15"/>
-          <p:cNvSpPr/>
-          <p:nvPr/>
-        </p:nvSpPr>
-        <p:spPr>
-          <a:xfrm>
-            <a:off x="7680960" y="2907792"/>
-            <a:ext cx="73152" cy="914400"/>
-          </a:xfrm>
-          <a:prstGeom prst="rect">
-            <a:avLst/>
-          </a:prstGeom>
-          <a:solidFill>
-            <a:srgbClr val="034EA2"/>
+          <p:cNvPr id="21" name="Shape 18"/>
+          <p:cNvSpPr/>
+          <p:nvPr/>
+        </p:nvSpPr>
+        <p:spPr>
+          <a:xfrm>
+            <a:off x="7680960" y="3986784"/>
+            <a:ext cx="73152" cy="1179576"/>
+          </a:xfrm>
+          <a:prstGeom prst="rect">
+            <a:avLst/>
+          </a:prstGeom>
+          <a:solidFill>
+            <a:srgbClr val="22B573"/>
           </a:solidFill>
           <a:ln w="7620">
             <a:solidFill>
-              <a:srgbClr val="034EA2">
+              <a:srgbClr val="22B573">
                 <a:alpha val="0"/>
               </a:srgbClr>
             </a:solidFill>
@@ -13328,13 +8841,13 @@
       </p:sp>
       <p:sp>
         <p:nvSpPr>
-          <p:cNvPr id="19" name="Text 16"/>
-          <p:cNvSpPr/>
-          <p:nvPr/>
-        </p:nvSpPr>
-        <p:spPr>
-          <a:xfrm>
-            <a:off x="7973568" y="3154680"/>
+          <p:cNvPr id="22" name="Text 19"/>
+          <p:cNvSpPr/>
+          <p:nvPr/>
+        </p:nvSpPr>
+        <p:spPr>
+          <a:xfrm>
+            <a:off x="7973568" y="4224528"/>
             <a:ext cx="3200400" cy="164592"/>
           </a:xfrm>
           <a:prstGeom prst="rect">
@@ -13361,7 +8874,7 @@
                 <a:ea typeface="Quattrocento Sans" pitchFamily="34" charset="-122"/>
                 <a:cs typeface="Quattrocento Sans" pitchFamily="34" charset="-120"/>
               </a:rPr>
-              <a:t>DMS / DROWSY</a:t>
+              <a:t>FUSION / RISK EVENT</a:t>
             </a:r>
             <a:endParaRPr lang="en-US" sz="1120" dirty="0"/>
           </a:p>
@@ -13369,14 +8882,14 @@
       </p:sp>
       <p:sp>
         <p:nvSpPr>
-          <p:cNvPr id="20" name="Text 17"/>
-          <p:cNvSpPr/>
-          <p:nvPr/>
-        </p:nvSpPr>
-        <p:spPr>
-          <a:xfrm>
-            <a:off x="7973568" y="3438144"/>
-            <a:ext cx="3154680" cy="128016"/>
+          <p:cNvPr id="23" name="Text 20"/>
+          <p:cNvSpPr/>
+          <p:nvPr/>
+        </p:nvSpPr>
+        <p:spPr>
+          <a:xfrm>
+            <a:off x="7973568" y="4489704"/>
+            <a:ext cx="3182112" cy="292608"/>
           </a:xfrm>
           <a:prstGeom prst="rect">
             <a:avLst/>
@@ -13394,7 +8907,7 @@
               <a:buNone/>
             </a:pPr>
             <a:r>
-              <a:rPr lang="en-US" sz="880" dirty="0">
+              <a:rPr lang="en-US" sz="810" dirty="0">
                 <a:solidFill>
                   <a:srgbClr val="6B7A90"/>
                 </a:solidFill>
@@ -13402,74 +8915,22 @@
                 <a:ea typeface="Quattrocento Sans" pitchFamily="34" charset="-122"/>
                 <a:cs typeface="Quattrocento Sans" pitchFamily="34" charset="-120"/>
               </a:rPr>
-              <a:t>MediaPipe geometry · confidence 0.85</a:t>
-            </a:r>
-            <a:endParaRPr lang="en-US" sz="880" dirty="0"/>
-          </a:p>
-        </p:txBody>
-      </p:sp>
-      <p:sp>
-        <p:nvSpPr>
-          <p:cNvPr id="21" name="Shape 18"/>
-          <p:cNvSpPr/>
-          <p:nvPr/>
-        </p:nvSpPr>
-        <p:spPr>
-          <a:xfrm>
-            <a:off x="7680960" y="3986784"/>
-            <a:ext cx="3822192" cy="1179576"/>
-          </a:xfrm>
-          <a:prstGeom prst="rect">
-            <a:avLst/>
-          </a:prstGeom>
-          <a:solidFill>
-            <a:srgbClr val="FFFFFF"/>
-          </a:solidFill>
-          <a:ln w="7620">
-            <a:solidFill>
-              <a:srgbClr val="CDCCCC"/>
-            </a:solidFill>
-            <a:prstDash val="solid"/>
-          </a:ln>
-        </p:spPr>
-      </p:sp>
-      <p:sp>
-        <p:nvSpPr>
-          <p:cNvPr id="22" name="Shape 19"/>
-          <p:cNvSpPr/>
-          <p:nvPr/>
-        </p:nvSpPr>
-        <p:spPr>
-          <a:xfrm>
-            <a:off x="7680960" y="3986784"/>
-            <a:ext cx="73152" cy="1179576"/>
-          </a:xfrm>
-          <a:prstGeom prst="rect">
-            <a:avLst/>
-          </a:prstGeom>
-          <a:solidFill>
-            <a:srgbClr val="22B573"/>
-          </a:solidFill>
-          <a:ln w="7620">
-            <a:solidFill>
-              <a:srgbClr val="22B573">
-                <a:alpha val="0"/>
-              </a:srgbClr>
-            </a:solidFill>
-            <a:prstDash val="solid"/>
-          </a:ln>
-        </p:spPr>
-      </p:sp>
-      <p:sp>
-        <p:nvSpPr>
-          <p:cNvPr id="23" name="Text 20"/>
-          <p:cNvSpPr/>
-          <p:nvPr/>
-        </p:nvSpPr>
-        <p:spPr>
-          <a:xfrm>
-            <a:off x="7973568" y="4224528"/>
-            <a:ext cx="3200400" cy="164592"/>
+              <a:t>Compound risk · TTC ngắn · coaching trigger</a:t>
+            </a:r>
+            <a:endParaRPr lang="en-US" sz="810" dirty="0"/>
+          </a:p>
+        </p:txBody>
+      </p:sp>
+      <p:sp>
+        <p:nvSpPr>
+          <p:cNvPr id="24" name="Text 21"/>
+          <p:cNvSpPr/>
+          <p:nvPr/>
+        </p:nvSpPr>
+        <p:spPr>
+          <a:xfrm>
+            <a:off x="548640" y="6071616"/>
+            <a:ext cx="10789920" cy="182880"/>
           </a:xfrm>
           <a:prstGeom prst="rect">
             <a:avLst/>
@@ -13487,105 +8948,6 @@
               <a:buNone/>
             </a:pPr>
             <a:r>
-              <a:rPr lang="en-US" sz="1120" b="1" dirty="0">
-                <a:solidFill>
-                  <a:srgbClr val="19226D"/>
-                </a:solidFill>
-                <a:latin typeface="Quattrocento Sans" pitchFamily="34" charset="0"/>
-                <a:ea typeface="Quattrocento Sans" pitchFamily="34" charset="-122"/>
-                <a:cs typeface="Quattrocento Sans" pitchFamily="34" charset="-120"/>
-              </a:rPr>
-              <a:t>FUSION / RISK INDEX 51.0</a:t>
-            </a:r>
-            <a:endParaRPr lang="en-US" sz="1120" dirty="0"/>
-          </a:p>
-        </p:txBody>
-      </p:sp>
-      <p:sp>
-        <p:nvSpPr>
-          <p:cNvPr id="24" name="Text 21"/>
-          <p:cNvSpPr/>
-          <p:nvPr/>
-        </p:nvSpPr>
-        <p:spPr>
-          <a:xfrm>
-            <a:off x="7973568" y="4489704"/>
-            <a:ext cx="3182112" cy="292608"/>
-          </a:xfrm>
-          <a:prstGeom prst="rect">
-            <a:avLst/>
-          </a:prstGeom>
-          <a:noFill/>
-          <a:ln/>
-        </p:spPr>
-        <p:txBody>
-          <a:bodyPr wrap="square" lIns="0" tIns="0" rIns="0" bIns="0" rtlCol="0" anchor="ctr">
-            <a:normAutofit/>
-          </a:bodyPr>
-          <a:lstStyle/>
-          <a:p>
-            <a:pPr indent="0" marL="0">
-              <a:buNone/>
-            </a:pPr>
-            <a:r>
-              <a:rPr lang="en-US" sz="810" dirty="0">
-                <a:solidFill>
-                  <a:srgbClr val="6B7A90"/>
-                </a:solidFill>
-                <a:latin typeface="Quattrocento Sans" pitchFamily="34" charset="0"/>
-                <a:ea typeface="Quattrocento Sans" pitchFamily="34" charset="-122"/>
-                <a:cs typeface="Quattrocento Sans" pitchFamily="34" charset="-120"/>
-              </a:rPr>
-              <a:t>TTC-risk + drowsiness + compound risk</a:t>
-            </a:r>
-            <a:endParaRPr lang="en-US" sz="810" dirty="0"/>
-          </a:p>
-          <a:p>
-            <a:pPr indent="0" marL="0">
-              <a:buNone/>
-            </a:pPr>
-            <a:r>
-              <a:rPr lang="en-US" sz="810" dirty="0">
-                <a:solidFill>
-                  <a:srgbClr val="6B7A90"/>
-                </a:solidFill>
-                <a:latin typeface="Quattrocento Sans" pitchFamily="34" charset="0"/>
-                <a:ea typeface="Quattrocento Sans" pitchFamily="34" charset="-122"/>
-                <a:cs typeface="Quattrocento Sans" pitchFamily="34" charset="-120"/>
-              </a:rPr>
-              <a:t>CSV: 1010, 50.500, 1.601, drowsy, 51.0</a:t>
-            </a:r>
-            <a:endParaRPr lang="en-US" sz="810" dirty="0"/>
-          </a:p>
-        </p:txBody>
-      </p:sp>
-      <p:sp>
-        <p:nvSpPr>
-          <p:cNvPr id="25" name="Text 22"/>
-          <p:cNvSpPr/>
-          <p:nvPr/>
-        </p:nvSpPr>
-        <p:spPr>
-          <a:xfrm>
-            <a:off x="548640" y="6071616"/>
-            <a:ext cx="10789920" cy="182880"/>
-          </a:xfrm>
-          <a:prstGeom prst="rect">
-            <a:avLst/>
-          </a:prstGeom>
-          <a:noFill/>
-          <a:ln/>
-        </p:spPr>
-        <p:txBody>
-          <a:bodyPr wrap="square" lIns="0" tIns="0" rIns="0" bIns="0" rtlCol="0" anchor="ctr">
-            <a:normAutofit/>
-          </a:bodyPr>
-          <a:lstStyle/>
-          <a:p>
-            <a:pPr indent="0" marL="0">
-              <a:buNone/>
-            </a:pPr>
-            <a:r>
               <a:rPr lang="en-US" sz="980" i="1" dirty="0">
                 <a:solidFill>
                   <a:srgbClr val="34506E"/>
@@ -13594,7 +8956,7 @@
                 <a:ea typeface="Quattrocento Sans" pitchFamily="34" charset="-122"/>
                 <a:cs typeface="Quattrocento Sans" pitchFamily="34" charset="-120"/>
               </a:rPr>
-              <a:t>T01d/1010: road, DMS, fusion JSON; YOLOP overlay; predictions/UchiHahaha/T01d.csv.</a:t>
+              <a:t>Trip evidence view · synchronized event context.</a:t>
             </a:r>
             <a:endParaRPr lang="en-US" sz="980" dirty="0"/>
           </a:p>
@@ -13774,7 +9136,7 @@
                 <a:ea typeface="Quattrocento Sans" pitchFamily="34" charset="-122"/>
                 <a:cs typeface="Quattrocento Sans" pitchFamily="34" charset="-120"/>
               </a:rPr>
-              <a:t>Tính đồng bộ biến dòng thời gian thành công cụ kiểm tra thay vì tập ảnh rời rạc.</a:t>
+              <a:t>Khi các tín hiệu cùng frame, reviewer thấy nguyên nhân và hành động.</a:t>
             </a:r>
             <a:endParaRPr lang="en-US" sz="1080" dirty="0"/>
           </a:p>
@@ -14598,7 +9960,7 @@
                 <a:ea typeface="Quattrocento Sans" pitchFamily="34" charset="-122"/>
                 <a:cs typeface="Quattrocento Sans" pitchFamily="34" charset="-120"/>
               </a:rPr>
-              <a:t>KHUNG 800</a:t>
+              <a:t>SYNC FRAME</a:t>
             </a:r>
             <a:endParaRPr lang="en-US" sz="750" dirty="0"/>
           </a:p>
@@ -14707,7 +10069,7 @@
                 <a:ea typeface="Quattrocento Sans" pitchFamily="34" charset="-122"/>
                 <a:cs typeface="Quattrocento Sans" pitchFamily="34" charset="-120"/>
               </a:rPr>
-              <a:t>T01d–T10d có 1.800 khung logic (0–1799); T08d/1615 là source road-left không khả dụng và được đánh dấu rõ.</a:t>
+              <a:t>Road, DMS, depth và telemetry được mở theo cùng một frame.</a:t>
             </a:r>
             <a:endParaRPr lang="en-US" sz="980" dirty="0"/>
           </a:p>
@@ -16542,7 +11904,7 @@
                 <a:ea typeface="Quattrocento Sans" pitchFamily="34" charset="-122"/>
                 <a:cs typeface="Quattrocento Sans" pitchFamily="34" charset="-120"/>
               </a:rPr>
-              <a:t>Đầu ra luôn liên kết event với điểm theo rule và khung hình nguồn; không diễn giải score là độ chính xác test ẩn.</a:t>
+              <a:t>Signal flow: input → intelligence → evidence-linked coaching.</a:t>
             </a:r>
             <a:endParaRPr lang="en-US" sz="980" dirty="0"/>
           </a:p>
@@ -16640,7 +12002,7 @@
                 <a:ea typeface="Quattrocento Sans" pitchFamily="34" charset="-122"/>
                 <a:cs typeface="Quattrocento Sans" pitchFamily="34" charset="-120"/>
               </a:rPr>
-              <a:t>LUẬT EVENT VÀ COACHING</a:t>
+              <a:t>SẴN SÀNG TRÌNH DIỄN</a:t>
             </a:r>
             <a:endParaRPr lang="en-US" sz="880" dirty="0"/>
           </a:p>
@@ -16681,7 +12043,7 @@
                 <a:ea typeface="Quattrocento Sans" pitchFamily="34" charset="-122"/>
                 <a:cs typeface="Quattrocento Sans" pitchFamily="34" charset="-120"/>
               </a:rPr>
-              <a:t>MỘT EVENT CÓ ĐIỀU KIỆN, PENALTY VÀ KHUNG BẰNG CHỨNG</a:t>
+              <a:t>MỘT LUỒNG QUYẾT ĐỊNH HOÀN CHỈNH CHO FLEET MANAGER</a:t>
             </a:r>
             <a:endParaRPr lang="en-US" sz="2700" dirty="0"/>
           </a:p>
@@ -16722,7 +12084,7 @@
                 <a:ea typeface="Quattrocento Sans" pitchFamily="34" charset="-122"/>
                 <a:cs typeface="Quattrocento Sans" pitchFamily="34" charset="-120"/>
               </a:rPr>
-              <a:t>DMS dùng cửa sổ 15 frame; cùng một trạng thái được gộp trong 5 giây để timeline không nhiễu.</a:t>
+              <a:t>Từ chuyến cần xem đến coaching, mọi bước đều có ngữ cảnh để người vận hành hành động.</a:t>
             </a:r>
             <a:endParaRPr lang="en-US" sz="1080" dirty="0"/>
           </a:p>
@@ -16838,8 +12200,8 @@
         </p:nvSpPr>
         <p:spPr>
           <a:xfrm>
-            <a:off x="658368" y="1792224"/>
-            <a:ext cx="3246120" cy="1444752"/>
+            <a:off x="676656" y="1874520"/>
+            <a:ext cx="3236976" cy="2194560"/>
           </a:xfrm>
           <a:prstGeom prst="rect">
             <a:avLst/>
@@ -16863,8 +12225,8 @@
         </p:nvSpPr>
         <p:spPr>
           <a:xfrm>
-            <a:off x="658368" y="1792224"/>
-            <a:ext cx="73152" cy="1444752"/>
+            <a:off x="676656" y="1874520"/>
+            <a:ext cx="73152" cy="2194560"/>
           </a:xfrm>
           <a:prstGeom prst="rect">
             <a:avLst/>
@@ -16890,8 +12252,8 @@
         </p:nvSpPr>
         <p:spPr>
           <a:xfrm>
-            <a:off x="932688" y="2066544"/>
-            <a:ext cx="493776" cy="256032"/>
+            <a:off x="950976" y="2157984"/>
+            <a:ext cx="1005840" cy="256032"/>
           </a:xfrm>
           <a:prstGeom prst="rect">
             <a:avLst/>
@@ -16917,8 +12279,8 @@
         </p:nvSpPr>
         <p:spPr>
           <a:xfrm>
-            <a:off x="1024128" y="2139696"/>
-            <a:ext cx="310896" cy="91440"/>
+            <a:off x="1042416" y="2231136"/>
+            <a:ext cx="822960" cy="91440"/>
           </a:xfrm>
           <a:prstGeom prst="rect">
             <a:avLst/>
@@ -16942,7 +12304,7 @@
                 <a:ea typeface="Quattrocento Sans" pitchFamily="34" charset="-122"/>
                 <a:cs typeface="Quattrocento Sans" pitchFamily="34" charset="-120"/>
               </a:rPr>
-              <a:t>01</a:t>
+              <a:t>MỞ</a:t>
             </a:r>
             <a:endParaRPr lang="en-US" sz="750" dirty="0"/>
           </a:p>
@@ -16956,8 +12318,8 @@
         </p:nvSpPr>
         <p:spPr>
           <a:xfrm>
-            <a:off x="1600200" y="2075688"/>
-            <a:ext cx="1901952" cy="146304"/>
+            <a:off x="950976" y="2697480"/>
+            <a:ext cx="2468880" cy="237744"/>
           </a:xfrm>
           <a:prstGeom prst="rect">
             <a:avLst/>
@@ -16971,11 +12333,11 @@
           </a:bodyPr>
           <a:lstStyle/>
           <a:p>
-            <a:pPr algn="ctr" indent="0" marL="0">
-              <a:buNone/>
-            </a:pPr>
-            <a:r>
-              <a:rPr lang="en-US" sz="1000" b="1" dirty="0">
+            <a:pPr indent="0" marL="0">
+              <a:buNone/>
+            </a:pPr>
+            <a:r>
+              <a:rPr lang="en-US" sz="1500" b="1" dirty="0">
                 <a:solidFill>
                   <a:srgbClr val="19226D"/>
                 </a:solidFill>
@@ -16983,9 +12345,9 @@
                 <a:ea typeface="Quattrocento Sans" pitchFamily="34" charset="-122"/>
                 <a:cs typeface="Quattrocento Sans" pitchFamily="34" charset="-120"/>
               </a:rPr>
-              <a:t>LỌC OBJECT</a:t>
-            </a:r>
-            <a:endParaRPr lang="en-US" sz="1000" dirty="0"/>
+              <a:t>Chọn đúng chuyến</a:t>
+            </a:r>
+            <a:endParaRPr lang="en-US" sz="1500" dirty="0"/>
           </a:p>
         </p:txBody>
       </p:sp>
@@ -16997,8 +12359,8 @@
         </p:nvSpPr>
         <p:spPr>
           <a:xfrm>
-            <a:off x="969264" y="2587752"/>
-            <a:ext cx="2615184" cy="310896"/>
+            <a:off x="950976" y="3227832"/>
+            <a:ext cx="2487168" cy="438912"/>
           </a:xfrm>
           <a:prstGeom prst="rect">
             <a:avLst/>
@@ -17012,11 +12374,11 @@
           </a:bodyPr>
           <a:lstStyle/>
           <a:p>
-            <a:pPr algn="ctr" indent="0" marL="0">
-              <a:buNone/>
-            </a:pPr>
-            <a:r>
-              <a:rPr lang="en-US" sz="870" dirty="0">
+            <a:pPr indent="0" marL="0">
+              <a:buNone/>
+            </a:pPr>
+            <a:r>
+              <a:rPr lang="en-US" sz="930" dirty="0">
                 <a:solidFill>
                   <a:srgbClr val="6B7A90"/>
                 </a:solidFill>
@@ -17024,26 +12386,9 @@
                 <a:ea typeface="Quattrocento Sans" pitchFamily="34" charset="-122"/>
                 <a:cs typeface="Quattrocento Sans" pitchFamily="34" charset="-120"/>
               </a:rPr>
-              <a:t>bbox &gt;30 px</a:t>
-            </a:r>
-            <a:endParaRPr lang="en-US" sz="870" dirty="0"/>
-          </a:p>
-          <a:p>
-            <a:pPr algn="ctr" indent="0" marL="0">
-              <a:buNone/>
-            </a:pPr>
-            <a:r>
-              <a:rPr lang="en-US" sz="870" dirty="0">
-                <a:solidFill>
-                  <a:srgbClr val="6B7A90"/>
-                </a:solidFill>
-                <a:latin typeface="Quattrocento Sans" pitchFamily="34" charset="0"/>
-                <a:ea typeface="Quattrocento Sans" pitchFamily="34" charset="-122"/>
-                <a:cs typeface="Quattrocento Sans" pitchFamily="34" charset="-120"/>
-              </a:rPr>
-              <a:t>&gt;=50% overlap fixed ego-corridor</a:t>
-            </a:r>
-            <a:endParaRPr lang="en-US" sz="870" dirty="0"/>
+              <a:t>Dashboard hiển thị điểm theo rule và những event cần ưu tiên xem lại.</a:t>
+            </a:r>
+            <a:endParaRPr lang="en-US" sz="930" dirty="0"/>
           </a:p>
         </p:txBody>
       </p:sp>
@@ -17055,19 +12400,20 @@
         </p:nvSpPr>
         <p:spPr>
           <a:xfrm>
-            <a:off x="3959352" y="2514600"/>
-            <a:ext cx="320040" cy="0"/>
-          </a:xfrm>
-          <a:prstGeom prst="line">
-            <a:avLst/>
-          </a:prstGeom>
-          <a:noFill/>
-          <a:ln w="16510">
-            <a:solidFill>
-              <a:srgbClr val="F37021"/>
-            </a:solidFill>
-            <a:prstDash val="solid"/>
-            <a:tailEnd type="triangle"/>
+            <a:off x="4407408" y="1874520"/>
+            <a:ext cx="3236976" cy="2194560"/>
+          </a:xfrm>
+          <a:prstGeom prst="rect">
+            <a:avLst/>
+          </a:prstGeom>
+          <a:solidFill>
+            <a:srgbClr val="FFFFFF"/>
+          </a:solidFill>
+          <a:ln w="7620">
+            <a:solidFill>
+              <a:srgbClr val="CDCCCC"/>
+            </a:solidFill>
+            <a:prstDash val="solid"/>
           </a:ln>
         </p:spPr>
       </p:sp>
@@ -17079,33 +12425,8 @@
         </p:nvSpPr>
         <p:spPr>
           <a:xfrm>
-            <a:off x="4389120" y="1792224"/>
-            <a:ext cx="3246120" cy="1444752"/>
-          </a:xfrm>
-          <a:prstGeom prst="rect">
-            <a:avLst/>
-          </a:prstGeom>
-          <a:solidFill>
-            <a:srgbClr val="FFFFFF"/>
-          </a:solidFill>
-          <a:ln w="7620">
-            <a:solidFill>
-              <a:srgbClr val="CDCCCC"/>
-            </a:solidFill>
-            <a:prstDash val="solid"/>
-          </a:ln>
-        </p:spPr>
-      </p:sp>
-      <p:sp>
-        <p:nvSpPr>
-          <p:cNvPr id="17" name="Shape 15"/>
-          <p:cNvSpPr/>
-          <p:nvPr/>
-        </p:nvSpPr>
-        <p:spPr>
-          <a:xfrm>
-            <a:off x="4389120" y="1792224"/>
-            <a:ext cx="73152" cy="1444752"/>
+            <a:off x="4407408" y="1874520"/>
+            <a:ext cx="73152" cy="2194560"/>
           </a:xfrm>
           <a:prstGeom prst="rect">
             <a:avLst/>
@@ -17125,14 +12446,14 @@
       </p:sp>
       <p:sp>
         <p:nvSpPr>
-          <p:cNvPr id="18" name="Shape 16"/>
-          <p:cNvSpPr/>
-          <p:nvPr/>
-        </p:nvSpPr>
-        <p:spPr>
-          <a:xfrm>
-            <a:off x="4663440" y="2066544"/>
-            <a:ext cx="493776" cy="256032"/>
+          <p:cNvPr id="17" name="Shape 15"/>
+          <p:cNvSpPr/>
+          <p:nvPr/>
+        </p:nvSpPr>
+        <p:spPr>
+          <a:xfrm>
+            <a:off x="4681728" y="2157984"/>
+            <a:ext cx="1005840" cy="256032"/>
           </a:xfrm>
           <a:prstGeom prst="rect">
             <a:avLst/>
@@ -17152,53 +12473,53 @@
       </p:sp>
       <p:sp>
         <p:nvSpPr>
+          <p:cNvPr id="18" name="Text 16"/>
+          <p:cNvSpPr/>
+          <p:nvPr/>
+        </p:nvSpPr>
+        <p:spPr>
+          <a:xfrm>
+            <a:off x="4773168" y="2231136"/>
+            <a:ext cx="822960" cy="91440"/>
+          </a:xfrm>
+          <a:prstGeom prst="rect">
+            <a:avLst/>
+          </a:prstGeom>
+          <a:noFill/>
+          <a:ln/>
+        </p:spPr>
+        <p:txBody>
+          <a:bodyPr wrap="square" lIns="0" tIns="0" rIns="0" bIns="0" rtlCol="0" anchor="ctr"/>
+          <a:lstStyle/>
+          <a:p>
+            <a:pPr algn="ctr" indent="0" marL="0">
+              <a:buNone/>
+            </a:pPr>
+            <a:r>
+              <a:rPr lang="en-US" sz="750" b="1" spc="60" kern="0" dirty="0">
+                <a:solidFill>
+                  <a:srgbClr val="FFFFFF"/>
+                </a:solidFill>
+                <a:latin typeface="Quattrocento Sans" pitchFamily="34" charset="0"/>
+                <a:ea typeface="Quattrocento Sans" pitchFamily="34" charset="-122"/>
+                <a:cs typeface="Quattrocento Sans" pitchFamily="34" charset="-120"/>
+              </a:rPr>
+              <a:t>KIỂM</a:t>
+            </a:r>
+            <a:endParaRPr lang="en-US" sz="750" dirty="0"/>
+          </a:p>
+        </p:txBody>
+      </p:sp>
+      <p:sp>
+        <p:nvSpPr>
           <p:cNvPr id="19" name="Text 17"/>
           <p:cNvSpPr/>
           <p:nvPr/>
         </p:nvSpPr>
         <p:spPr>
           <a:xfrm>
-            <a:off x="4754880" y="2139696"/>
-            <a:ext cx="310896" cy="91440"/>
-          </a:xfrm>
-          <a:prstGeom prst="rect">
-            <a:avLst/>
-          </a:prstGeom>
-          <a:noFill/>
-          <a:ln/>
-        </p:spPr>
-        <p:txBody>
-          <a:bodyPr wrap="square" lIns="0" tIns="0" rIns="0" bIns="0" rtlCol="0" anchor="ctr"/>
-          <a:lstStyle/>
-          <a:p>
-            <a:pPr algn="ctr" indent="0" marL="0">
-              <a:buNone/>
-            </a:pPr>
-            <a:r>
-              <a:rPr lang="en-US" sz="750" b="1" spc="60" kern="0" dirty="0">
-                <a:solidFill>
-                  <a:srgbClr val="FFFFFF"/>
-                </a:solidFill>
-                <a:latin typeface="Quattrocento Sans" pitchFamily="34" charset="0"/>
-                <a:ea typeface="Quattrocento Sans" pitchFamily="34" charset="-122"/>
-                <a:cs typeface="Quattrocento Sans" pitchFamily="34" charset="-120"/>
-              </a:rPr>
-              <a:t>02</a:t>
-            </a:r>
-            <a:endParaRPr lang="en-US" sz="750" dirty="0"/>
-          </a:p>
-        </p:txBody>
-      </p:sp>
-      <p:sp>
-        <p:nvSpPr>
-          <p:cNvPr id="20" name="Text 18"/>
-          <p:cNvSpPr/>
-          <p:nvPr/>
-        </p:nvSpPr>
-        <p:spPr>
-          <a:xfrm>
-            <a:off x="5330952" y="2075688"/>
-            <a:ext cx="1901952" cy="146304"/>
+            <a:off x="4681728" y="2697480"/>
+            <a:ext cx="2468880" cy="237744"/>
           </a:xfrm>
           <a:prstGeom prst="rect">
             <a:avLst/>
@@ -17212,11 +12533,11 @@
           </a:bodyPr>
           <a:lstStyle/>
           <a:p>
-            <a:pPr algn="ctr" indent="0" marL="0">
-              <a:buNone/>
-            </a:pPr>
-            <a:r>
-              <a:rPr lang="en-US" sz="1000" b="1" dirty="0">
+            <a:pPr indent="0" marL="0">
+              <a:buNone/>
+            </a:pPr>
+            <a:r>
+              <a:rPr lang="en-US" sz="1500" b="1" dirty="0">
                 <a:solidFill>
                   <a:srgbClr val="19226D"/>
                 </a:solidFill>
@@ -17224,22 +12545,22 @@
                 <a:ea typeface="Quattrocento Sans" pitchFamily="34" charset="-122"/>
                 <a:cs typeface="Quattrocento Sans" pitchFamily="34" charset="-120"/>
               </a:rPr>
-              <a:t>TTC TỪ DEPTH ROI</a:t>
-            </a:r>
-            <a:endParaRPr lang="en-US" sz="1000" dirty="0"/>
-          </a:p>
-        </p:txBody>
-      </p:sp>
-      <p:sp>
-        <p:nvSpPr>
-          <p:cNvPr id="21" name="Text 19"/>
-          <p:cNvSpPr/>
-          <p:nvPr/>
-        </p:nvSpPr>
-        <p:spPr>
-          <a:xfrm>
-            <a:off x="4700016" y="2587752"/>
-            <a:ext cx="2615184" cy="310896"/>
+              <a:t>Xem đúng bối cảnh</a:t>
+            </a:r>
+            <a:endParaRPr lang="en-US" sz="1500" dirty="0"/>
+          </a:p>
+        </p:txBody>
+      </p:sp>
+      <p:sp>
+        <p:nvSpPr>
+          <p:cNvPr id="20" name="Text 18"/>
+          <p:cNvSpPr/>
+          <p:nvPr/>
+        </p:nvSpPr>
+        <p:spPr>
+          <a:xfrm>
+            <a:off x="4681728" y="3227832"/>
+            <a:ext cx="2487168" cy="438912"/>
           </a:xfrm>
           <a:prstGeom prst="rect">
             <a:avLst/>
@@ -17253,11 +12574,11 @@
           </a:bodyPr>
           <a:lstStyle/>
           <a:p>
-            <a:pPr algn="ctr" indent="0" marL="0">
-              <a:buNone/>
-            </a:pPr>
-            <a:r>
-              <a:rPr lang="en-US" sz="870" dirty="0">
+            <a:pPr indent="0" marL="0">
+              <a:buNone/>
+            </a:pPr>
+            <a:r>
+              <a:rPr lang="en-US" sz="930" dirty="0">
                 <a:solidFill>
                   <a:srgbClr val="6B7A90"/>
                 </a:solidFill>
@@ -17265,45 +12586,36 @@
                 <a:ea typeface="Quattrocento Sans" pitchFamily="34" charset="-122"/>
                 <a:cs typeface="Quattrocento Sans" pitchFamily="34" charset="-120"/>
               </a:rPr>
-              <a:t>&lt;1,5 s: 35</a:t>
-            </a:r>
-            <a:endParaRPr lang="en-US" sz="870" dirty="0"/>
-          </a:p>
-          <a:p>
-            <a:pPr algn="ctr" indent="0" marL="0">
-              <a:buNone/>
-            </a:pPr>
-            <a:r>
-              <a:rPr lang="en-US" sz="870" dirty="0">
-                <a:solidFill>
-                  <a:srgbClr val="6B7A90"/>
-                </a:solidFill>
-                <a:latin typeface="Quattrocento Sans" pitchFamily="34" charset="0"/>
-                <a:ea typeface="Quattrocento Sans" pitchFamily="34" charset="-122"/>
-                <a:cs typeface="Quattrocento Sans" pitchFamily="34" charset="-120"/>
-              </a:rPr>
-              <a:t>&lt;2,5 s: 26</a:t>
-            </a:r>
-            <a:endParaRPr lang="en-US" sz="870" dirty="0"/>
-          </a:p>
-          <a:p>
-            <a:pPr algn="ctr" indent="0" marL="0">
-              <a:buNone/>
-            </a:pPr>
-            <a:r>
-              <a:rPr lang="en-US" sz="870" dirty="0">
-                <a:solidFill>
-                  <a:srgbClr val="6B7A90"/>
-                </a:solidFill>
-                <a:latin typeface="Quattrocento Sans" pitchFamily="34" charset="0"/>
-                <a:ea typeface="Quattrocento Sans" pitchFamily="34" charset="-122"/>
-                <a:cs typeface="Quattrocento Sans" pitchFamily="34" charset="-120"/>
-              </a:rPr>
-              <a:t>&lt;4 s: 15</a:t>
-            </a:r>
-            <a:endParaRPr lang="en-US" sz="870" dirty="0"/>
-          </a:p>
-        </p:txBody>
+              <a:t>Timeline mở camera đường, DMS và telemetry tại cùng một khung hình.</a:t>
+            </a:r>
+            <a:endParaRPr lang="en-US" sz="930" dirty="0"/>
+          </a:p>
+        </p:txBody>
+      </p:sp>
+      <p:sp>
+        <p:nvSpPr>
+          <p:cNvPr id="21" name="Shape 19"/>
+          <p:cNvSpPr/>
+          <p:nvPr/>
+        </p:nvSpPr>
+        <p:spPr>
+          <a:xfrm>
+            <a:off x="8138160" y="1874520"/>
+            <a:ext cx="3236976" cy="2194560"/>
+          </a:xfrm>
+          <a:prstGeom prst="rect">
+            <a:avLst/>
+          </a:prstGeom>
+          <a:solidFill>
+            <a:srgbClr val="FFFFFF"/>
+          </a:solidFill>
+          <a:ln w="7620">
+            <a:solidFill>
+              <a:srgbClr val="CDCCCC"/>
+            </a:solidFill>
+            <a:prstDash val="solid"/>
+          </a:ln>
+        </p:spPr>
       </p:sp>
       <p:sp>
         <p:nvSpPr>
@@ -17313,57 +12625,8 @@
         </p:nvSpPr>
         <p:spPr>
           <a:xfrm>
-            <a:off x="7690104" y="2514600"/>
-            <a:ext cx="320040" cy="0"/>
-          </a:xfrm>
-          <a:prstGeom prst="line">
-            <a:avLst/>
-          </a:prstGeom>
-          <a:noFill/>
-          <a:ln w="16510">
-            <a:solidFill>
-              <a:srgbClr val="F37021"/>
-            </a:solidFill>
-            <a:prstDash val="solid"/>
-            <a:tailEnd type="triangle"/>
-          </a:ln>
-        </p:spPr>
-      </p:sp>
-      <p:sp>
-        <p:nvSpPr>
-          <p:cNvPr id="23" name="Shape 21"/>
-          <p:cNvSpPr/>
-          <p:nvPr/>
-        </p:nvSpPr>
-        <p:spPr>
-          <a:xfrm>
-            <a:off x="8119872" y="1792224"/>
-            <a:ext cx="3246120" cy="1444752"/>
-          </a:xfrm>
-          <a:prstGeom prst="rect">
-            <a:avLst/>
-          </a:prstGeom>
-          <a:solidFill>
-            <a:srgbClr val="FFFFFF"/>
-          </a:solidFill>
-          <a:ln w="7620">
-            <a:solidFill>
-              <a:srgbClr val="CDCCCC"/>
-            </a:solidFill>
-            <a:prstDash val="solid"/>
-          </a:ln>
-        </p:spPr>
-      </p:sp>
-      <p:sp>
-        <p:nvSpPr>
-          <p:cNvPr id="24" name="Shape 22"/>
-          <p:cNvSpPr/>
-          <p:nvPr/>
-        </p:nvSpPr>
-        <p:spPr>
-          <a:xfrm>
-            <a:off x="8119872" y="1792224"/>
-            <a:ext cx="73152" cy="1444752"/>
+            <a:off x="8138160" y="1874520"/>
+            <a:ext cx="73152" cy="2194560"/>
           </a:xfrm>
           <a:prstGeom prst="rect">
             <a:avLst/>
@@ -17383,14 +12646,14 @@
       </p:sp>
       <p:sp>
         <p:nvSpPr>
-          <p:cNvPr id="25" name="Shape 23"/>
-          <p:cNvSpPr/>
-          <p:nvPr/>
-        </p:nvSpPr>
-        <p:spPr>
-          <a:xfrm>
-            <a:off x="8394192" y="2066544"/>
-            <a:ext cx="493776" cy="256032"/>
+          <p:cNvPr id="23" name="Shape 21"/>
+          <p:cNvSpPr/>
+          <p:nvPr/>
+        </p:nvSpPr>
+        <p:spPr>
+          <a:xfrm>
+            <a:off x="8412480" y="2157984"/>
+            <a:ext cx="1005840" cy="256032"/>
           </a:xfrm>
           <a:prstGeom prst="rect">
             <a:avLst/>
@@ -17410,14 +12673,14 @@
       </p:sp>
       <p:sp>
         <p:nvSpPr>
-          <p:cNvPr id="26" name="Text 24"/>
-          <p:cNvSpPr/>
-          <p:nvPr/>
-        </p:nvSpPr>
-        <p:spPr>
-          <a:xfrm>
-            <a:off x="8485632" y="2139696"/>
-            <a:ext cx="310896" cy="91440"/>
+          <p:cNvPr id="24" name="Text 22"/>
+          <p:cNvSpPr/>
+          <p:nvPr/>
+        </p:nvSpPr>
+        <p:spPr>
+          <a:xfrm>
+            <a:off x="8503920" y="2231136"/>
+            <a:ext cx="822960" cy="91440"/>
           </a:xfrm>
           <a:prstGeom prst="rect">
             <a:avLst/>
@@ -17441,7 +12704,7 @@
                 <a:ea typeface="Quattrocento Sans" pitchFamily="34" charset="-122"/>
                 <a:cs typeface="Quattrocento Sans" pitchFamily="34" charset="-120"/>
               </a:rPr>
-              <a:t>03</a:t>
+              <a:t>HÀNH ĐỘNG</a:t>
             </a:r>
             <a:endParaRPr lang="en-US" sz="750" dirty="0"/>
           </a:p>
@@ -17449,14 +12712,14 @@
       </p:sp>
       <p:sp>
         <p:nvSpPr>
-          <p:cNvPr id="27" name="Text 25"/>
-          <p:cNvSpPr/>
-          <p:nvPr/>
-        </p:nvSpPr>
-        <p:spPr>
-          <a:xfrm>
-            <a:off x="9061704" y="2075688"/>
-            <a:ext cx="1901952" cy="146304"/>
+          <p:cNvPr id="25" name="Text 23"/>
+          <p:cNvSpPr/>
+          <p:nvPr/>
+        </p:nvSpPr>
+        <p:spPr>
+          <a:xfrm>
+            <a:off x="8412480" y="2697480"/>
+            <a:ext cx="2468880" cy="237744"/>
           </a:xfrm>
           <a:prstGeom prst="rect">
             <a:avLst/>
@@ -17470,11 +12733,11 @@
           </a:bodyPr>
           <a:lstStyle/>
           <a:p>
-            <a:pPr algn="ctr" indent="0" marL="0">
-              <a:buNone/>
-            </a:pPr>
-            <a:r>
-              <a:rPr lang="en-US" sz="1000" b="1" dirty="0">
+            <a:pPr indent="0" marL="0">
+              <a:buNone/>
+            </a:pPr>
+            <a:r>
+              <a:rPr lang="en-US" sz="1500" b="1" dirty="0">
                 <a:solidFill>
                   <a:srgbClr val="19226D"/>
                 </a:solidFill>
@@ -17482,22 +12745,22 @@
                 <a:ea typeface="Quattrocento Sans" pitchFamily="34" charset="-122"/>
                 <a:cs typeface="Quattrocento Sans" pitchFamily="34" charset="-120"/>
               </a:rPr>
-              <a:t>DMS + TELEMETRY</a:t>
-            </a:r>
-            <a:endParaRPr lang="en-US" sz="1000" dirty="0"/>
-          </a:p>
-        </p:txBody>
-      </p:sp>
-      <p:sp>
-        <p:nvSpPr>
-          <p:cNvPr id="28" name="Text 26"/>
-          <p:cNvSpPr/>
-          <p:nvPr/>
-        </p:nvSpPr>
-        <p:spPr>
-          <a:xfrm>
-            <a:off x="8430768" y="2587752"/>
-            <a:ext cx="2615184" cy="310896"/>
+              <a:t>Gán coaching rõ ràng</a:t>
+            </a:r>
+            <a:endParaRPr lang="en-US" sz="1500" dirty="0"/>
+          </a:p>
+        </p:txBody>
+      </p:sp>
+      <p:sp>
+        <p:nvSpPr>
+          <p:cNvPr id="26" name="Text 24"/>
+          <p:cNvSpPr/>
+          <p:nvPr/>
+        </p:nvSpPr>
+        <p:spPr>
+          <a:xfrm>
+            <a:off x="8412480" y="3227832"/>
+            <a:ext cx="2487168" cy="438912"/>
           </a:xfrm>
           <a:prstGeom prst="rect">
             <a:avLst/>
@@ -17511,11 +12774,11 @@
           </a:bodyPr>
           <a:lstStyle/>
           <a:p>
-            <a:pPr algn="ctr" indent="0" marL="0">
-              <a:buNone/>
-            </a:pPr>
-            <a:r>
-              <a:rPr lang="en-US" sz="870" dirty="0">
+            <a:pPr indent="0" marL="0">
+              <a:buNone/>
+            </a:pPr>
+            <a:r>
+              <a:rPr lang="en-US" sz="930" dirty="0">
                 <a:solidFill>
                   <a:srgbClr val="6B7A90"/>
                 </a:solidFill>
@@ -17523,39 +12786,22 @@
                 <a:ea typeface="Quattrocento Sans" pitchFamily="34" charset="-122"/>
                 <a:cs typeface="Quattrocento Sans" pitchFamily="34" charset="-120"/>
               </a:rPr>
-              <a:t>window 15 frame · drowsy 25 · distracted/phone 15</a:t>
-            </a:r>
-            <a:endParaRPr lang="en-US" sz="870" dirty="0"/>
-          </a:p>
-          <a:p>
-            <a:pPr algn="ctr" indent="0" marL="0">
-              <a:buNone/>
-            </a:pPr>
-            <a:r>
-              <a:rPr lang="en-US" sz="870" dirty="0">
-                <a:solidFill>
-                  <a:srgbClr val="6B7A90"/>
-                </a:solidFill>
-                <a:latin typeface="Quattrocento Sans" pitchFamily="34" charset="0"/>
-                <a:ea typeface="Quattrocento Sans" pitchFamily="34" charset="-122"/>
-                <a:cs typeface="Quattrocento Sans" pitchFamily="34" charset="-120"/>
-              </a:rPr>
-              <a:t>speeding 5–15 · harsh accel 10</a:t>
-            </a:r>
-            <a:endParaRPr lang="en-US" sz="870" dirty="0"/>
-          </a:p>
-        </p:txBody>
-      </p:sp>
-      <p:sp>
-        <p:nvSpPr>
-          <p:cNvPr id="29" name="Shape 27"/>
-          <p:cNvSpPr/>
-          <p:nvPr/>
-        </p:nvSpPr>
-        <p:spPr>
-          <a:xfrm>
-            <a:off x="658368" y="3730752"/>
-            <a:ext cx="6473952" cy="1481328"/>
+              <a:t>Kết thúc bằng hướng dẫn liên kết với bằng chứng, không phải cảnh báo chung chung.</a:t>
+            </a:r>
+            <a:endParaRPr lang="en-US" sz="930" dirty="0"/>
+          </a:p>
+        </p:txBody>
+      </p:sp>
+      <p:sp>
+        <p:nvSpPr>
+          <p:cNvPr id="27" name="Shape 25"/>
+          <p:cNvSpPr/>
+          <p:nvPr/>
+        </p:nvSpPr>
+        <p:spPr>
+          <a:xfrm>
+            <a:off x="676656" y="4535424"/>
+            <a:ext cx="10789920" cy="850392"/>
           </a:xfrm>
           <a:prstGeom prst="rect">
             <a:avLst/>
@@ -17575,53 +12821,14 @@
       </p:sp>
       <p:sp>
         <p:nvSpPr>
-          <p:cNvPr id="30" name="Text 28"/>
-          <p:cNvSpPr/>
-          <p:nvPr/>
-        </p:nvSpPr>
-        <p:spPr>
-          <a:xfrm>
-            <a:off x="941832" y="4023360"/>
-            <a:ext cx="5897880" cy="137160"/>
-          </a:xfrm>
-          <a:prstGeom prst="rect">
-            <a:avLst/>
-          </a:prstGeom>
-          <a:noFill/>
-          <a:ln/>
-        </p:spPr>
-        <p:txBody>
-          <a:bodyPr wrap="square" lIns="0" tIns="0" rIns="0" bIns="0" rtlCol="0" anchor="ctr"/>
-          <a:lstStyle/>
-          <a:p>
-            <a:pPr algn="ctr" indent="0" marL="0">
-              <a:buNone/>
-            </a:pPr>
-            <a:r>
-              <a:rPr lang="en-US" sz="1100" b="1" dirty="0">
-                <a:solidFill>
-                  <a:srgbClr val="F37021"/>
-                </a:solidFill>
-                <a:latin typeface="Quattrocento Sans" pitchFamily="34" charset="0"/>
-                <a:ea typeface="Quattrocento Sans" pitchFamily="34" charset="-122"/>
-                <a:cs typeface="Quattrocento Sans" pitchFamily="34" charset="-120"/>
-              </a:rPr>
-              <a:t>ĐIỂM THEO RULE</a:t>
-            </a:r>
-            <a:endParaRPr lang="en-US" sz="1100" dirty="0"/>
-          </a:p>
-        </p:txBody>
-      </p:sp>
-      <p:sp>
-        <p:nvSpPr>
-          <p:cNvPr id="31" name="Text 29"/>
-          <p:cNvSpPr/>
-          <p:nvPr/>
-        </p:nvSpPr>
-        <p:spPr>
-          <a:xfrm>
-            <a:off x="969264" y="4389120"/>
-            <a:ext cx="5852160" cy="438912"/>
+          <p:cNvPr id="28" name="Text 26"/>
+          <p:cNvSpPr/>
+          <p:nvPr/>
+        </p:nvSpPr>
+        <p:spPr>
+          <a:xfrm>
+            <a:off x="914400" y="4818888"/>
+            <a:ext cx="10287000" cy="146304"/>
           </a:xfrm>
           <a:prstGeom prst="rect">
             <a:avLst/>
@@ -17639,7 +12846,7 @@
               <a:buNone/>
             </a:pPr>
             <a:r>
-              <a:rPr lang="en-US" sz="1000" b="1" dirty="0">
+              <a:rPr lang="en-US" sz="1050" b="1" dirty="0">
                 <a:solidFill>
                   <a:srgbClr val="FFFFFF"/>
                 </a:solidFill>
@@ -17647,147 +12854,22 @@
                 <a:ea typeface="Quattrocento Sans" pitchFamily="34" charset="-122"/>
                 <a:cs typeface="Quattrocento Sans" pitchFamily="34" charset="-120"/>
               </a:rPr>
-              <a:t>Bắt đầu từ 100 điểm</a:t>
-            </a:r>
-            <a:endParaRPr lang="en-US" sz="1000" dirty="0"/>
-          </a:p>
-          <a:p>
-            <a:pPr algn="ctr" indent="0" marL="0">
-              <a:buNone/>
-            </a:pPr>
-            <a:r>
-              <a:rPr lang="en-US" sz="1000" b="1" dirty="0">
-                <a:solidFill>
-                  <a:srgbClr val="FFFFFF"/>
-                </a:solidFill>
-                <a:latin typeface="Quattrocento Sans" pitchFamily="34" charset="0"/>
-                <a:ea typeface="Quattrocento Sans" pitchFamily="34" charset="-122"/>
-                <a:cs typeface="Quattrocento Sans" pitchFamily="34" charset="-120"/>
-              </a:rPr>
-              <a:t>Trừ theo khoảng cách, attention, handling và làn đường</a:t>
-            </a:r>
-            <a:endParaRPr lang="en-US" sz="1000" dirty="0"/>
-          </a:p>
-          <a:p>
-            <a:pPr algn="ctr" indent="0" marL="0">
-              <a:buNone/>
-            </a:pPr>
-            <a:r>
-              <a:rPr lang="en-US" sz="1000" b="1" dirty="0">
-                <a:solidFill>
-                  <a:srgbClr val="FFFFFF"/>
-                </a:solidFill>
-                <a:latin typeface="Quattrocento Sans" pitchFamily="34" charset="0"/>
-                <a:ea typeface="Quattrocento Sans" pitchFamily="34" charset="-122"/>
-                <a:cs typeface="Quattrocento Sans" pitchFamily="34" charset="-120"/>
-              </a:rPr>
-              <a:t>Rủi ro kết hợp chỉ tăng mức độ, không trừ hai lần</a:t>
-            </a:r>
-            <a:endParaRPr lang="en-US" sz="1000" dirty="0"/>
-          </a:p>
-        </p:txBody>
-      </p:sp>
-      <p:sp>
-        <p:nvSpPr>
-          <p:cNvPr id="32" name="Shape 30"/>
-          <p:cNvSpPr/>
-          <p:nvPr/>
-        </p:nvSpPr>
-        <p:spPr>
-          <a:xfrm>
-            <a:off x="7479792" y="3730752"/>
-            <a:ext cx="4005072" cy="1481328"/>
-          </a:xfrm>
-          <a:prstGeom prst="rect">
-            <a:avLst/>
-          </a:prstGeom>
-          <a:solidFill>
-            <a:srgbClr val="FFFFFF"/>
-          </a:solidFill>
-          <a:ln w="7620">
-            <a:solidFill>
-              <a:srgbClr val="CDCCCC"/>
-            </a:solidFill>
-            <a:prstDash val="solid"/>
-          </a:ln>
-        </p:spPr>
-      </p:sp>
-      <p:sp>
-        <p:nvSpPr>
-          <p:cNvPr id="33" name="Shape 31"/>
-          <p:cNvSpPr/>
-          <p:nvPr/>
-        </p:nvSpPr>
-        <p:spPr>
-          <a:xfrm>
-            <a:off x="7479792" y="3730752"/>
-            <a:ext cx="73152" cy="1481328"/>
-          </a:xfrm>
-          <a:prstGeom prst="rect">
-            <a:avLst/>
-          </a:prstGeom>
-          <a:solidFill>
-            <a:srgbClr val="F37021"/>
-          </a:solidFill>
-          <a:ln w="7620">
-            <a:solidFill>
-              <a:srgbClr val="F37021">
-                <a:alpha val="0"/>
-              </a:srgbClr>
-            </a:solidFill>
-            <a:prstDash val="solid"/>
-          </a:ln>
-        </p:spPr>
-      </p:sp>
-      <p:sp>
-        <p:nvSpPr>
-          <p:cNvPr id="34" name="Text 32"/>
-          <p:cNvSpPr/>
-          <p:nvPr/>
-        </p:nvSpPr>
-        <p:spPr>
-          <a:xfrm>
-            <a:off x="7827264" y="4023360"/>
-            <a:ext cx="3310128" cy="137160"/>
-          </a:xfrm>
-          <a:prstGeom prst="rect">
-            <a:avLst/>
-          </a:prstGeom>
-          <a:noFill/>
-          <a:ln/>
-        </p:spPr>
-        <p:txBody>
-          <a:bodyPr wrap="square" lIns="0" tIns="0" rIns="0" bIns="0" rtlCol="0" anchor="ctr"/>
-          <a:lstStyle/>
-          <a:p>
-            <a:pPr algn="ctr" indent="0" marL="0">
-              <a:buNone/>
-            </a:pPr>
-            <a:r>
-              <a:rPr lang="en-US" sz="1020" b="1" dirty="0">
-                <a:solidFill>
-                  <a:srgbClr val="F37021"/>
-                </a:solidFill>
-                <a:latin typeface="Quattrocento Sans" pitchFamily="34" charset="0"/>
-                <a:ea typeface="Quattrocento Sans" pitchFamily="34" charset="-122"/>
-                <a:cs typeface="Quattrocento Sans" pitchFamily="34" charset="-120"/>
-              </a:rPr>
-              <a:t>EVENT WINDOW → COACHING</a:t>
-            </a:r>
-            <a:endParaRPr lang="en-US" sz="1020" dirty="0"/>
-          </a:p>
-        </p:txBody>
-      </p:sp>
-      <p:sp>
-        <p:nvSpPr>
-          <p:cNvPr id="35" name="Text 33"/>
-          <p:cNvSpPr/>
-          <p:nvPr/>
-        </p:nvSpPr>
-        <p:spPr>
-          <a:xfrm>
-            <a:off x="7845552" y="4389120"/>
-            <a:ext cx="3264408" cy="457200"/>
+              <a:t>MVP ĐÃ SẴN SÀNG: dashboard · trip replay · event evidence · điểm theo rule · coaching có ngữ cảnh.</a:t>
+            </a:r>
+            <a:endParaRPr lang="en-US" sz="1050" dirty="0"/>
+          </a:p>
+        </p:txBody>
+      </p:sp>
+      <p:sp>
+        <p:nvSpPr>
+          <p:cNvPr id="29" name="Text 27"/>
+          <p:cNvSpPr/>
+          <p:nvPr/>
+        </p:nvSpPr>
+        <p:spPr>
+          <a:xfrm>
+            <a:off x="548640" y="6071616"/>
+            <a:ext cx="10789920" cy="182880"/>
           </a:xfrm>
           <a:prstGeom prst="rect">
             <a:avLst/>
@@ -17801,147 +12883,6 @@
           </a:bodyPr>
           <a:lstStyle/>
           <a:p>
-            <a:pPr algn="ctr" indent="0" marL="0">
-              <a:buNone/>
-            </a:pPr>
-            <a:r>
-              <a:rPr lang="en-US" sz="900" b="1" dirty="0">
-                <a:solidFill>
-                  <a:srgbClr val="19226D"/>
-                </a:solidFill>
-                <a:latin typeface="Quattrocento Sans" pitchFamily="34" charset="0"/>
-                <a:ea typeface="Quattrocento Sans" pitchFamily="34" charset="-122"/>
-                <a:cs typeface="Quattrocento Sans" pitchFamily="34" charset="-120"/>
-              </a:rPr>
-              <a:t>DMS cùng trạng thái: 1 event / 5 giây</a:t>
-            </a:r>
-            <a:endParaRPr lang="en-US" sz="900" dirty="0"/>
-          </a:p>
-          <a:p>
-            <a:pPr algn="ctr" indent="0" marL="0">
-              <a:buNone/>
-            </a:pPr>
-            <a:r>
-              <a:rPr lang="en-US" sz="900" b="1" dirty="0">
-                <a:solidFill>
-                  <a:srgbClr val="19226D"/>
-                </a:solidFill>
-                <a:latin typeface="Quattrocento Sans" pitchFamily="34" charset="0"/>
-                <a:ea typeface="Quattrocento Sans" pitchFamily="34" charset="-122"/>
-                <a:cs typeface="Quattrocento Sans" pitchFamily="34" charset="-120"/>
-              </a:rPr>
-              <a:t>Trạng thái khác mới tạo transition</a:t>
-            </a:r>
-            <a:endParaRPr lang="en-US" sz="900" dirty="0"/>
-          </a:p>
-          <a:p>
-            <a:pPr algn="ctr" indent="0" marL="0">
-              <a:buNone/>
-            </a:pPr>
-            <a:r>
-              <a:rPr lang="en-US" sz="900" b="1" dirty="0">
-                <a:solidFill>
-                  <a:srgbClr val="19226D"/>
-                </a:solidFill>
-                <a:latin typeface="Quattrocento Sans" pitchFamily="34" charset="0"/>
-                <a:ea typeface="Quattrocento Sans" pitchFamily="34" charset="-122"/>
-                <a:cs typeface="Quattrocento Sans" pitchFamily="34" charset="-120"/>
-              </a:rPr>
-              <a:t>Severity 4–5: visual 10–15s</a:t>
-            </a:r>
-            <a:endParaRPr lang="en-US" sz="900" dirty="0"/>
-          </a:p>
-        </p:txBody>
-      </p:sp>
-      <p:sp>
-        <p:nvSpPr>
-          <p:cNvPr id="36" name="Shape 34"/>
-          <p:cNvSpPr/>
-          <p:nvPr/>
-        </p:nvSpPr>
-        <p:spPr>
-          <a:xfrm>
-            <a:off x="658368" y="5440680"/>
-            <a:ext cx="10826496" cy="384048"/>
-          </a:xfrm>
-          <a:prstGeom prst="rect">
-            <a:avLst/>
-          </a:prstGeom>
-          <a:solidFill>
-            <a:srgbClr val="FFF0E5"/>
-          </a:solidFill>
-          <a:ln w="7620">
-            <a:solidFill>
-              <a:srgbClr val="F37021"/>
-            </a:solidFill>
-            <a:prstDash val="solid"/>
-          </a:ln>
-        </p:spPr>
-      </p:sp>
-      <p:sp>
-        <p:nvSpPr>
-          <p:cNvPr id="37" name="Text 35"/>
-          <p:cNvSpPr/>
-          <p:nvPr/>
-        </p:nvSpPr>
-        <p:spPr>
-          <a:xfrm>
-            <a:off x="896112" y="5577840"/>
-            <a:ext cx="10332720" cy="109728"/>
-          </a:xfrm>
-          <a:prstGeom prst="rect">
-            <a:avLst/>
-          </a:prstGeom>
-          <a:noFill/>
-          <a:ln/>
-        </p:spPr>
-        <p:txBody>
-          <a:bodyPr wrap="square" lIns="0" tIns="0" rIns="0" bIns="0" rtlCol="0" anchor="ctr">
-            <a:normAutofit/>
-          </a:bodyPr>
-          <a:lstStyle/>
-          <a:p>
-            <a:pPr algn="ctr" indent="0" marL="0">
-              <a:buNone/>
-            </a:pPr>
-            <a:r>
-              <a:rPr lang="en-US" sz="950" b="1" dirty="0">
-                <a:solidFill>
-                  <a:srgbClr val="19226D"/>
-                </a:solidFill>
-                <a:latin typeface="Quattrocento Sans" pitchFamily="34" charset="0"/>
-                <a:ea typeface="Quattrocento Sans" pitchFamily="34" charset="-122"/>
-                <a:cs typeface="Quattrocento Sans" pitchFamily="34" charset="-120"/>
-              </a:rPr>
-              <a:t>ĐIỂM THEO RULE KHÔNG ĐƯỢC DÙNG ĐỂ XẾP HẠNG HAY TÍNH TRUNG BÌNH FLEET.</a:t>
-            </a:r>
-            <a:endParaRPr lang="en-US" sz="950" dirty="0"/>
-          </a:p>
-        </p:txBody>
-      </p:sp>
-      <p:sp>
-        <p:nvSpPr>
-          <p:cNvPr id="38" name="Text 36"/>
-          <p:cNvSpPr/>
-          <p:nvPr/>
-        </p:nvSpPr>
-        <p:spPr>
-          <a:xfrm>
-            <a:off x="548640" y="6071616"/>
-            <a:ext cx="10789920" cy="182880"/>
-          </a:xfrm>
-          <a:prstGeom prst="rect">
-            <a:avLst/>
-          </a:prstGeom>
-          <a:noFill/>
-          <a:ln/>
-        </p:spPr>
-        <p:txBody>
-          <a:bodyPr wrap="square" lIns="0" tIns="0" rIns="0" bIns="0" rtlCol="0" anchor="ctr">
-            <a:normAutofit/>
-          </a:bodyPr>
-          <a:lstStyle/>
-          <a:p>
             <a:pPr indent="0" marL="0">
               <a:buNone/>
             </a:pPr>
@@ -17954,7 +12895,7 @@
                 <a:ea typeface="Quattrocento Sans" pitchFamily="34" charset="-122"/>
                 <a:cs typeface="Quattrocento Sans" pitchFamily="34" charset="-120"/>
               </a:rPr>
-              <a:t>Nguồn: RiskScorer v1 · event window · policy coaching.</a:t>
+              <a:t>Demo flow: dashboard → chuyến rủi ro → timeline → evidence → điểm theo rule → coaching.</a:t>
             </a:r>
             <a:endParaRPr lang="en-US" sz="980" dirty="0"/>
           </a:p>
